--- a/Presentation/prezentare_Lorincz_Tamas_HU.pptx
+++ b/Presentation/prezentare_Lorincz_Tamas_HU.pptx
@@ -308,13 +308,20 @@
           </a:bodyPr>
           <a:lstStyle>
             <a:lvl1pPr lvl="0" marR="0" rtl="0" algn="l">
-              <a:spcBef>
-                <a:spcPts val="0"/>
-              </a:spcBef>
-              <a:spcAft>
-                <a:spcPts val="0"/>
-              </a:spcAft>
+              <a:lnSpc>
+                <a:spcPct val="100000"/>
+              </a:lnSpc>
+              <a:spcBef>
+                <a:spcPts val="0"/>
+              </a:spcBef>
+              <a:spcAft>
+                <a:spcPts val="0"/>
+              </a:spcAft>
+              <a:buClr>
+                <a:srgbClr val="000000"/>
+              </a:buClr>
               <a:buSzPts val="1400"/>
+              <a:buFont typeface="Arial"/>
               <a:buNone/>
               <a:defRPr b="0" i="0" sz="1200" u="none" cap="none" strike="noStrike">
                 <a:solidFill>
@@ -327,13 +334,20 @@
               </a:defRPr>
             </a:lvl1pPr>
             <a:lvl2pPr lvl="1" marR="0" rtl="0" algn="l">
-              <a:spcBef>
-                <a:spcPts val="0"/>
-              </a:spcBef>
-              <a:spcAft>
-                <a:spcPts val="0"/>
-              </a:spcAft>
+              <a:lnSpc>
+                <a:spcPct val="100000"/>
+              </a:lnSpc>
+              <a:spcBef>
+                <a:spcPts val="0"/>
+              </a:spcBef>
+              <a:spcAft>
+                <a:spcPts val="0"/>
+              </a:spcAft>
+              <a:buClr>
+                <a:srgbClr val="000000"/>
+              </a:buClr>
               <a:buSzPts val="1400"/>
+              <a:buFont typeface="Arial"/>
               <a:buNone/>
               <a:defRPr b="0" i="0" sz="1800" u="none" cap="none" strike="noStrike">
                 <a:solidFill>
@@ -346,13 +360,20 @@
               </a:defRPr>
             </a:lvl2pPr>
             <a:lvl3pPr lvl="2" marR="0" rtl="0" algn="l">
-              <a:spcBef>
-                <a:spcPts val="0"/>
-              </a:spcBef>
-              <a:spcAft>
-                <a:spcPts val="0"/>
-              </a:spcAft>
+              <a:lnSpc>
+                <a:spcPct val="100000"/>
+              </a:lnSpc>
+              <a:spcBef>
+                <a:spcPts val="0"/>
+              </a:spcBef>
+              <a:spcAft>
+                <a:spcPts val="0"/>
+              </a:spcAft>
+              <a:buClr>
+                <a:srgbClr val="000000"/>
+              </a:buClr>
               <a:buSzPts val="1400"/>
+              <a:buFont typeface="Arial"/>
               <a:buNone/>
               <a:defRPr b="0" i="0" sz="1800" u="none" cap="none" strike="noStrike">
                 <a:solidFill>
@@ -365,13 +386,20 @@
               </a:defRPr>
             </a:lvl3pPr>
             <a:lvl4pPr lvl="3" marR="0" rtl="0" algn="l">
-              <a:spcBef>
-                <a:spcPts val="0"/>
-              </a:spcBef>
-              <a:spcAft>
-                <a:spcPts val="0"/>
-              </a:spcAft>
+              <a:lnSpc>
+                <a:spcPct val="100000"/>
+              </a:lnSpc>
+              <a:spcBef>
+                <a:spcPts val="0"/>
+              </a:spcBef>
+              <a:spcAft>
+                <a:spcPts val="0"/>
+              </a:spcAft>
+              <a:buClr>
+                <a:srgbClr val="000000"/>
+              </a:buClr>
               <a:buSzPts val="1400"/>
+              <a:buFont typeface="Arial"/>
               <a:buNone/>
               <a:defRPr b="0" i="0" sz="1800" u="none" cap="none" strike="noStrike">
                 <a:solidFill>
@@ -384,13 +412,20 @@
               </a:defRPr>
             </a:lvl4pPr>
             <a:lvl5pPr lvl="4" marR="0" rtl="0" algn="l">
-              <a:spcBef>
-                <a:spcPts val="0"/>
-              </a:spcBef>
-              <a:spcAft>
-                <a:spcPts val="0"/>
-              </a:spcAft>
+              <a:lnSpc>
+                <a:spcPct val="100000"/>
+              </a:lnSpc>
+              <a:spcBef>
+                <a:spcPts val="0"/>
+              </a:spcBef>
+              <a:spcAft>
+                <a:spcPts val="0"/>
+              </a:spcAft>
+              <a:buClr>
+                <a:srgbClr val="000000"/>
+              </a:buClr>
               <a:buSzPts val="1400"/>
+              <a:buFont typeface="Arial"/>
               <a:buNone/>
               <a:defRPr b="0" i="0" sz="1800" u="none" cap="none" strike="noStrike">
                 <a:solidFill>
@@ -403,13 +438,20 @@
               </a:defRPr>
             </a:lvl5pPr>
             <a:lvl6pPr lvl="5" marR="0" rtl="0" algn="l">
-              <a:spcBef>
-                <a:spcPts val="0"/>
-              </a:spcBef>
-              <a:spcAft>
-                <a:spcPts val="0"/>
-              </a:spcAft>
+              <a:lnSpc>
+                <a:spcPct val="100000"/>
+              </a:lnSpc>
+              <a:spcBef>
+                <a:spcPts val="0"/>
+              </a:spcBef>
+              <a:spcAft>
+                <a:spcPts val="0"/>
+              </a:spcAft>
+              <a:buClr>
+                <a:srgbClr val="000000"/>
+              </a:buClr>
               <a:buSzPts val="1400"/>
+              <a:buFont typeface="Arial"/>
               <a:buNone/>
               <a:defRPr b="0" i="0" sz="1800" u="none" cap="none" strike="noStrike">
                 <a:solidFill>
@@ -422,13 +464,20 @@
               </a:defRPr>
             </a:lvl6pPr>
             <a:lvl7pPr lvl="6" marR="0" rtl="0" algn="l">
-              <a:spcBef>
-                <a:spcPts val="0"/>
-              </a:spcBef>
-              <a:spcAft>
-                <a:spcPts val="0"/>
-              </a:spcAft>
+              <a:lnSpc>
+                <a:spcPct val="100000"/>
+              </a:lnSpc>
+              <a:spcBef>
+                <a:spcPts val="0"/>
+              </a:spcBef>
+              <a:spcAft>
+                <a:spcPts val="0"/>
+              </a:spcAft>
+              <a:buClr>
+                <a:srgbClr val="000000"/>
+              </a:buClr>
               <a:buSzPts val="1400"/>
+              <a:buFont typeface="Arial"/>
               <a:buNone/>
               <a:defRPr b="0" i="0" sz="1800" u="none" cap="none" strike="noStrike">
                 <a:solidFill>
@@ -441,13 +490,20 @@
               </a:defRPr>
             </a:lvl7pPr>
             <a:lvl8pPr lvl="7" marR="0" rtl="0" algn="l">
-              <a:spcBef>
-                <a:spcPts val="0"/>
-              </a:spcBef>
-              <a:spcAft>
-                <a:spcPts val="0"/>
-              </a:spcAft>
+              <a:lnSpc>
+                <a:spcPct val="100000"/>
+              </a:lnSpc>
+              <a:spcBef>
+                <a:spcPts val="0"/>
+              </a:spcBef>
+              <a:spcAft>
+                <a:spcPts val="0"/>
+              </a:spcAft>
+              <a:buClr>
+                <a:srgbClr val="000000"/>
+              </a:buClr>
               <a:buSzPts val="1400"/>
+              <a:buFont typeface="Arial"/>
               <a:buNone/>
               <a:defRPr b="0" i="0" sz="1800" u="none" cap="none" strike="noStrike">
                 <a:solidFill>
@@ -460,13 +516,20 @@
               </a:defRPr>
             </a:lvl8pPr>
             <a:lvl9pPr lvl="8" marR="0" rtl="0" algn="l">
-              <a:spcBef>
-                <a:spcPts val="0"/>
-              </a:spcBef>
-              <a:spcAft>
-                <a:spcPts val="0"/>
-              </a:spcAft>
+              <a:lnSpc>
+                <a:spcPct val="100000"/>
+              </a:lnSpc>
+              <a:spcBef>
+                <a:spcPts val="0"/>
+              </a:spcBef>
+              <a:spcAft>
+                <a:spcPts val="0"/>
+              </a:spcAft>
+              <a:buClr>
+                <a:srgbClr val="000000"/>
+              </a:buClr>
               <a:buSzPts val="1400"/>
+              <a:buFont typeface="Arial"/>
               <a:buNone/>
               <a:defRPr b="0" i="0" sz="1800" u="none" cap="none" strike="noStrike">
                 <a:solidFill>
@@ -509,13 +572,20 @@
           </a:bodyPr>
           <a:lstStyle>
             <a:lvl1pPr lvl="0" marR="0" rtl="0" algn="r">
-              <a:spcBef>
-                <a:spcPts val="0"/>
-              </a:spcBef>
-              <a:spcAft>
-                <a:spcPts val="0"/>
-              </a:spcAft>
+              <a:lnSpc>
+                <a:spcPct val="100000"/>
+              </a:lnSpc>
+              <a:spcBef>
+                <a:spcPts val="0"/>
+              </a:spcBef>
+              <a:spcAft>
+                <a:spcPts val="0"/>
+              </a:spcAft>
+              <a:buClr>
+                <a:srgbClr val="000000"/>
+              </a:buClr>
               <a:buSzPts val="1400"/>
+              <a:buFont typeface="Arial"/>
               <a:buNone/>
               <a:defRPr b="0" i="0" sz="1200" u="none" cap="none" strike="noStrike">
                 <a:solidFill>
@@ -528,13 +598,20 @@
               </a:defRPr>
             </a:lvl1pPr>
             <a:lvl2pPr lvl="1" marR="0" rtl="0" algn="l">
-              <a:spcBef>
-                <a:spcPts val="0"/>
-              </a:spcBef>
-              <a:spcAft>
-                <a:spcPts val="0"/>
-              </a:spcAft>
+              <a:lnSpc>
+                <a:spcPct val="100000"/>
+              </a:lnSpc>
+              <a:spcBef>
+                <a:spcPts val="0"/>
+              </a:spcBef>
+              <a:spcAft>
+                <a:spcPts val="0"/>
+              </a:spcAft>
+              <a:buClr>
+                <a:srgbClr val="000000"/>
+              </a:buClr>
               <a:buSzPts val="1400"/>
+              <a:buFont typeface="Arial"/>
               <a:buNone/>
               <a:defRPr b="0" i="0" sz="1800" u="none" cap="none" strike="noStrike">
                 <a:solidFill>
@@ -547,13 +624,20 @@
               </a:defRPr>
             </a:lvl2pPr>
             <a:lvl3pPr lvl="2" marR="0" rtl="0" algn="l">
-              <a:spcBef>
-                <a:spcPts val="0"/>
-              </a:spcBef>
-              <a:spcAft>
-                <a:spcPts val="0"/>
-              </a:spcAft>
+              <a:lnSpc>
+                <a:spcPct val="100000"/>
+              </a:lnSpc>
+              <a:spcBef>
+                <a:spcPts val="0"/>
+              </a:spcBef>
+              <a:spcAft>
+                <a:spcPts val="0"/>
+              </a:spcAft>
+              <a:buClr>
+                <a:srgbClr val="000000"/>
+              </a:buClr>
               <a:buSzPts val="1400"/>
+              <a:buFont typeface="Arial"/>
               <a:buNone/>
               <a:defRPr b="0" i="0" sz="1800" u="none" cap="none" strike="noStrike">
                 <a:solidFill>
@@ -566,13 +650,20 @@
               </a:defRPr>
             </a:lvl3pPr>
             <a:lvl4pPr lvl="3" marR="0" rtl="0" algn="l">
-              <a:spcBef>
-                <a:spcPts val="0"/>
-              </a:spcBef>
-              <a:spcAft>
-                <a:spcPts val="0"/>
-              </a:spcAft>
+              <a:lnSpc>
+                <a:spcPct val="100000"/>
+              </a:lnSpc>
+              <a:spcBef>
+                <a:spcPts val="0"/>
+              </a:spcBef>
+              <a:spcAft>
+                <a:spcPts val="0"/>
+              </a:spcAft>
+              <a:buClr>
+                <a:srgbClr val="000000"/>
+              </a:buClr>
               <a:buSzPts val="1400"/>
+              <a:buFont typeface="Arial"/>
               <a:buNone/>
               <a:defRPr b="0" i="0" sz="1800" u="none" cap="none" strike="noStrike">
                 <a:solidFill>
@@ -585,13 +676,20 @@
               </a:defRPr>
             </a:lvl4pPr>
             <a:lvl5pPr lvl="4" marR="0" rtl="0" algn="l">
-              <a:spcBef>
-                <a:spcPts val="0"/>
-              </a:spcBef>
-              <a:spcAft>
-                <a:spcPts val="0"/>
-              </a:spcAft>
+              <a:lnSpc>
+                <a:spcPct val="100000"/>
+              </a:lnSpc>
+              <a:spcBef>
+                <a:spcPts val="0"/>
+              </a:spcBef>
+              <a:spcAft>
+                <a:spcPts val="0"/>
+              </a:spcAft>
+              <a:buClr>
+                <a:srgbClr val="000000"/>
+              </a:buClr>
               <a:buSzPts val="1400"/>
+              <a:buFont typeface="Arial"/>
               <a:buNone/>
               <a:defRPr b="0" i="0" sz="1800" u="none" cap="none" strike="noStrike">
                 <a:solidFill>
@@ -604,13 +702,20 @@
               </a:defRPr>
             </a:lvl5pPr>
             <a:lvl6pPr lvl="5" marR="0" rtl="0" algn="l">
-              <a:spcBef>
-                <a:spcPts val="0"/>
-              </a:spcBef>
-              <a:spcAft>
-                <a:spcPts val="0"/>
-              </a:spcAft>
+              <a:lnSpc>
+                <a:spcPct val="100000"/>
+              </a:lnSpc>
+              <a:spcBef>
+                <a:spcPts val="0"/>
+              </a:spcBef>
+              <a:spcAft>
+                <a:spcPts val="0"/>
+              </a:spcAft>
+              <a:buClr>
+                <a:srgbClr val="000000"/>
+              </a:buClr>
               <a:buSzPts val="1400"/>
+              <a:buFont typeface="Arial"/>
               <a:buNone/>
               <a:defRPr b="0" i="0" sz="1800" u="none" cap="none" strike="noStrike">
                 <a:solidFill>
@@ -623,13 +728,20 @@
               </a:defRPr>
             </a:lvl6pPr>
             <a:lvl7pPr lvl="6" marR="0" rtl="0" algn="l">
-              <a:spcBef>
-                <a:spcPts val="0"/>
-              </a:spcBef>
-              <a:spcAft>
-                <a:spcPts val="0"/>
-              </a:spcAft>
+              <a:lnSpc>
+                <a:spcPct val="100000"/>
+              </a:lnSpc>
+              <a:spcBef>
+                <a:spcPts val="0"/>
+              </a:spcBef>
+              <a:spcAft>
+                <a:spcPts val="0"/>
+              </a:spcAft>
+              <a:buClr>
+                <a:srgbClr val="000000"/>
+              </a:buClr>
               <a:buSzPts val="1400"/>
+              <a:buFont typeface="Arial"/>
               <a:buNone/>
               <a:defRPr b="0" i="0" sz="1800" u="none" cap="none" strike="noStrike">
                 <a:solidFill>
@@ -642,13 +754,20 @@
               </a:defRPr>
             </a:lvl7pPr>
             <a:lvl8pPr lvl="7" marR="0" rtl="0" algn="l">
-              <a:spcBef>
-                <a:spcPts val="0"/>
-              </a:spcBef>
-              <a:spcAft>
-                <a:spcPts val="0"/>
-              </a:spcAft>
+              <a:lnSpc>
+                <a:spcPct val="100000"/>
+              </a:lnSpc>
+              <a:spcBef>
+                <a:spcPts val="0"/>
+              </a:spcBef>
+              <a:spcAft>
+                <a:spcPts val="0"/>
+              </a:spcAft>
+              <a:buClr>
+                <a:srgbClr val="000000"/>
+              </a:buClr>
               <a:buSzPts val="1400"/>
+              <a:buFont typeface="Arial"/>
               <a:buNone/>
               <a:defRPr b="0" i="0" sz="1800" u="none" cap="none" strike="noStrike">
                 <a:solidFill>
@@ -661,13 +780,20 @@
               </a:defRPr>
             </a:lvl8pPr>
             <a:lvl9pPr lvl="8" marR="0" rtl="0" algn="l">
-              <a:spcBef>
-                <a:spcPts val="0"/>
-              </a:spcBef>
-              <a:spcAft>
-                <a:spcPts val="0"/>
-              </a:spcAft>
+              <a:lnSpc>
+                <a:spcPct val="100000"/>
+              </a:lnSpc>
+              <a:spcBef>
+                <a:spcPts val="0"/>
+              </a:spcBef>
+              <a:spcAft>
+                <a:spcPts val="0"/>
+              </a:spcAft>
+              <a:buClr>
+                <a:srgbClr val="000000"/>
+              </a:buClr>
               <a:buSzPts val="1400"/>
+              <a:buFont typeface="Arial"/>
               <a:buNone/>
               <a:defRPr b="0" i="0" sz="1800" u="none" cap="none" strike="noStrike">
                 <a:solidFill>
@@ -755,13 +881,20 @@
           </a:bodyPr>
           <a:lstStyle>
             <a:lvl1pPr indent="-228600" lvl="0" marL="457200" marR="0" rtl="0" algn="l">
-              <a:spcBef>
-                <a:spcPts val="0"/>
-              </a:spcBef>
-              <a:spcAft>
-                <a:spcPts val="0"/>
-              </a:spcAft>
+              <a:lnSpc>
+                <a:spcPct val="100000"/>
+              </a:lnSpc>
+              <a:spcBef>
+                <a:spcPts val="0"/>
+              </a:spcBef>
+              <a:spcAft>
+                <a:spcPts val="0"/>
+              </a:spcAft>
+              <a:buClr>
+                <a:srgbClr val="000000"/>
+              </a:buClr>
               <a:buSzPts val="1400"/>
+              <a:buFont typeface="Arial"/>
               <a:buNone/>
               <a:defRPr b="0" i="0" sz="1200" u="none" cap="none" strike="noStrike">
                 <a:solidFill>
@@ -774,13 +907,20 @@
               </a:defRPr>
             </a:lvl1pPr>
             <a:lvl2pPr indent="-228600" lvl="1" marL="914400" marR="0" rtl="0" algn="l">
-              <a:spcBef>
-                <a:spcPts val="0"/>
-              </a:spcBef>
-              <a:spcAft>
-                <a:spcPts val="0"/>
-              </a:spcAft>
+              <a:lnSpc>
+                <a:spcPct val="100000"/>
+              </a:lnSpc>
+              <a:spcBef>
+                <a:spcPts val="0"/>
+              </a:spcBef>
+              <a:spcAft>
+                <a:spcPts val="0"/>
+              </a:spcAft>
+              <a:buClr>
+                <a:srgbClr val="000000"/>
+              </a:buClr>
               <a:buSzPts val="1400"/>
+              <a:buFont typeface="Arial"/>
               <a:buNone/>
               <a:defRPr b="0" i="0" sz="1200" u="none" cap="none" strike="noStrike">
                 <a:solidFill>
@@ -793,13 +933,20 @@
               </a:defRPr>
             </a:lvl2pPr>
             <a:lvl3pPr indent="-228600" lvl="2" marL="1371600" marR="0" rtl="0" algn="l">
-              <a:spcBef>
-                <a:spcPts val="0"/>
-              </a:spcBef>
-              <a:spcAft>
-                <a:spcPts val="0"/>
-              </a:spcAft>
+              <a:lnSpc>
+                <a:spcPct val="100000"/>
+              </a:lnSpc>
+              <a:spcBef>
+                <a:spcPts val="0"/>
+              </a:spcBef>
+              <a:spcAft>
+                <a:spcPts val="0"/>
+              </a:spcAft>
+              <a:buClr>
+                <a:srgbClr val="000000"/>
+              </a:buClr>
               <a:buSzPts val="1400"/>
+              <a:buFont typeface="Arial"/>
               <a:buNone/>
               <a:defRPr b="0" i="0" sz="1200" u="none" cap="none" strike="noStrike">
                 <a:solidFill>
@@ -812,13 +959,20 @@
               </a:defRPr>
             </a:lvl3pPr>
             <a:lvl4pPr indent="-228600" lvl="3" marL="1828800" marR="0" rtl="0" algn="l">
-              <a:spcBef>
-                <a:spcPts val="0"/>
-              </a:spcBef>
-              <a:spcAft>
-                <a:spcPts val="0"/>
-              </a:spcAft>
+              <a:lnSpc>
+                <a:spcPct val="100000"/>
+              </a:lnSpc>
+              <a:spcBef>
+                <a:spcPts val="0"/>
+              </a:spcBef>
+              <a:spcAft>
+                <a:spcPts val="0"/>
+              </a:spcAft>
+              <a:buClr>
+                <a:srgbClr val="000000"/>
+              </a:buClr>
               <a:buSzPts val="1400"/>
+              <a:buFont typeface="Arial"/>
               <a:buNone/>
               <a:defRPr b="0" i="0" sz="1200" u="none" cap="none" strike="noStrike">
                 <a:solidFill>
@@ -831,13 +985,20 @@
               </a:defRPr>
             </a:lvl4pPr>
             <a:lvl5pPr indent="-228600" lvl="4" marL="2286000" marR="0" rtl="0" algn="l">
-              <a:spcBef>
-                <a:spcPts val="0"/>
-              </a:spcBef>
-              <a:spcAft>
-                <a:spcPts val="0"/>
-              </a:spcAft>
+              <a:lnSpc>
+                <a:spcPct val="100000"/>
+              </a:lnSpc>
+              <a:spcBef>
+                <a:spcPts val="0"/>
+              </a:spcBef>
+              <a:spcAft>
+                <a:spcPts val="0"/>
+              </a:spcAft>
+              <a:buClr>
+                <a:srgbClr val="000000"/>
+              </a:buClr>
               <a:buSzPts val="1400"/>
+              <a:buFont typeface="Arial"/>
               <a:buNone/>
               <a:defRPr b="0" i="0" sz="1200" u="none" cap="none" strike="noStrike">
                 <a:solidFill>
@@ -850,13 +1011,20 @@
               </a:defRPr>
             </a:lvl5pPr>
             <a:lvl6pPr indent="-228600" lvl="5" marL="2743200" marR="0" rtl="0" algn="l">
-              <a:spcBef>
-                <a:spcPts val="0"/>
-              </a:spcBef>
-              <a:spcAft>
-                <a:spcPts val="0"/>
-              </a:spcAft>
+              <a:lnSpc>
+                <a:spcPct val="100000"/>
+              </a:lnSpc>
+              <a:spcBef>
+                <a:spcPts val="0"/>
+              </a:spcBef>
+              <a:spcAft>
+                <a:spcPts val="0"/>
+              </a:spcAft>
+              <a:buClr>
+                <a:srgbClr val="000000"/>
+              </a:buClr>
               <a:buSzPts val="1400"/>
+              <a:buFont typeface="Arial"/>
               <a:buNone/>
               <a:defRPr b="0" i="0" sz="1200" u="none" cap="none" strike="noStrike">
                 <a:solidFill>
@@ -869,13 +1037,20 @@
               </a:defRPr>
             </a:lvl6pPr>
             <a:lvl7pPr indent="-228600" lvl="6" marL="3200400" marR="0" rtl="0" algn="l">
-              <a:spcBef>
-                <a:spcPts val="0"/>
-              </a:spcBef>
-              <a:spcAft>
-                <a:spcPts val="0"/>
-              </a:spcAft>
+              <a:lnSpc>
+                <a:spcPct val="100000"/>
+              </a:lnSpc>
+              <a:spcBef>
+                <a:spcPts val="0"/>
+              </a:spcBef>
+              <a:spcAft>
+                <a:spcPts val="0"/>
+              </a:spcAft>
+              <a:buClr>
+                <a:srgbClr val="000000"/>
+              </a:buClr>
               <a:buSzPts val="1400"/>
+              <a:buFont typeface="Arial"/>
               <a:buNone/>
               <a:defRPr b="0" i="0" sz="1200" u="none" cap="none" strike="noStrike">
                 <a:solidFill>
@@ -888,13 +1063,20 @@
               </a:defRPr>
             </a:lvl7pPr>
             <a:lvl8pPr indent="-228600" lvl="7" marL="3657600" marR="0" rtl="0" algn="l">
-              <a:spcBef>
-                <a:spcPts val="0"/>
-              </a:spcBef>
-              <a:spcAft>
-                <a:spcPts val="0"/>
-              </a:spcAft>
+              <a:lnSpc>
+                <a:spcPct val="100000"/>
+              </a:lnSpc>
+              <a:spcBef>
+                <a:spcPts val="0"/>
+              </a:spcBef>
+              <a:spcAft>
+                <a:spcPts val="0"/>
+              </a:spcAft>
+              <a:buClr>
+                <a:srgbClr val="000000"/>
+              </a:buClr>
               <a:buSzPts val="1400"/>
+              <a:buFont typeface="Arial"/>
               <a:buNone/>
               <a:defRPr b="0" i="0" sz="1200" u="none" cap="none" strike="noStrike">
                 <a:solidFill>
@@ -907,13 +1089,20 @@
               </a:defRPr>
             </a:lvl8pPr>
             <a:lvl9pPr indent="-228600" lvl="8" marL="4114800" marR="0" rtl="0" algn="l">
-              <a:spcBef>
-                <a:spcPts val="0"/>
-              </a:spcBef>
-              <a:spcAft>
-                <a:spcPts val="0"/>
-              </a:spcAft>
+              <a:lnSpc>
+                <a:spcPct val="100000"/>
+              </a:lnSpc>
+              <a:spcBef>
+                <a:spcPts val="0"/>
+              </a:spcBef>
+              <a:spcAft>
+                <a:spcPts val="0"/>
+              </a:spcAft>
+              <a:buClr>
+                <a:srgbClr val="000000"/>
+              </a:buClr>
               <a:buSzPts val="1400"/>
+              <a:buFont typeface="Arial"/>
               <a:buNone/>
               <a:defRPr b="0" i="0" sz="1200" u="none" cap="none" strike="noStrike">
                 <a:solidFill>
@@ -956,13 +1145,20 @@
           </a:bodyPr>
           <a:lstStyle>
             <a:lvl1pPr lvl="0" marR="0" rtl="0" algn="l">
-              <a:spcBef>
-                <a:spcPts val="0"/>
-              </a:spcBef>
-              <a:spcAft>
-                <a:spcPts val="0"/>
-              </a:spcAft>
+              <a:lnSpc>
+                <a:spcPct val="100000"/>
+              </a:lnSpc>
+              <a:spcBef>
+                <a:spcPts val="0"/>
+              </a:spcBef>
+              <a:spcAft>
+                <a:spcPts val="0"/>
+              </a:spcAft>
+              <a:buClr>
+                <a:srgbClr val="000000"/>
+              </a:buClr>
               <a:buSzPts val="1400"/>
+              <a:buFont typeface="Arial"/>
               <a:buNone/>
               <a:defRPr b="0" i="0" sz="1200" u="none" cap="none" strike="noStrike">
                 <a:solidFill>
@@ -975,13 +1171,20 @@
               </a:defRPr>
             </a:lvl1pPr>
             <a:lvl2pPr lvl="1" marR="0" rtl="0" algn="l">
-              <a:spcBef>
-                <a:spcPts val="0"/>
-              </a:spcBef>
-              <a:spcAft>
-                <a:spcPts val="0"/>
-              </a:spcAft>
+              <a:lnSpc>
+                <a:spcPct val="100000"/>
+              </a:lnSpc>
+              <a:spcBef>
+                <a:spcPts val="0"/>
+              </a:spcBef>
+              <a:spcAft>
+                <a:spcPts val="0"/>
+              </a:spcAft>
+              <a:buClr>
+                <a:srgbClr val="000000"/>
+              </a:buClr>
               <a:buSzPts val="1400"/>
+              <a:buFont typeface="Arial"/>
               <a:buNone/>
               <a:defRPr b="0" i="0" sz="1800" u="none" cap="none" strike="noStrike">
                 <a:solidFill>
@@ -994,13 +1197,20 @@
               </a:defRPr>
             </a:lvl2pPr>
             <a:lvl3pPr lvl="2" marR="0" rtl="0" algn="l">
-              <a:spcBef>
-                <a:spcPts val="0"/>
-              </a:spcBef>
-              <a:spcAft>
-                <a:spcPts val="0"/>
-              </a:spcAft>
+              <a:lnSpc>
+                <a:spcPct val="100000"/>
+              </a:lnSpc>
+              <a:spcBef>
+                <a:spcPts val="0"/>
+              </a:spcBef>
+              <a:spcAft>
+                <a:spcPts val="0"/>
+              </a:spcAft>
+              <a:buClr>
+                <a:srgbClr val="000000"/>
+              </a:buClr>
               <a:buSzPts val="1400"/>
+              <a:buFont typeface="Arial"/>
               <a:buNone/>
               <a:defRPr b="0" i="0" sz="1800" u="none" cap="none" strike="noStrike">
                 <a:solidFill>
@@ -1013,13 +1223,20 @@
               </a:defRPr>
             </a:lvl3pPr>
             <a:lvl4pPr lvl="3" marR="0" rtl="0" algn="l">
-              <a:spcBef>
-                <a:spcPts val="0"/>
-              </a:spcBef>
-              <a:spcAft>
-                <a:spcPts val="0"/>
-              </a:spcAft>
+              <a:lnSpc>
+                <a:spcPct val="100000"/>
+              </a:lnSpc>
+              <a:spcBef>
+                <a:spcPts val="0"/>
+              </a:spcBef>
+              <a:spcAft>
+                <a:spcPts val="0"/>
+              </a:spcAft>
+              <a:buClr>
+                <a:srgbClr val="000000"/>
+              </a:buClr>
               <a:buSzPts val="1400"/>
+              <a:buFont typeface="Arial"/>
               <a:buNone/>
               <a:defRPr b="0" i="0" sz="1800" u="none" cap="none" strike="noStrike">
                 <a:solidFill>
@@ -1032,13 +1249,20 @@
               </a:defRPr>
             </a:lvl4pPr>
             <a:lvl5pPr lvl="4" marR="0" rtl="0" algn="l">
-              <a:spcBef>
-                <a:spcPts val="0"/>
-              </a:spcBef>
-              <a:spcAft>
-                <a:spcPts val="0"/>
-              </a:spcAft>
+              <a:lnSpc>
+                <a:spcPct val="100000"/>
+              </a:lnSpc>
+              <a:spcBef>
+                <a:spcPts val="0"/>
+              </a:spcBef>
+              <a:spcAft>
+                <a:spcPts val="0"/>
+              </a:spcAft>
+              <a:buClr>
+                <a:srgbClr val="000000"/>
+              </a:buClr>
               <a:buSzPts val="1400"/>
+              <a:buFont typeface="Arial"/>
               <a:buNone/>
               <a:defRPr b="0" i="0" sz="1800" u="none" cap="none" strike="noStrike">
                 <a:solidFill>
@@ -1051,13 +1275,20 @@
               </a:defRPr>
             </a:lvl5pPr>
             <a:lvl6pPr lvl="5" marR="0" rtl="0" algn="l">
-              <a:spcBef>
-                <a:spcPts val="0"/>
-              </a:spcBef>
-              <a:spcAft>
-                <a:spcPts val="0"/>
-              </a:spcAft>
+              <a:lnSpc>
+                <a:spcPct val="100000"/>
+              </a:lnSpc>
+              <a:spcBef>
+                <a:spcPts val="0"/>
+              </a:spcBef>
+              <a:spcAft>
+                <a:spcPts val="0"/>
+              </a:spcAft>
+              <a:buClr>
+                <a:srgbClr val="000000"/>
+              </a:buClr>
               <a:buSzPts val="1400"/>
+              <a:buFont typeface="Arial"/>
               <a:buNone/>
               <a:defRPr b="0" i="0" sz="1800" u="none" cap="none" strike="noStrike">
                 <a:solidFill>
@@ -1070,13 +1301,20 @@
               </a:defRPr>
             </a:lvl6pPr>
             <a:lvl7pPr lvl="6" marR="0" rtl="0" algn="l">
-              <a:spcBef>
-                <a:spcPts val="0"/>
-              </a:spcBef>
-              <a:spcAft>
-                <a:spcPts val="0"/>
-              </a:spcAft>
+              <a:lnSpc>
+                <a:spcPct val="100000"/>
+              </a:lnSpc>
+              <a:spcBef>
+                <a:spcPts val="0"/>
+              </a:spcBef>
+              <a:spcAft>
+                <a:spcPts val="0"/>
+              </a:spcAft>
+              <a:buClr>
+                <a:srgbClr val="000000"/>
+              </a:buClr>
               <a:buSzPts val="1400"/>
+              <a:buFont typeface="Arial"/>
               <a:buNone/>
               <a:defRPr b="0" i="0" sz="1800" u="none" cap="none" strike="noStrike">
                 <a:solidFill>
@@ -1089,13 +1327,20 @@
               </a:defRPr>
             </a:lvl7pPr>
             <a:lvl8pPr lvl="7" marR="0" rtl="0" algn="l">
-              <a:spcBef>
-                <a:spcPts val="0"/>
-              </a:spcBef>
-              <a:spcAft>
-                <a:spcPts val="0"/>
-              </a:spcAft>
+              <a:lnSpc>
+                <a:spcPct val="100000"/>
+              </a:lnSpc>
+              <a:spcBef>
+                <a:spcPts val="0"/>
+              </a:spcBef>
+              <a:spcAft>
+                <a:spcPts val="0"/>
+              </a:spcAft>
+              <a:buClr>
+                <a:srgbClr val="000000"/>
+              </a:buClr>
               <a:buSzPts val="1400"/>
+              <a:buFont typeface="Arial"/>
               <a:buNone/>
               <a:defRPr b="0" i="0" sz="1800" u="none" cap="none" strike="noStrike">
                 <a:solidFill>
@@ -1108,13 +1353,20 @@
               </a:defRPr>
             </a:lvl8pPr>
             <a:lvl9pPr lvl="8" marR="0" rtl="0" algn="l">
-              <a:spcBef>
-                <a:spcPts val="0"/>
-              </a:spcBef>
-              <a:spcAft>
-                <a:spcPts val="0"/>
-              </a:spcAft>
+              <a:lnSpc>
+                <a:spcPct val="100000"/>
+              </a:lnSpc>
+              <a:spcBef>
+                <a:spcPts val="0"/>
+              </a:spcBef>
+              <a:spcAft>
+                <a:spcPts val="0"/>
+              </a:spcAft>
+              <a:buClr>
+                <a:srgbClr val="000000"/>
+              </a:buClr>
               <a:buSzPts val="1400"/>
+              <a:buFont typeface="Arial"/>
               <a:buNone/>
               <a:defRPr b="0" i="0" sz="1800" u="none" cap="none" strike="noStrike">
                 <a:solidFill>
@@ -1158,12 +1410,20 @@
           <a:lstStyle/>
           <a:p>
             <a:pPr indent="0" lvl="0" marL="0" marR="0" rtl="0" algn="r">
-              <a:spcBef>
-                <a:spcPts val="0"/>
-              </a:spcBef>
-              <a:spcAft>
-                <a:spcPts val="0"/>
-              </a:spcAft>
+              <a:lnSpc>
+                <a:spcPct val="100000"/>
+              </a:lnSpc>
+              <a:spcBef>
+                <a:spcPts val="0"/>
+              </a:spcBef>
+              <a:spcAft>
+                <a:spcPts val="0"/>
+              </a:spcAft>
+              <a:buClr>
+                <a:srgbClr val="000000"/>
+              </a:buClr>
+              <a:buSzPts val="1200"/>
+              <a:buFont typeface="Arial"/>
               <a:buNone/>
             </a:pPr>
             <a:fld id="{00000000-1234-1234-1234-123412341234}" type="slidenum">
@@ -1515,12 +1775,16 @@
           <a:lstStyle/>
           <a:p>
             <a:pPr indent="0" lvl="0" marL="0" rtl="0" algn="l">
-              <a:spcBef>
-                <a:spcPts val="0"/>
-              </a:spcBef>
-              <a:spcAft>
-                <a:spcPts val="0"/>
-              </a:spcAft>
+              <a:lnSpc>
+                <a:spcPct val="100000"/>
+              </a:lnSpc>
+              <a:spcBef>
+                <a:spcPts val="0"/>
+              </a:spcBef>
+              <a:spcAft>
+                <a:spcPts val="0"/>
+              </a:spcAft>
+              <a:buSzPts val="1400"/>
               <a:buNone/>
             </a:pPr>
             <a:r>
@@ -1559,12 +1823,16 @@
           <a:lstStyle/>
           <a:p>
             <a:pPr indent="0" lvl="0" marL="0" rtl="0" algn="r">
-              <a:spcBef>
-                <a:spcPts val="0"/>
-              </a:spcBef>
-              <a:spcAft>
-                <a:spcPts val="0"/>
-              </a:spcAft>
+              <a:lnSpc>
+                <a:spcPct val="100000"/>
+              </a:lnSpc>
+              <a:spcBef>
+                <a:spcPts val="0"/>
+              </a:spcBef>
+              <a:spcAft>
+                <a:spcPts val="0"/>
+              </a:spcAft>
+              <a:buSzPts val="1400"/>
               <a:buNone/>
             </a:pPr>
             <a:fld id="{00000000-1234-1234-1234-123412341234}" type="slidenum">
@@ -1602,7 +1870,7 @@
       </p:grpSpPr>
       <p:sp>
         <p:nvSpPr>
-          <p:cNvPr id="196" name="Google Shape;196;p11:notes"/>
+          <p:cNvPr id="196" name="Google Shape;196;p10:notes"/>
           <p:cNvSpPr/>
           <p:nvPr>
             <p:ph idx="2" type="sldImg"/>
@@ -1647,7 +1915,7 @@
       </p:sp>
       <p:sp>
         <p:nvSpPr>
-          <p:cNvPr id="197" name="Google Shape;197;p11:notes"/>
+          <p:cNvPr id="197" name="Google Shape;197;p10:notes"/>
           <p:cNvSpPr txBox="1"/>
           <p:nvPr>
             <p:ph idx="1" type="body"/>
@@ -1673,12 +1941,16 @@
           <a:lstStyle/>
           <a:p>
             <a:pPr indent="0" lvl="0" marL="0" rtl="0" algn="l">
-              <a:spcBef>
-                <a:spcPts val="0"/>
-              </a:spcBef>
-              <a:spcAft>
-                <a:spcPts val="0"/>
-              </a:spcAft>
+              <a:lnSpc>
+                <a:spcPct val="100000"/>
+              </a:lnSpc>
+              <a:spcBef>
+                <a:spcPts val="0"/>
+              </a:spcBef>
+              <a:spcAft>
+                <a:spcPts val="0"/>
+              </a:spcAft>
+              <a:buSzPts val="1400"/>
               <a:buNone/>
             </a:pPr>
             <a:r>
@@ -1691,7 +1963,7 @@
       </p:sp>
       <p:sp>
         <p:nvSpPr>
-          <p:cNvPr id="198" name="Google Shape;198;p11:notes"/>
+          <p:cNvPr id="198" name="Google Shape;198;p10:notes"/>
           <p:cNvSpPr txBox="1"/>
           <p:nvPr>
             <p:ph idx="12" type="sldNum"/>
@@ -1717,12 +1989,16 @@
           <a:lstStyle/>
           <a:p>
             <a:pPr indent="0" lvl="0" marL="0" rtl="0" algn="r">
-              <a:spcBef>
-                <a:spcPts val="0"/>
-              </a:spcBef>
-              <a:spcAft>
-                <a:spcPts val="0"/>
-              </a:spcAft>
+              <a:lnSpc>
+                <a:spcPct val="100000"/>
+              </a:lnSpc>
+              <a:spcBef>
+                <a:spcPts val="0"/>
+              </a:spcBef>
+              <a:spcAft>
+                <a:spcPts val="0"/>
+              </a:spcAft>
+              <a:buSzPts val="1400"/>
               <a:buNone/>
             </a:pPr>
             <a:fld id="{00000000-1234-1234-1234-123412341234}" type="slidenum">
@@ -1760,7 +2036,7 @@
       </p:grpSpPr>
       <p:sp>
         <p:nvSpPr>
-          <p:cNvPr id="217" name="Google Shape;217;p12:notes"/>
+          <p:cNvPr id="217" name="Google Shape;217;p11:notes"/>
           <p:cNvSpPr/>
           <p:nvPr>
             <p:ph idx="2" type="sldImg"/>
@@ -1805,7 +2081,7 @@
       </p:sp>
       <p:sp>
         <p:nvSpPr>
-          <p:cNvPr id="218" name="Google Shape;218;p12:notes"/>
+          <p:cNvPr id="218" name="Google Shape;218;p11:notes"/>
           <p:cNvSpPr txBox="1"/>
           <p:nvPr>
             <p:ph idx="1" type="body"/>
@@ -1831,12 +2107,16 @@
           <a:lstStyle/>
           <a:p>
             <a:pPr indent="0" lvl="0" marL="0" rtl="0" algn="l">
-              <a:spcBef>
-                <a:spcPts val="0"/>
-              </a:spcBef>
-              <a:spcAft>
-                <a:spcPts val="0"/>
-              </a:spcAft>
+              <a:lnSpc>
+                <a:spcPct val="100000"/>
+              </a:lnSpc>
+              <a:spcBef>
+                <a:spcPts val="0"/>
+              </a:spcBef>
+              <a:spcAft>
+                <a:spcPts val="0"/>
+              </a:spcAft>
+              <a:buSzPts val="1400"/>
               <a:buNone/>
             </a:pPr>
             <a:r>
@@ -1849,7 +2129,7 @@
       </p:sp>
       <p:sp>
         <p:nvSpPr>
-          <p:cNvPr id="219" name="Google Shape;219;p12:notes"/>
+          <p:cNvPr id="219" name="Google Shape;219;p11:notes"/>
           <p:cNvSpPr txBox="1"/>
           <p:nvPr>
             <p:ph idx="12" type="sldNum"/>
@@ -1875,12 +2155,16 @@
           <a:lstStyle/>
           <a:p>
             <a:pPr indent="0" lvl="0" marL="0" rtl="0" algn="r">
-              <a:spcBef>
-                <a:spcPts val="0"/>
-              </a:spcBef>
-              <a:spcAft>
-                <a:spcPts val="0"/>
-              </a:spcAft>
+              <a:lnSpc>
+                <a:spcPct val="100000"/>
+              </a:lnSpc>
+              <a:spcBef>
+                <a:spcPts val="0"/>
+              </a:spcBef>
+              <a:spcAft>
+                <a:spcPts val="0"/>
+              </a:spcAft>
+              <a:buSzPts val="1400"/>
               <a:buNone/>
             </a:pPr>
             <a:fld id="{00000000-1234-1234-1234-123412341234}" type="slidenum">
@@ -1918,7 +2202,7 @@
       </p:grpSpPr>
       <p:sp>
         <p:nvSpPr>
-          <p:cNvPr id="238" name="Google Shape;238;p13:notes"/>
+          <p:cNvPr id="238" name="Google Shape;238;p12:notes"/>
           <p:cNvSpPr/>
           <p:nvPr>
             <p:ph idx="2" type="sldImg"/>
@@ -1963,7 +2247,7 @@
       </p:sp>
       <p:sp>
         <p:nvSpPr>
-          <p:cNvPr id="239" name="Google Shape;239;p13:notes"/>
+          <p:cNvPr id="239" name="Google Shape;239;p12:notes"/>
           <p:cNvSpPr txBox="1"/>
           <p:nvPr>
             <p:ph idx="1" type="body"/>
@@ -1989,12 +2273,16 @@
           <a:lstStyle/>
           <a:p>
             <a:pPr indent="0" lvl="0" marL="0" rtl="0" algn="l">
-              <a:spcBef>
-                <a:spcPts val="0"/>
-              </a:spcBef>
-              <a:spcAft>
-                <a:spcPts val="0"/>
-              </a:spcAft>
+              <a:lnSpc>
+                <a:spcPct val="100000"/>
+              </a:lnSpc>
+              <a:spcBef>
+                <a:spcPts val="0"/>
+              </a:spcBef>
+              <a:spcAft>
+                <a:spcPts val="0"/>
+              </a:spcAft>
+              <a:buSzPts val="1400"/>
               <a:buNone/>
             </a:pPr>
             <a:r>
@@ -2007,7 +2295,7 @@
       </p:sp>
       <p:sp>
         <p:nvSpPr>
-          <p:cNvPr id="240" name="Google Shape;240;p13:notes"/>
+          <p:cNvPr id="240" name="Google Shape;240;p12:notes"/>
           <p:cNvSpPr txBox="1"/>
           <p:nvPr>
             <p:ph idx="12" type="sldNum"/>
@@ -2033,12 +2321,16 @@
           <a:lstStyle/>
           <a:p>
             <a:pPr indent="0" lvl="0" marL="0" rtl="0" algn="r">
-              <a:spcBef>
-                <a:spcPts val="0"/>
-              </a:spcBef>
-              <a:spcAft>
-                <a:spcPts val="0"/>
-              </a:spcAft>
+              <a:lnSpc>
+                <a:spcPct val="100000"/>
+              </a:lnSpc>
+              <a:spcBef>
+                <a:spcPts val="0"/>
+              </a:spcBef>
+              <a:spcAft>
+                <a:spcPts val="0"/>
+              </a:spcAft>
+              <a:buSzPts val="1400"/>
               <a:buNone/>
             </a:pPr>
             <a:fld id="{00000000-1234-1234-1234-123412341234}" type="slidenum">
@@ -2076,7 +2368,7 @@
       </p:grpSpPr>
       <p:sp>
         <p:nvSpPr>
-          <p:cNvPr id="254" name="Google Shape;254;p14:notes"/>
+          <p:cNvPr id="254" name="Google Shape;254;p13:notes"/>
           <p:cNvSpPr/>
           <p:nvPr>
             <p:ph idx="2" type="sldImg"/>
@@ -2121,7 +2413,7 @@
       </p:sp>
       <p:sp>
         <p:nvSpPr>
-          <p:cNvPr id="255" name="Google Shape;255;p14:notes"/>
+          <p:cNvPr id="255" name="Google Shape;255;p13:notes"/>
           <p:cNvSpPr txBox="1"/>
           <p:nvPr>
             <p:ph idx="1" type="body"/>
@@ -2147,12 +2439,16 @@
           <a:lstStyle/>
           <a:p>
             <a:pPr indent="0" lvl="0" marL="0" rtl="0" algn="l">
-              <a:spcBef>
-                <a:spcPts val="0"/>
-              </a:spcBef>
-              <a:spcAft>
-                <a:spcPts val="0"/>
-              </a:spcAft>
+              <a:lnSpc>
+                <a:spcPct val="100000"/>
+              </a:lnSpc>
+              <a:spcBef>
+                <a:spcPts val="0"/>
+              </a:spcBef>
+              <a:spcAft>
+                <a:spcPts val="0"/>
+              </a:spcAft>
+              <a:buSzPts val="1400"/>
               <a:buNone/>
             </a:pPr>
             <a:r>
@@ -2165,7 +2461,7 @@
       </p:sp>
       <p:sp>
         <p:nvSpPr>
-          <p:cNvPr id="256" name="Google Shape;256;p14:notes"/>
+          <p:cNvPr id="256" name="Google Shape;256;p13:notes"/>
           <p:cNvSpPr txBox="1"/>
           <p:nvPr>
             <p:ph idx="12" type="sldNum"/>
@@ -2191,12 +2487,16 @@
           <a:lstStyle/>
           <a:p>
             <a:pPr indent="0" lvl="0" marL="0" rtl="0" algn="r">
-              <a:spcBef>
-                <a:spcPts val="0"/>
-              </a:spcBef>
-              <a:spcAft>
-                <a:spcPts val="0"/>
-              </a:spcAft>
+              <a:lnSpc>
+                <a:spcPct val="100000"/>
+              </a:lnSpc>
+              <a:spcBef>
+                <a:spcPts val="0"/>
+              </a:spcBef>
+              <a:spcAft>
+                <a:spcPts val="0"/>
+              </a:spcAft>
+              <a:buSzPts val="1400"/>
               <a:buNone/>
             </a:pPr>
             <a:fld id="{00000000-1234-1234-1234-123412341234}" type="slidenum">
@@ -2234,7 +2534,7 @@
       </p:grpSpPr>
       <p:sp>
         <p:nvSpPr>
-          <p:cNvPr id="274" name="Google Shape;274;p15:notes"/>
+          <p:cNvPr id="274" name="Google Shape;274;p14:notes"/>
           <p:cNvSpPr/>
           <p:nvPr>
             <p:ph idx="2" type="sldImg"/>
@@ -2279,7 +2579,7 @@
       </p:sp>
       <p:sp>
         <p:nvSpPr>
-          <p:cNvPr id="275" name="Google Shape;275;p15:notes"/>
+          <p:cNvPr id="275" name="Google Shape;275;p14:notes"/>
           <p:cNvSpPr txBox="1"/>
           <p:nvPr>
             <p:ph idx="1" type="body"/>
@@ -2305,12 +2605,16 @@
           <a:lstStyle/>
           <a:p>
             <a:pPr indent="0" lvl="0" marL="0" rtl="0" algn="l">
-              <a:spcBef>
-                <a:spcPts val="0"/>
-              </a:spcBef>
-              <a:spcAft>
-                <a:spcPts val="0"/>
-              </a:spcAft>
+              <a:lnSpc>
+                <a:spcPct val="100000"/>
+              </a:lnSpc>
+              <a:spcBef>
+                <a:spcPts val="0"/>
+              </a:spcBef>
+              <a:spcAft>
+                <a:spcPts val="0"/>
+              </a:spcAft>
+              <a:buSzPts val="1400"/>
               <a:buNone/>
             </a:pPr>
             <a:r>
@@ -2323,7 +2627,7 @@
       </p:sp>
       <p:sp>
         <p:nvSpPr>
-          <p:cNvPr id="276" name="Google Shape;276;p15:notes"/>
+          <p:cNvPr id="276" name="Google Shape;276;p14:notes"/>
           <p:cNvSpPr txBox="1"/>
           <p:nvPr>
             <p:ph idx="12" type="sldNum"/>
@@ -2349,12 +2653,16 @@
           <a:lstStyle/>
           <a:p>
             <a:pPr indent="0" lvl="0" marL="0" rtl="0" algn="r">
-              <a:spcBef>
-                <a:spcPts val="0"/>
-              </a:spcBef>
-              <a:spcAft>
-                <a:spcPts val="0"/>
-              </a:spcAft>
+              <a:lnSpc>
+                <a:spcPct val="100000"/>
+              </a:lnSpc>
+              <a:spcBef>
+                <a:spcPts val="0"/>
+              </a:spcBef>
+              <a:spcAft>
+                <a:spcPts val="0"/>
+              </a:spcAft>
+              <a:buSzPts val="1400"/>
               <a:buNone/>
             </a:pPr>
             <a:fld id="{00000000-1234-1234-1234-123412341234}" type="slidenum">
@@ -2463,12 +2771,16 @@
           <a:lstStyle/>
           <a:p>
             <a:pPr indent="0" lvl="0" marL="0" rtl="0" algn="l">
-              <a:spcBef>
-                <a:spcPts val="0"/>
-              </a:spcBef>
-              <a:spcAft>
-                <a:spcPts val="0"/>
-              </a:spcAft>
+              <a:lnSpc>
+                <a:spcPct val="100000"/>
+              </a:lnSpc>
+              <a:spcBef>
+                <a:spcPts val="0"/>
+              </a:spcBef>
+              <a:spcAft>
+                <a:spcPts val="0"/>
+              </a:spcAft>
+              <a:buSzPts val="1400"/>
               <a:buNone/>
             </a:pPr>
             <a:r>
@@ -2507,12 +2819,16 @@
           <a:lstStyle/>
           <a:p>
             <a:pPr indent="0" lvl="0" marL="0" rtl="0" algn="r">
-              <a:spcBef>
-                <a:spcPts val="0"/>
-              </a:spcBef>
-              <a:spcAft>
-                <a:spcPts val="0"/>
-              </a:spcAft>
+              <a:lnSpc>
+                <a:spcPct val="100000"/>
+              </a:lnSpc>
+              <a:spcBef>
+                <a:spcPts val="0"/>
+              </a:spcBef>
+              <a:spcAft>
+                <a:spcPts val="0"/>
+              </a:spcAft>
+              <a:buSzPts val="1400"/>
               <a:buNone/>
             </a:pPr>
             <a:fld id="{00000000-1234-1234-1234-123412341234}" type="slidenum">
@@ -2621,12 +2937,16 @@
           <a:lstStyle/>
           <a:p>
             <a:pPr indent="0" lvl="0" marL="0" rtl="0" algn="l">
-              <a:spcBef>
-                <a:spcPts val="0"/>
-              </a:spcBef>
-              <a:spcAft>
-                <a:spcPts val="0"/>
-              </a:spcAft>
+              <a:lnSpc>
+                <a:spcPct val="100000"/>
+              </a:lnSpc>
+              <a:spcBef>
+                <a:spcPts val="0"/>
+              </a:spcBef>
+              <a:spcAft>
+                <a:spcPts val="0"/>
+              </a:spcAft>
+              <a:buSzPts val="1400"/>
               <a:buNone/>
             </a:pPr>
             <a:r>
@@ -2665,12 +2985,16 @@
           <a:lstStyle/>
           <a:p>
             <a:pPr indent="0" lvl="0" marL="0" rtl="0" algn="r">
-              <a:spcBef>
-                <a:spcPts val="0"/>
-              </a:spcBef>
-              <a:spcAft>
-                <a:spcPts val="0"/>
-              </a:spcAft>
+              <a:lnSpc>
+                <a:spcPct val="100000"/>
+              </a:lnSpc>
+              <a:spcBef>
+                <a:spcPts val="0"/>
+              </a:spcBef>
+              <a:spcAft>
+                <a:spcPts val="0"/>
+              </a:spcAft>
+              <a:buSzPts val="1400"/>
               <a:buNone/>
             </a:pPr>
             <a:fld id="{00000000-1234-1234-1234-123412341234}" type="slidenum">
@@ -2779,12 +3103,16 @@
           <a:lstStyle/>
           <a:p>
             <a:pPr indent="0" lvl="0" marL="0" rtl="0" algn="l">
-              <a:spcBef>
-                <a:spcPts val="0"/>
-              </a:spcBef>
-              <a:spcAft>
-                <a:spcPts val="0"/>
-              </a:spcAft>
+              <a:lnSpc>
+                <a:spcPct val="100000"/>
+              </a:lnSpc>
+              <a:spcBef>
+                <a:spcPts val="0"/>
+              </a:spcBef>
+              <a:spcAft>
+                <a:spcPts val="0"/>
+              </a:spcAft>
+              <a:buSzPts val="1400"/>
               <a:buNone/>
             </a:pPr>
             <a:r>
@@ -2823,12 +3151,16 @@
           <a:lstStyle/>
           <a:p>
             <a:pPr indent="0" lvl="0" marL="0" rtl="0" algn="r">
-              <a:spcBef>
-                <a:spcPts val="0"/>
-              </a:spcBef>
-              <a:spcAft>
-                <a:spcPts val="0"/>
-              </a:spcAft>
+              <a:lnSpc>
+                <a:spcPct val="100000"/>
+              </a:lnSpc>
+              <a:spcBef>
+                <a:spcPts val="0"/>
+              </a:spcBef>
+              <a:spcAft>
+                <a:spcPts val="0"/>
+              </a:spcAft>
+              <a:buSzPts val="1400"/>
               <a:buNone/>
             </a:pPr>
             <a:fld id="{00000000-1234-1234-1234-123412341234}" type="slidenum">
@@ -2937,12 +3269,16 @@
           <a:lstStyle/>
           <a:p>
             <a:pPr indent="0" lvl="0" marL="0" rtl="0" algn="l">
-              <a:spcBef>
-                <a:spcPts val="0"/>
-              </a:spcBef>
-              <a:spcAft>
-                <a:spcPts val="0"/>
-              </a:spcAft>
+              <a:lnSpc>
+                <a:spcPct val="100000"/>
+              </a:lnSpc>
+              <a:spcBef>
+                <a:spcPts val="0"/>
+              </a:spcBef>
+              <a:spcAft>
+                <a:spcPts val="0"/>
+              </a:spcAft>
+              <a:buSzPts val="1400"/>
               <a:buNone/>
             </a:pPr>
             <a:r>
@@ -2981,12 +3317,16 @@
           <a:lstStyle/>
           <a:p>
             <a:pPr indent="0" lvl="0" marL="0" rtl="0" algn="r">
-              <a:spcBef>
-                <a:spcPts val="0"/>
-              </a:spcBef>
-              <a:spcAft>
-                <a:spcPts val="0"/>
-              </a:spcAft>
+              <a:lnSpc>
+                <a:spcPct val="100000"/>
+              </a:lnSpc>
+              <a:spcBef>
+                <a:spcPts val="0"/>
+              </a:spcBef>
+              <a:spcAft>
+                <a:spcPts val="0"/>
+              </a:spcAft>
+              <a:buSzPts val="1400"/>
               <a:buNone/>
             </a:pPr>
             <a:fld id="{00000000-1234-1234-1234-123412341234}" type="slidenum">
@@ -3095,12 +3435,16 @@
           <a:lstStyle/>
           <a:p>
             <a:pPr indent="0" lvl="0" marL="0" rtl="0" algn="l">
-              <a:spcBef>
-                <a:spcPts val="0"/>
-              </a:spcBef>
-              <a:spcAft>
-                <a:spcPts val="0"/>
-              </a:spcAft>
+              <a:lnSpc>
+                <a:spcPct val="100000"/>
+              </a:lnSpc>
+              <a:spcBef>
+                <a:spcPts val="0"/>
+              </a:spcBef>
+              <a:spcAft>
+                <a:spcPts val="0"/>
+              </a:spcAft>
+              <a:buSzPts val="1400"/>
               <a:buNone/>
             </a:pPr>
             <a:r>
@@ -3139,12 +3483,16 @@
           <a:lstStyle/>
           <a:p>
             <a:pPr indent="0" lvl="0" marL="0" rtl="0" algn="r">
-              <a:spcBef>
-                <a:spcPts val="0"/>
-              </a:spcBef>
-              <a:spcAft>
-                <a:spcPts val="0"/>
-              </a:spcAft>
+              <a:lnSpc>
+                <a:spcPct val="100000"/>
+              </a:lnSpc>
+              <a:spcBef>
+                <a:spcPts val="0"/>
+              </a:spcBef>
+              <a:spcAft>
+                <a:spcPts val="0"/>
+              </a:spcAft>
+              <a:buSzPts val="1400"/>
               <a:buNone/>
             </a:pPr>
             <a:fld id="{00000000-1234-1234-1234-123412341234}" type="slidenum">
@@ -3253,12 +3601,16 @@
           <a:lstStyle/>
           <a:p>
             <a:pPr indent="0" lvl="0" marL="0" rtl="0" algn="l">
-              <a:spcBef>
-                <a:spcPts val="0"/>
-              </a:spcBef>
-              <a:spcAft>
-                <a:spcPts val="0"/>
-              </a:spcAft>
+              <a:lnSpc>
+                <a:spcPct val="100000"/>
+              </a:lnSpc>
+              <a:spcBef>
+                <a:spcPts val="0"/>
+              </a:spcBef>
+              <a:spcAft>
+                <a:spcPts val="0"/>
+              </a:spcAft>
+              <a:buSzPts val="1400"/>
               <a:buNone/>
             </a:pPr>
             <a:r>
@@ -3297,12 +3649,16 @@
           <a:lstStyle/>
           <a:p>
             <a:pPr indent="0" lvl="0" marL="0" rtl="0" algn="r">
-              <a:spcBef>
-                <a:spcPts val="0"/>
-              </a:spcBef>
-              <a:spcAft>
-                <a:spcPts val="0"/>
-              </a:spcAft>
+              <a:lnSpc>
+                <a:spcPct val="100000"/>
+              </a:lnSpc>
+              <a:spcBef>
+                <a:spcPts val="0"/>
+              </a:spcBef>
+              <a:spcAft>
+                <a:spcPts val="0"/>
+              </a:spcAft>
+              <a:buSzPts val="1400"/>
               <a:buNone/>
             </a:pPr>
             <a:fld id="{00000000-1234-1234-1234-123412341234}" type="slidenum">
@@ -3411,12 +3767,16 @@
           <a:lstStyle/>
           <a:p>
             <a:pPr indent="0" lvl="0" marL="0" rtl="0" algn="l">
-              <a:spcBef>
-                <a:spcPts val="0"/>
-              </a:spcBef>
-              <a:spcAft>
-                <a:spcPts val="0"/>
-              </a:spcAft>
+              <a:lnSpc>
+                <a:spcPct val="100000"/>
+              </a:lnSpc>
+              <a:spcBef>
+                <a:spcPts val="0"/>
+              </a:spcBef>
+              <a:spcAft>
+                <a:spcPts val="0"/>
+              </a:spcAft>
+              <a:buSzPts val="1400"/>
               <a:buNone/>
             </a:pPr>
             <a:r>
@@ -3455,12 +3815,16 @@
           <a:lstStyle/>
           <a:p>
             <a:pPr indent="0" lvl="0" marL="0" rtl="0" algn="r">
-              <a:spcBef>
-                <a:spcPts val="0"/>
-              </a:spcBef>
-              <a:spcAft>
-                <a:spcPts val="0"/>
-              </a:spcAft>
+              <a:lnSpc>
+                <a:spcPct val="100000"/>
+              </a:lnSpc>
+              <a:spcBef>
+                <a:spcPts val="0"/>
+              </a:spcBef>
+              <a:spcAft>
+                <a:spcPts val="0"/>
+              </a:spcAft>
+              <a:buSzPts val="1400"/>
               <a:buNone/>
             </a:pPr>
             <a:fld id="{00000000-1234-1234-1234-123412341234}" type="slidenum">
@@ -3569,12 +3933,16 @@
           <a:lstStyle/>
           <a:p>
             <a:pPr indent="0" lvl="0" marL="0" rtl="0" algn="l">
-              <a:spcBef>
-                <a:spcPts val="0"/>
-              </a:spcBef>
-              <a:spcAft>
-                <a:spcPts val="0"/>
-              </a:spcAft>
+              <a:lnSpc>
+                <a:spcPct val="100000"/>
+              </a:lnSpc>
+              <a:spcBef>
+                <a:spcPts val="0"/>
+              </a:spcBef>
+              <a:spcAft>
+                <a:spcPts val="0"/>
+              </a:spcAft>
+              <a:buSzPts val="1400"/>
               <a:buNone/>
             </a:pPr>
             <a:r>
@@ -3613,12 +3981,16 @@
           <a:lstStyle/>
           <a:p>
             <a:pPr indent="0" lvl="0" marL="0" rtl="0" algn="r">
-              <a:spcBef>
-                <a:spcPts val="0"/>
-              </a:spcBef>
-              <a:spcAft>
-                <a:spcPts val="0"/>
-              </a:spcAft>
+              <a:lnSpc>
+                <a:spcPct val="100000"/>
+              </a:lnSpc>
+              <a:spcBef>
+                <a:spcPts val="0"/>
+              </a:spcBef>
+              <a:spcAft>
+                <a:spcPts val="0"/>
+              </a:spcAft>
+              <a:buSzPts val="1400"/>
               <a:buNone/>
             </a:pPr>
             <a:fld id="{00000000-1234-1234-1234-123412341234}" type="slidenum">
@@ -4436,19 +4808,35 @@
           </a:bodyPr>
           <a:lstStyle/>
           <a:p>
-            <a:pPr indent="0" lvl="0" marL="0" rtl="0" algn="l">
-              <a:spcBef>
-                <a:spcPts val="0"/>
-              </a:spcBef>
-              <a:spcAft>
-                <a:spcPts val="0"/>
-              </a:spcAft>
+            <a:pPr indent="0" lvl="0" marL="0" marR="0" rtl="0" algn="l">
+              <a:lnSpc>
+                <a:spcPct val="100000"/>
+              </a:lnSpc>
+              <a:spcBef>
+                <a:spcPts val="0"/>
+              </a:spcBef>
+              <a:spcAft>
+                <a:spcPts val="0"/>
+              </a:spcAft>
+              <a:buClr>
+                <a:srgbClr val="000000"/>
+              </a:buClr>
+              <a:buSzPts val="1400"/>
+              <a:buFont typeface="Arial"/>
               <a:buNone/>
             </a:pPr>
             <a:r>
               <a:t/>
             </a:r>
-            <a:endParaRPr/>
+            <a:endParaRPr b="0" i="0" sz="1400" u="none" cap="none" strike="noStrike">
+              <a:solidFill>
+                <a:srgbClr val="000000"/>
+              </a:solidFill>
+              <a:latin typeface="Arial"/>
+              <a:ea typeface="Arial"/>
+              <a:cs typeface="Arial"/>
+              <a:sym typeface="Arial"/>
+            </a:endParaRPr>
           </a:p>
         </p:txBody>
       </p:sp>
@@ -4479,19 +4867,35 @@
           </a:bodyPr>
           <a:lstStyle/>
           <a:p>
-            <a:pPr indent="0" lvl="0" marL="0" rtl="0" algn="l">
-              <a:spcBef>
-                <a:spcPts val="0"/>
-              </a:spcBef>
-              <a:spcAft>
-                <a:spcPts val="0"/>
-              </a:spcAft>
+            <a:pPr indent="0" lvl="0" marL="0" marR="0" rtl="0" algn="l">
+              <a:lnSpc>
+                <a:spcPct val="100000"/>
+              </a:lnSpc>
+              <a:spcBef>
+                <a:spcPts val="0"/>
+              </a:spcBef>
+              <a:spcAft>
+                <a:spcPts val="0"/>
+              </a:spcAft>
+              <a:buClr>
+                <a:srgbClr val="000000"/>
+              </a:buClr>
+              <a:buSzPts val="1400"/>
+              <a:buFont typeface="Arial"/>
               <a:buNone/>
             </a:pPr>
             <a:r>
               <a:t/>
             </a:r>
-            <a:endParaRPr/>
+            <a:endParaRPr b="0" i="0" sz="1400" u="none" cap="none" strike="noStrike">
+              <a:solidFill>
+                <a:srgbClr val="000000"/>
+              </a:solidFill>
+              <a:latin typeface="Arial"/>
+              <a:ea typeface="Arial"/>
+              <a:cs typeface="Arial"/>
+              <a:sym typeface="Arial"/>
+            </a:endParaRPr>
           </a:p>
         </p:txBody>
       </p:sp>
@@ -4522,19 +4926,35 @@
           </a:bodyPr>
           <a:lstStyle/>
           <a:p>
-            <a:pPr indent="0" lvl="0" marL="0" rtl="0" algn="l">
-              <a:spcBef>
-                <a:spcPts val="0"/>
-              </a:spcBef>
-              <a:spcAft>
-                <a:spcPts val="0"/>
-              </a:spcAft>
+            <a:pPr indent="0" lvl="0" marL="0" marR="0" rtl="0" algn="l">
+              <a:lnSpc>
+                <a:spcPct val="100000"/>
+              </a:lnSpc>
+              <a:spcBef>
+                <a:spcPts val="0"/>
+              </a:spcBef>
+              <a:spcAft>
+                <a:spcPts val="0"/>
+              </a:spcAft>
+              <a:buClr>
+                <a:srgbClr val="000000"/>
+              </a:buClr>
+              <a:buSzPts val="1400"/>
+              <a:buFont typeface="Arial"/>
               <a:buNone/>
             </a:pPr>
             <a:r>
               <a:t/>
             </a:r>
-            <a:endParaRPr/>
+            <a:endParaRPr b="0" i="0" sz="1400" u="none" cap="none" strike="noStrike">
+              <a:solidFill>
+                <a:srgbClr val="000000"/>
+              </a:solidFill>
+              <a:latin typeface="Arial"/>
+              <a:ea typeface="Arial"/>
+              <a:cs typeface="Arial"/>
+              <a:sym typeface="Arial"/>
+            </a:endParaRPr>
           </a:p>
         </p:txBody>
       </p:sp>
@@ -4564,6 +4984,9 @@
           <a:lstStyle/>
           <a:p>
             <a:pPr indent="0" lvl="0" marL="0" marR="0" rtl="0" algn="ctr">
+              <a:lnSpc>
+                <a:spcPct val="100000"/>
+              </a:lnSpc>
               <a:spcBef>
                 <a:spcPts val="0"/>
               </a:spcBef>
@@ -4627,6 +5050,9 @@
           <a:lstStyle/>
           <a:p>
             <a:pPr indent="0" lvl="0" marL="0" marR="0" rtl="0" algn="ctr">
+              <a:lnSpc>
+                <a:spcPct val="100000"/>
+              </a:lnSpc>
               <a:spcBef>
                 <a:spcPts val="0"/>
               </a:spcBef>
@@ -4690,6 +5116,9 @@
           <a:lstStyle/>
           <a:p>
             <a:pPr indent="0" lvl="0" marL="0" marR="0" rtl="0" algn="ctr">
+              <a:lnSpc>
+                <a:spcPct val="100000"/>
+              </a:lnSpc>
               <a:spcBef>
                 <a:spcPts val="0"/>
               </a:spcBef>
@@ -4753,6 +5182,9 @@
           <a:lstStyle/>
           <a:p>
             <a:pPr indent="0" lvl="0" marL="0" marR="0" rtl="0" algn="ctr">
+              <a:lnSpc>
+                <a:spcPct val="100000"/>
+              </a:lnSpc>
               <a:spcBef>
                 <a:spcPts val="0"/>
               </a:spcBef>
@@ -4852,6 +5284,9 @@
           <a:lstStyle/>
           <a:p>
             <a:pPr indent="0" lvl="0" marL="0" marR="0" rtl="0" algn="ctr">
+              <a:lnSpc>
+                <a:spcPct val="100000"/>
+              </a:lnSpc>
               <a:spcBef>
                 <a:spcPts val="0"/>
               </a:spcBef>
@@ -4947,6 +5382,9 @@
           <a:lstStyle/>
           <a:p>
             <a:pPr indent="0" lvl="0" marL="0" marR="0" rtl="0" algn="l">
+              <a:lnSpc>
+                <a:spcPct val="100000"/>
+              </a:lnSpc>
               <a:spcBef>
                 <a:spcPts val="0"/>
               </a:spcBef>
@@ -5010,6 +5448,9 @@
           <a:lstStyle/>
           <a:p>
             <a:pPr indent="0" lvl="0" marL="0" marR="0" rtl="0" algn="l">
+              <a:lnSpc>
+                <a:spcPct val="100000"/>
+              </a:lnSpc>
               <a:spcBef>
                 <a:spcPts val="0"/>
               </a:spcBef>
@@ -5099,7 +5540,31 @@
                 <a:cs typeface="Calibri"/>
                 <a:sym typeface="Calibri"/>
               </a:rPr>
-              <a:t>Egy globális ranglista teszi lehetővé a pontszámok beküldését és összehasonlítását — az egyetlen funkció, amellyel az összehasonlítható játékok nem rendelkeznek.</a:t>
+              <a:t>Egy globális ranglista teszi lehetővé a pontszámok beküldését és összehasonlítását </a:t>
+            </a:r>
+            <a:r>
+              <a:rPr lang="en-US" sz="1350">
+                <a:solidFill>
+                  <a:srgbClr val="EDE7F2"/>
+                </a:solidFill>
+                <a:latin typeface="Calibri"/>
+                <a:ea typeface="Calibri"/>
+                <a:cs typeface="Calibri"/>
+                <a:sym typeface="Calibri"/>
+              </a:rPr>
+              <a:t>-</a:t>
+            </a:r>
+            <a:r>
+              <a:rPr b="0" i="0" lang="en-US" sz="1350" u="none" cap="none" strike="noStrike">
+                <a:solidFill>
+                  <a:srgbClr val="EDE7F2"/>
+                </a:solidFill>
+                <a:latin typeface="Calibri"/>
+                <a:ea typeface="Calibri"/>
+                <a:cs typeface="Calibri"/>
+                <a:sym typeface="Calibri"/>
+              </a:rPr>
+              <a:t> az egyetlen funkció, amellyel az összehasonlítható játékok nem rendelkeznek.</a:t>
             </a:r>
             <a:endParaRPr b="0" i="0" sz="1350" u="none" cap="none" strike="noStrike">
               <a:solidFill>
@@ -5148,19 +5613,35 @@
           </a:bodyPr>
           <a:lstStyle/>
           <a:p>
-            <a:pPr indent="0" lvl="0" marL="0" rtl="0" algn="l">
-              <a:spcBef>
-                <a:spcPts val="0"/>
-              </a:spcBef>
-              <a:spcAft>
-                <a:spcPts val="0"/>
-              </a:spcAft>
+            <a:pPr indent="0" lvl="0" marL="0" marR="0" rtl="0" algn="l">
+              <a:lnSpc>
+                <a:spcPct val="100000"/>
+              </a:lnSpc>
+              <a:spcBef>
+                <a:spcPts val="0"/>
+              </a:spcBef>
+              <a:spcAft>
+                <a:spcPts val="0"/>
+              </a:spcAft>
+              <a:buClr>
+                <a:srgbClr val="000000"/>
+              </a:buClr>
+              <a:buSzPts val="1400"/>
+              <a:buFont typeface="Arial"/>
               <a:buNone/>
             </a:pPr>
             <a:r>
               <a:t/>
             </a:r>
-            <a:endParaRPr/>
+            <a:endParaRPr b="0" i="0" sz="1400" u="none" cap="none" strike="noStrike">
+              <a:solidFill>
+                <a:srgbClr val="000000"/>
+              </a:solidFill>
+              <a:latin typeface="Arial"/>
+              <a:ea typeface="Arial"/>
+              <a:cs typeface="Arial"/>
+              <a:sym typeface="Arial"/>
+            </a:endParaRPr>
           </a:p>
         </p:txBody>
       </p:sp>
@@ -5191,19 +5672,35 @@
           </a:bodyPr>
           <a:lstStyle/>
           <a:p>
-            <a:pPr indent="0" lvl="0" marL="0" rtl="0" algn="l">
-              <a:spcBef>
-                <a:spcPts val="0"/>
-              </a:spcBef>
-              <a:spcAft>
-                <a:spcPts val="0"/>
-              </a:spcAft>
+            <a:pPr indent="0" lvl="0" marL="0" marR="0" rtl="0" algn="l">
+              <a:lnSpc>
+                <a:spcPct val="100000"/>
+              </a:lnSpc>
+              <a:spcBef>
+                <a:spcPts val="0"/>
+              </a:spcBef>
+              <a:spcAft>
+                <a:spcPts val="0"/>
+              </a:spcAft>
+              <a:buClr>
+                <a:srgbClr val="000000"/>
+              </a:buClr>
+              <a:buSzPts val="1400"/>
+              <a:buFont typeface="Arial"/>
               <a:buNone/>
             </a:pPr>
             <a:r>
               <a:t/>
             </a:r>
-            <a:endParaRPr/>
+            <a:endParaRPr b="0" i="0" sz="1400" u="none" cap="none" strike="noStrike">
+              <a:solidFill>
+                <a:srgbClr val="000000"/>
+              </a:solidFill>
+              <a:latin typeface="Arial"/>
+              <a:ea typeface="Arial"/>
+              <a:cs typeface="Arial"/>
+              <a:sym typeface="Arial"/>
+            </a:endParaRPr>
           </a:p>
         </p:txBody>
       </p:sp>
@@ -5233,6 +5730,9 @@
           <a:lstStyle/>
           <a:p>
             <a:pPr indent="0" lvl="0" marL="0" marR="0" rtl="0" algn="l">
+              <a:lnSpc>
+                <a:spcPct val="100000"/>
+              </a:lnSpc>
               <a:spcBef>
                 <a:spcPts val="0"/>
               </a:spcBef>
@@ -5371,19 +5871,35 @@
           </a:bodyPr>
           <a:lstStyle/>
           <a:p>
-            <a:pPr indent="0" lvl="0" marL="0" rtl="0" algn="l">
-              <a:spcBef>
-                <a:spcPts val="0"/>
-              </a:spcBef>
-              <a:spcAft>
-                <a:spcPts val="0"/>
-              </a:spcAft>
+            <a:pPr indent="0" lvl="0" marL="0" marR="0" rtl="0" algn="l">
+              <a:lnSpc>
+                <a:spcPct val="100000"/>
+              </a:lnSpc>
+              <a:spcBef>
+                <a:spcPts val="0"/>
+              </a:spcBef>
+              <a:spcAft>
+                <a:spcPts val="0"/>
+              </a:spcAft>
+              <a:buClr>
+                <a:srgbClr val="000000"/>
+              </a:buClr>
+              <a:buSzPts val="1400"/>
+              <a:buFont typeface="Arial"/>
               <a:buNone/>
             </a:pPr>
             <a:r>
               <a:t/>
             </a:r>
-            <a:endParaRPr/>
+            <a:endParaRPr b="0" i="0" sz="1400" u="none" cap="none" strike="noStrike">
+              <a:solidFill>
+                <a:srgbClr val="000000"/>
+              </a:solidFill>
+              <a:latin typeface="Arial"/>
+              <a:ea typeface="Arial"/>
+              <a:cs typeface="Arial"/>
+              <a:sym typeface="Arial"/>
+            </a:endParaRPr>
           </a:p>
         </p:txBody>
       </p:sp>
@@ -5414,19 +5930,35 @@
           </a:bodyPr>
           <a:lstStyle/>
           <a:p>
-            <a:pPr indent="0" lvl="0" marL="0" rtl="0" algn="l">
-              <a:spcBef>
-                <a:spcPts val="0"/>
-              </a:spcBef>
-              <a:spcAft>
-                <a:spcPts val="0"/>
-              </a:spcAft>
+            <a:pPr indent="0" lvl="0" marL="0" marR="0" rtl="0" algn="l">
+              <a:lnSpc>
+                <a:spcPct val="100000"/>
+              </a:lnSpc>
+              <a:spcBef>
+                <a:spcPts val="0"/>
+              </a:spcBef>
+              <a:spcAft>
+                <a:spcPts val="0"/>
+              </a:spcAft>
+              <a:buClr>
+                <a:srgbClr val="000000"/>
+              </a:buClr>
+              <a:buSzPts val="1400"/>
+              <a:buFont typeface="Arial"/>
               <a:buNone/>
             </a:pPr>
             <a:r>
               <a:t/>
             </a:r>
-            <a:endParaRPr/>
+            <a:endParaRPr b="0" i="0" sz="1400" u="none" cap="none" strike="noStrike">
+              <a:solidFill>
+                <a:srgbClr val="000000"/>
+              </a:solidFill>
+              <a:latin typeface="Arial"/>
+              <a:ea typeface="Arial"/>
+              <a:cs typeface="Arial"/>
+              <a:sym typeface="Arial"/>
+            </a:endParaRPr>
           </a:p>
         </p:txBody>
       </p:sp>
@@ -5456,6 +5988,9 @@
           <a:lstStyle/>
           <a:p>
             <a:pPr indent="0" lvl="0" marL="0" marR="0" rtl="0" algn="l">
+              <a:lnSpc>
+                <a:spcPct val="100000"/>
+              </a:lnSpc>
               <a:spcBef>
                 <a:spcPts val="0"/>
               </a:spcBef>
@@ -5594,19 +6129,35 @@
           </a:bodyPr>
           <a:lstStyle/>
           <a:p>
-            <a:pPr indent="0" lvl="0" marL="0" rtl="0" algn="l">
-              <a:spcBef>
-                <a:spcPts val="0"/>
-              </a:spcBef>
-              <a:spcAft>
-                <a:spcPts val="0"/>
-              </a:spcAft>
+            <a:pPr indent="0" lvl="0" marL="0" marR="0" rtl="0" algn="l">
+              <a:lnSpc>
+                <a:spcPct val="100000"/>
+              </a:lnSpc>
+              <a:spcBef>
+                <a:spcPts val="0"/>
+              </a:spcBef>
+              <a:spcAft>
+                <a:spcPts val="0"/>
+              </a:spcAft>
+              <a:buClr>
+                <a:srgbClr val="000000"/>
+              </a:buClr>
+              <a:buSzPts val="1400"/>
+              <a:buFont typeface="Arial"/>
               <a:buNone/>
             </a:pPr>
             <a:r>
               <a:t/>
             </a:r>
-            <a:endParaRPr/>
+            <a:endParaRPr b="0" i="0" sz="1400" u="none" cap="none" strike="noStrike">
+              <a:solidFill>
+                <a:srgbClr val="000000"/>
+              </a:solidFill>
+              <a:latin typeface="Arial"/>
+              <a:ea typeface="Arial"/>
+              <a:cs typeface="Arial"/>
+              <a:sym typeface="Arial"/>
+            </a:endParaRPr>
           </a:p>
         </p:txBody>
       </p:sp>
@@ -5637,19 +6188,35 @@
           </a:bodyPr>
           <a:lstStyle/>
           <a:p>
-            <a:pPr indent="0" lvl="0" marL="0" rtl="0" algn="l">
-              <a:spcBef>
-                <a:spcPts val="0"/>
-              </a:spcBef>
-              <a:spcAft>
-                <a:spcPts val="0"/>
-              </a:spcAft>
+            <a:pPr indent="0" lvl="0" marL="0" marR="0" rtl="0" algn="l">
+              <a:lnSpc>
+                <a:spcPct val="100000"/>
+              </a:lnSpc>
+              <a:spcBef>
+                <a:spcPts val="0"/>
+              </a:spcBef>
+              <a:spcAft>
+                <a:spcPts val="0"/>
+              </a:spcAft>
+              <a:buClr>
+                <a:srgbClr val="000000"/>
+              </a:buClr>
+              <a:buSzPts val="1400"/>
+              <a:buFont typeface="Arial"/>
               <a:buNone/>
             </a:pPr>
             <a:r>
               <a:t/>
             </a:r>
-            <a:endParaRPr/>
+            <a:endParaRPr b="0" i="0" sz="1400" u="none" cap="none" strike="noStrike">
+              <a:solidFill>
+                <a:srgbClr val="000000"/>
+              </a:solidFill>
+              <a:latin typeface="Arial"/>
+              <a:ea typeface="Arial"/>
+              <a:cs typeface="Arial"/>
+              <a:sym typeface="Arial"/>
+            </a:endParaRPr>
           </a:p>
         </p:txBody>
       </p:sp>
@@ -5679,6 +6246,9 @@
           <a:lstStyle/>
           <a:p>
             <a:pPr indent="0" lvl="0" marL="0" marR="0" rtl="0" algn="l">
+              <a:lnSpc>
+                <a:spcPct val="100000"/>
+              </a:lnSpc>
               <a:spcBef>
                 <a:spcPts val="0"/>
               </a:spcBef>
@@ -5808,6 +6378,9 @@
           <a:lstStyle/>
           <a:p>
             <a:pPr indent="0" lvl="0" marL="0" marR="0" rtl="0" algn="r">
+              <a:lnSpc>
+                <a:spcPct val="100000"/>
+              </a:lnSpc>
               <a:spcBef>
                 <a:spcPts val="0"/>
               </a:spcBef>
@@ -5903,6 +6476,9 @@
           <a:lstStyle/>
           <a:p>
             <a:pPr indent="0" lvl="0" marL="0" marR="0" rtl="0" algn="l">
+              <a:lnSpc>
+                <a:spcPct val="100000"/>
+              </a:lnSpc>
               <a:spcBef>
                 <a:spcPts val="0"/>
               </a:spcBef>
@@ -5966,6 +6542,9 @@
           <a:lstStyle/>
           <a:p>
             <a:pPr indent="0" lvl="0" marL="0" marR="0" rtl="0" algn="l">
+              <a:lnSpc>
+                <a:spcPct val="100000"/>
+              </a:lnSpc>
               <a:spcBef>
                 <a:spcPts val="0"/>
               </a:spcBef>
@@ -6055,31 +6634,7 @@
                 <a:cs typeface="Calibri"/>
                 <a:sym typeface="Calibri"/>
               </a:rPr>
-              <a:t>Nem új algoritmus vagy műfaj</a:t>
-            </a:r>
-            <a:r>
-              <a:rPr lang="en-US" sz="1500">
-                <a:solidFill>
-                  <a:srgbClr val="EDE7F2"/>
-                </a:solidFill>
-                <a:latin typeface="Calibri"/>
-                <a:ea typeface="Calibri"/>
-                <a:cs typeface="Calibri"/>
-                <a:sym typeface="Calibri"/>
-              </a:rPr>
-              <a:t>.</a:t>
-            </a:r>
-            <a:r>
-              <a:rPr b="0" i="0" lang="en-US" sz="1500" u="none" cap="none" strike="noStrike">
-                <a:solidFill>
-                  <a:srgbClr val="EDE7F2"/>
-                </a:solidFill>
-                <a:latin typeface="Calibri"/>
-                <a:ea typeface="Calibri"/>
-                <a:cs typeface="Calibri"/>
-                <a:sym typeface="Calibri"/>
-              </a:rPr>
-              <a:t> A hozzájárulás tervezés és szintézis:</a:t>
+              <a:t>Nem új algoritmus vagy műfaj. A hozzájárulás tervezés és szintézis:</a:t>
             </a:r>
             <a:endParaRPr b="0" i="0" sz="1500" u="none" cap="none" strike="noStrike">
               <a:solidFill>
@@ -6128,19 +6683,35 @@
           </a:bodyPr>
           <a:lstStyle/>
           <a:p>
-            <a:pPr indent="0" lvl="0" marL="0" rtl="0" algn="l">
-              <a:spcBef>
-                <a:spcPts val="0"/>
-              </a:spcBef>
-              <a:spcAft>
-                <a:spcPts val="0"/>
-              </a:spcAft>
+            <a:pPr indent="0" lvl="0" marL="0" marR="0" rtl="0" algn="l">
+              <a:lnSpc>
+                <a:spcPct val="100000"/>
+              </a:lnSpc>
+              <a:spcBef>
+                <a:spcPts val="0"/>
+              </a:spcBef>
+              <a:spcAft>
+                <a:spcPts val="0"/>
+              </a:spcAft>
+              <a:buClr>
+                <a:srgbClr val="000000"/>
+              </a:buClr>
+              <a:buSzPts val="1400"/>
+              <a:buFont typeface="Arial"/>
               <a:buNone/>
             </a:pPr>
             <a:r>
               <a:t/>
             </a:r>
-            <a:endParaRPr/>
+            <a:endParaRPr b="0" i="0" sz="1400" u="none" cap="none" strike="noStrike">
+              <a:solidFill>
+                <a:srgbClr val="000000"/>
+              </a:solidFill>
+              <a:latin typeface="Arial"/>
+              <a:ea typeface="Arial"/>
+              <a:cs typeface="Arial"/>
+              <a:sym typeface="Arial"/>
+            </a:endParaRPr>
           </a:p>
         </p:txBody>
       </p:sp>
@@ -6171,19 +6742,35 @@
           </a:bodyPr>
           <a:lstStyle/>
           <a:p>
-            <a:pPr indent="0" lvl="0" marL="0" rtl="0" algn="l">
-              <a:spcBef>
-                <a:spcPts val="0"/>
-              </a:spcBef>
-              <a:spcAft>
-                <a:spcPts val="0"/>
-              </a:spcAft>
+            <a:pPr indent="0" lvl="0" marL="0" marR="0" rtl="0" algn="l">
+              <a:lnSpc>
+                <a:spcPct val="100000"/>
+              </a:lnSpc>
+              <a:spcBef>
+                <a:spcPts val="0"/>
+              </a:spcBef>
+              <a:spcAft>
+                <a:spcPts val="0"/>
+              </a:spcAft>
+              <a:buClr>
+                <a:srgbClr val="000000"/>
+              </a:buClr>
+              <a:buSzPts val="1400"/>
+              <a:buFont typeface="Arial"/>
               <a:buNone/>
             </a:pPr>
             <a:r>
               <a:t/>
             </a:r>
-            <a:endParaRPr/>
+            <a:endParaRPr b="0" i="0" sz="1400" u="none" cap="none" strike="noStrike">
+              <a:solidFill>
+                <a:srgbClr val="000000"/>
+              </a:solidFill>
+              <a:latin typeface="Arial"/>
+              <a:ea typeface="Arial"/>
+              <a:cs typeface="Arial"/>
+              <a:sym typeface="Arial"/>
+            </a:endParaRPr>
           </a:p>
         </p:txBody>
       </p:sp>
@@ -6213,6 +6800,9 @@
           <a:lstStyle/>
           <a:p>
             <a:pPr indent="0" lvl="0" marL="0" marR="0" rtl="0" algn="l">
+              <a:lnSpc>
+                <a:spcPct val="100000"/>
+              </a:lnSpc>
               <a:spcBef>
                 <a:spcPts val="0"/>
               </a:spcBef>
@@ -6351,19 +6941,35 @@
           </a:bodyPr>
           <a:lstStyle/>
           <a:p>
-            <a:pPr indent="0" lvl="0" marL="0" rtl="0" algn="l">
-              <a:spcBef>
-                <a:spcPts val="0"/>
-              </a:spcBef>
-              <a:spcAft>
-                <a:spcPts val="0"/>
-              </a:spcAft>
+            <a:pPr indent="0" lvl="0" marL="0" marR="0" rtl="0" algn="l">
+              <a:lnSpc>
+                <a:spcPct val="100000"/>
+              </a:lnSpc>
+              <a:spcBef>
+                <a:spcPts val="0"/>
+              </a:spcBef>
+              <a:spcAft>
+                <a:spcPts val="0"/>
+              </a:spcAft>
+              <a:buClr>
+                <a:srgbClr val="000000"/>
+              </a:buClr>
+              <a:buSzPts val="1400"/>
+              <a:buFont typeface="Arial"/>
               <a:buNone/>
             </a:pPr>
             <a:r>
               <a:t/>
             </a:r>
-            <a:endParaRPr/>
+            <a:endParaRPr b="0" i="0" sz="1400" u="none" cap="none" strike="noStrike">
+              <a:solidFill>
+                <a:srgbClr val="000000"/>
+              </a:solidFill>
+              <a:latin typeface="Arial"/>
+              <a:ea typeface="Arial"/>
+              <a:cs typeface="Arial"/>
+              <a:sym typeface="Arial"/>
+            </a:endParaRPr>
           </a:p>
         </p:txBody>
       </p:sp>
@@ -6394,19 +7000,35 @@
           </a:bodyPr>
           <a:lstStyle/>
           <a:p>
-            <a:pPr indent="0" lvl="0" marL="0" rtl="0" algn="l">
-              <a:spcBef>
-                <a:spcPts val="0"/>
-              </a:spcBef>
-              <a:spcAft>
-                <a:spcPts val="0"/>
-              </a:spcAft>
+            <a:pPr indent="0" lvl="0" marL="0" marR="0" rtl="0" algn="l">
+              <a:lnSpc>
+                <a:spcPct val="100000"/>
+              </a:lnSpc>
+              <a:spcBef>
+                <a:spcPts val="0"/>
+              </a:spcBef>
+              <a:spcAft>
+                <a:spcPts val="0"/>
+              </a:spcAft>
+              <a:buClr>
+                <a:srgbClr val="000000"/>
+              </a:buClr>
+              <a:buSzPts val="1400"/>
+              <a:buFont typeface="Arial"/>
               <a:buNone/>
             </a:pPr>
             <a:r>
               <a:t/>
             </a:r>
-            <a:endParaRPr/>
+            <a:endParaRPr b="0" i="0" sz="1400" u="none" cap="none" strike="noStrike">
+              <a:solidFill>
+                <a:srgbClr val="000000"/>
+              </a:solidFill>
+              <a:latin typeface="Arial"/>
+              <a:ea typeface="Arial"/>
+              <a:cs typeface="Arial"/>
+              <a:sym typeface="Arial"/>
+            </a:endParaRPr>
           </a:p>
         </p:txBody>
       </p:sp>
@@ -6436,6 +7058,9 @@
           <a:lstStyle/>
           <a:p>
             <a:pPr indent="0" lvl="0" marL="0" marR="0" rtl="0" algn="l">
+              <a:lnSpc>
+                <a:spcPct val="100000"/>
+              </a:lnSpc>
               <a:spcBef>
                 <a:spcPts val="0"/>
               </a:spcBef>
@@ -6574,19 +7199,35 @@
           </a:bodyPr>
           <a:lstStyle/>
           <a:p>
-            <a:pPr indent="0" lvl="0" marL="0" rtl="0" algn="l">
-              <a:spcBef>
-                <a:spcPts val="0"/>
-              </a:spcBef>
-              <a:spcAft>
-                <a:spcPts val="0"/>
-              </a:spcAft>
+            <a:pPr indent="0" lvl="0" marL="0" marR="0" rtl="0" algn="l">
+              <a:lnSpc>
+                <a:spcPct val="100000"/>
+              </a:lnSpc>
+              <a:spcBef>
+                <a:spcPts val="0"/>
+              </a:spcBef>
+              <a:spcAft>
+                <a:spcPts val="0"/>
+              </a:spcAft>
+              <a:buClr>
+                <a:srgbClr val="000000"/>
+              </a:buClr>
+              <a:buSzPts val="1400"/>
+              <a:buFont typeface="Arial"/>
               <a:buNone/>
             </a:pPr>
             <a:r>
               <a:t/>
             </a:r>
-            <a:endParaRPr/>
+            <a:endParaRPr b="0" i="0" sz="1400" u="none" cap="none" strike="noStrike">
+              <a:solidFill>
+                <a:srgbClr val="000000"/>
+              </a:solidFill>
+              <a:latin typeface="Arial"/>
+              <a:ea typeface="Arial"/>
+              <a:cs typeface="Arial"/>
+              <a:sym typeface="Arial"/>
+            </a:endParaRPr>
           </a:p>
         </p:txBody>
       </p:sp>
@@ -6617,19 +7258,35 @@
           </a:bodyPr>
           <a:lstStyle/>
           <a:p>
-            <a:pPr indent="0" lvl="0" marL="0" rtl="0" algn="l">
-              <a:spcBef>
-                <a:spcPts val="0"/>
-              </a:spcBef>
-              <a:spcAft>
-                <a:spcPts val="0"/>
-              </a:spcAft>
+            <a:pPr indent="0" lvl="0" marL="0" marR="0" rtl="0" algn="l">
+              <a:lnSpc>
+                <a:spcPct val="100000"/>
+              </a:lnSpc>
+              <a:spcBef>
+                <a:spcPts val="0"/>
+              </a:spcBef>
+              <a:spcAft>
+                <a:spcPts val="0"/>
+              </a:spcAft>
+              <a:buClr>
+                <a:srgbClr val="000000"/>
+              </a:buClr>
+              <a:buSzPts val="1400"/>
+              <a:buFont typeface="Arial"/>
               <a:buNone/>
             </a:pPr>
             <a:r>
               <a:t/>
             </a:r>
-            <a:endParaRPr/>
+            <a:endParaRPr b="0" i="0" sz="1400" u="none" cap="none" strike="noStrike">
+              <a:solidFill>
+                <a:srgbClr val="000000"/>
+              </a:solidFill>
+              <a:latin typeface="Arial"/>
+              <a:ea typeface="Arial"/>
+              <a:cs typeface="Arial"/>
+              <a:sym typeface="Arial"/>
+            </a:endParaRPr>
           </a:p>
         </p:txBody>
       </p:sp>
@@ -6659,6 +7316,9 @@
           <a:lstStyle/>
           <a:p>
             <a:pPr indent="0" lvl="0" marL="0" marR="0" rtl="0" algn="l">
+              <a:lnSpc>
+                <a:spcPct val="100000"/>
+              </a:lnSpc>
               <a:spcBef>
                 <a:spcPts val="0"/>
               </a:spcBef>
@@ -6788,6 +7448,9 @@
           <a:lstStyle/>
           <a:p>
             <a:pPr indent="0" lvl="0" marL="0" marR="0" rtl="0" algn="r">
+              <a:lnSpc>
+                <a:spcPct val="100000"/>
+              </a:lnSpc>
               <a:spcBef>
                 <a:spcPts val="0"/>
               </a:spcBef>
@@ -6883,6 +7546,9 @@
           <a:lstStyle/>
           <a:p>
             <a:pPr indent="0" lvl="0" marL="0" marR="0" rtl="0" algn="l">
+              <a:lnSpc>
+                <a:spcPct val="100000"/>
+              </a:lnSpc>
               <a:spcBef>
                 <a:spcPts val="0"/>
               </a:spcBef>
@@ -6946,6 +7612,9 @@
           <a:lstStyle/>
           <a:p>
             <a:pPr indent="0" lvl="0" marL="0" marR="0" rtl="0" algn="l">
+              <a:lnSpc>
+                <a:spcPct val="100000"/>
+              </a:lnSpc>
               <a:spcBef>
                 <a:spcPts val="0"/>
               </a:spcBef>
@@ -7018,19 +7687,35 @@
           </a:bodyPr>
           <a:lstStyle/>
           <a:p>
-            <a:pPr indent="0" lvl="0" marL="0" rtl="0" algn="l">
-              <a:spcBef>
-                <a:spcPts val="0"/>
-              </a:spcBef>
-              <a:spcAft>
-                <a:spcPts val="0"/>
-              </a:spcAft>
+            <a:pPr indent="0" lvl="0" marL="0" marR="0" rtl="0" algn="l">
+              <a:lnSpc>
+                <a:spcPct val="100000"/>
+              </a:lnSpc>
+              <a:spcBef>
+                <a:spcPts val="0"/>
+              </a:spcBef>
+              <a:spcAft>
+                <a:spcPts val="0"/>
+              </a:spcAft>
+              <a:buClr>
+                <a:srgbClr val="000000"/>
+              </a:buClr>
+              <a:buSzPts val="1400"/>
+              <a:buFont typeface="Arial"/>
               <a:buNone/>
             </a:pPr>
             <a:r>
               <a:t/>
             </a:r>
-            <a:endParaRPr/>
+            <a:endParaRPr b="0" i="0" sz="1400" u="none" cap="none" strike="noStrike">
+              <a:solidFill>
+                <a:srgbClr val="000000"/>
+              </a:solidFill>
+              <a:latin typeface="Arial"/>
+              <a:ea typeface="Arial"/>
+              <a:cs typeface="Arial"/>
+              <a:sym typeface="Arial"/>
+            </a:endParaRPr>
           </a:p>
         </p:txBody>
       </p:sp>
@@ -7061,19 +7746,35 @@
           </a:bodyPr>
           <a:lstStyle/>
           <a:p>
-            <a:pPr indent="0" lvl="0" marL="0" rtl="0" algn="l">
-              <a:spcBef>
-                <a:spcPts val="0"/>
-              </a:spcBef>
-              <a:spcAft>
-                <a:spcPts val="0"/>
-              </a:spcAft>
+            <a:pPr indent="0" lvl="0" marL="0" marR="0" rtl="0" algn="l">
+              <a:lnSpc>
+                <a:spcPct val="100000"/>
+              </a:lnSpc>
+              <a:spcBef>
+                <a:spcPts val="0"/>
+              </a:spcBef>
+              <a:spcAft>
+                <a:spcPts val="0"/>
+              </a:spcAft>
+              <a:buClr>
+                <a:srgbClr val="000000"/>
+              </a:buClr>
+              <a:buSzPts val="1400"/>
+              <a:buFont typeface="Arial"/>
               <a:buNone/>
             </a:pPr>
             <a:r>
               <a:t/>
             </a:r>
-            <a:endParaRPr/>
+            <a:endParaRPr b="0" i="0" sz="1400" u="none" cap="none" strike="noStrike">
+              <a:solidFill>
+                <a:srgbClr val="000000"/>
+              </a:solidFill>
+              <a:latin typeface="Arial"/>
+              <a:ea typeface="Arial"/>
+              <a:cs typeface="Arial"/>
+              <a:sym typeface="Arial"/>
+            </a:endParaRPr>
           </a:p>
         </p:txBody>
       </p:sp>
@@ -7103,6 +7804,9 @@
           <a:lstStyle/>
           <a:p>
             <a:pPr indent="0" lvl="0" marL="0" marR="0" rtl="0" algn="l">
+              <a:lnSpc>
+                <a:spcPct val="100000"/>
+              </a:lnSpc>
               <a:spcBef>
                 <a:spcPts val="0"/>
               </a:spcBef>
@@ -7392,19 +8096,35 @@
           </a:bodyPr>
           <a:lstStyle/>
           <a:p>
-            <a:pPr indent="0" lvl="0" marL="0" rtl="0" algn="l">
-              <a:spcBef>
-                <a:spcPts val="0"/>
-              </a:spcBef>
-              <a:spcAft>
-                <a:spcPts val="0"/>
-              </a:spcAft>
+            <a:pPr indent="0" lvl="0" marL="0" marR="0" rtl="0" algn="l">
+              <a:lnSpc>
+                <a:spcPct val="100000"/>
+              </a:lnSpc>
+              <a:spcBef>
+                <a:spcPts val="0"/>
+              </a:spcBef>
+              <a:spcAft>
+                <a:spcPts val="0"/>
+              </a:spcAft>
+              <a:buClr>
+                <a:srgbClr val="000000"/>
+              </a:buClr>
+              <a:buSzPts val="1400"/>
+              <a:buFont typeface="Arial"/>
               <a:buNone/>
             </a:pPr>
             <a:r>
               <a:t/>
             </a:r>
-            <a:endParaRPr/>
+            <a:endParaRPr b="0" i="0" sz="1400" u="none" cap="none" strike="noStrike">
+              <a:solidFill>
+                <a:srgbClr val="000000"/>
+              </a:solidFill>
+              <a:latin typeface="Arial"/>
+              <a:ea typeface="Arial"/>
+              <a:cs typeface="Arial"/>
+              <a:sym typeface="Arial"/>
+            </a:endParaRPr>
           </a:p>
         </p:txBody>
       </p:sp>
@@ -7435,19 +8155,35 @@
           </a:bodyPr>
           <a:lstStyle/>
           <a:p>
-            <a:pPr indent="0" lvl="0" marL="0" rtl="0" algn="l">
-              <a:spcBef>
-                <a:spcPts val="0"/>
-              </a:spcBef>
-              <a:spcAft>
-                <a:spcPts val="0"/>
-              </a:spcAft>
+            <a:pPr indent="0" lvl="0" marL="0" marR="0" rtl="0" algn="l">
+              <a:lnSpc>
+                <a:spcPct val="100000"/>
+              </a:lnSpc>
+              <a:spcBef>
+                <a:spcPts val="0"/>
+              </a:spcBef>
+              <a:spcAft>
+                <a:spcPts val="0"/>
+              </a:spcAft>
+              <a:buClr>
+                <a:srgbClr val="000000"/>
+              </a:buClr>
+              <a:buSzPts val="1400"/>
+              <a:buFont typeface="Arial"/>
               <a:buNone/>
             </a:pPr>
             <a:r>
               <a:t/>
             </a:r>
-            <a:endParaRPr/>
+            <a:endParaRPr b="0" i="0" sz="1400" u="none" cap="none" strike="noStrike">
+              <a:solidFill>
+                <a:srgbClr val="000000"/>
+              </a:solidFill>
+              <a:latin typeface="Arial"/>
+              <a:ea typeface="Arial"/>
+              <a:cs typeface="Arial"/>
+              <a:sym typeface="Arial"/>
+            </a:endParaRPr>
           </a:p>
         </p:txBody>
       </p:sp>
@@ -7477,6 +8213,9 @@
           <a:lstStyle/>
           <a:p>
             <a:pPr indent="0" lvl="0" marL="0" marR="0" rtl="0" algn="l">
+              <a:lnSpc>
+                <a:spcPct val="100000"/>
+              </a:lnSpc>
               <a:spcBef>
                 <a:spcPts val="0"/>
               </a:spcBef>
@@ -7606,31 +8345,7 @@
                 <a:cs typeface="Calibri"/>
                 <a:sym typeface="Calibri"/>
               </a:rPr>
-              <a:t>Nincs unit-teszt csomag. A generátort sok játszma validálja </a:t>
-            </a:r>
-            <a:r>
-              <a:rPr lang="en-US" sz="1250">
-                <a:solidFill>
-                  <a:srgbClr val="EDE7F2"/>
-                </a:solidFill>
-                <a:latin typeface="Calibri"/>
-                <a:ea typeface="Calibri"/>
-                <a:cs typeface="Calibri"/>
-                <a:sym typeface="Calibri"/>
-              </a:rPr>
-              <a:t>-</a:t>
-            </a:r>
-            <a:r>
-              <a:rPr b="0" i="0" lang="en-US" sz="1250" u="none" cap="none" strike="noStrike">
-                <a:solidFill>
-                  <a:srgbClr val="EDE7F2"/>
-                </a:solidFill>
-                <a:latin typeface="Calibri"/>
-                <a:ea typeface="Calibri"/>
-                <a:cs typeface="Calibri"/>
-                <a:sym typeface="Calibri"/>
-              </a:rPr>
-              <a:t> a felépítésbeli garanciáira támaszkodva.</a:t>
+              <a:t>Nincs unit-teszt csomag. A generátort sok játszma validálja - a felépítésbeli garanciáira támaszkodva.</a:t>
             </a:r>
             <a:endParaRPr b="0" i="0" sz="1250" u="none" cap="none" strike="noStrike">
               <a:solidFill>
@@ -7753,6 +8468,9 @@
           <a:lstStyle/>
           <a:p>
             <a:pPr indent="0" lvl="0" marL="0" marR="0" rtl="0" algn="r">
+              <a:lnSpc>
+                <a:spcPct val="100000"/>
+              </a:lnSpc>
               <a:spcBef>
                 <a:spcPts val="0"/>
               </a:spcBef>
@@ -7848,6 +8566,9 @@
           <a:lstStyle/>
           <a:p>
             <a:pPr indent="0" lvl="0" marL="0" marR="0" rtl="0" algn="l">
+              <a:lnSpc>
+                <a:spcPct val="100000"/>
+              </a:lnSpc>
               <a:spcBef>
                 <a:spcPts val="0"/>
               </a:spcBef>
@@ -7911,6 +8632,9 @@
           <a:lstStyle/>
           <a:p>
             <a:pPr indent="0" lvl="0" marL="0" marR="0" rtl="0" algn="l">
+              <a:lnSpc>
+                <a:spcPct val="100000"/>
+              </a:lnSpc>
               <a:spcBef>
                 <a:spcPts val="0"/>
               </a:spcBef>
@@ -7983,19 +8707,35 @@
           </a:bodyPr>
           <a:lstStyle/>
           <a:p>
-            <a:pPr indent="0" lvl="0" marL="0" rtl="0" algn="l">
-              <a:spcBef>
-                <a:spcPts val="0"/>
-              </a:spcBef>
-              <a:spcAft>
-                <a:spcPts val="0"/>
-              </a:spcAft>
+            <a:pPr indent="0" lvl="0" marL="0" marR="0" rtl="0" algn="l">
+              <a:lnSpc>
+                <a:spcPct val="100000"/>
+              </a:lnSpc>
+              <a:spcBef>
+                <a:spcPts val="0"/>
+              </a:spcBef>
+              <a:spcAft>
+                <a:spcPts val="0"/>
+              </a:spcAft>
+              <a:buClr>
+                <a:srgbClr val="000000"/>
+              </a:buClr>
+              <a:buSzPts val="1400"/>
+              <a:buFont typeface="Arial"/>
               <a:buNone/>
             </a:pPr>
             <a:r>
               <a:t/>
             </a:r>
-            <a:endParaRPr/>
+            <a:endParaRPr b="0" i="0" sz="1400" u="none" cap="none" strike="noStrike">
+              <a:solidFill>
+                <a:srgbClr val="000000"/>
+              </a:solidFill>
+              <a:latin typeface="Arial"/>
+              <a:ea typeface="Arial"/>
+              <a:cs typeface="Arial"/>
+              <a:sym typeface="Arial"/>
+            </a:endParaRPr>
           </a:p>
         </p:txBody>
       </p:sp>
@@ -8025,6 +8765,9 @@
           <a:lstStyle/>
           <a:p>
             <a:pPr indent="0" lvl="0" marL="0" marR="0" rtl="0" algn="l">
+              <a:lnSpc>
+                <a:spcPct val="100000"/>
+              </a:lnSpc>
               <a:spcBef>
                 <a:spcPts val="0"/>
               </a:spcBef>
@@ -8163,19 +8906,35 @@
           </a:bodyPr>
           <a:lstStyle/>
           <a:p>
-            <a:pPr indent="0" lvl="0" marL="0" rtl="0" algn="l">
-              <a:spcBef>
-                <a:spcPts val="0"/>
-              </a:spcBef>
-              <a:spcAft>
-                <a:spcPts val="0"/>
-              </a:spcAft>
+            <a:pPr indent="0" lvl="0" marL="0" marR="0" rtl="0" algn="l">
+              <a:lnSpc>
+                <a:spcPct val="100000"/>
+              </a:lnSpc>
+              <a:spcBef>
+                <a:spcPts val="0"/>
+              </a:spcBef>
+              <a:spcAft>
+                <a:spcPts val="0"/>
+              </a:spcAft>
+              <a:buClr>
+                <a:srgbClr val="000000"/>
+              </a:buClr>
+              <a:buSzPts val="1400"/>
+              <a:buFont typeface="Arial"/>
               <a:buNone/>
             </a:pPr>
             <a:r>
               <a:t/>
             </a:r>
-            <a:endParaRPr/>
+            <a:endParaRPr b="0" i="0" sz="1400" u="none" cap="none" strike="noStrike">
+              <a:solidFill>
+                <a:srgbClr val="000000"/>
+              </a:solidFill>
+              <a:latin typeface="Arial"/>
+              <a:ea typeface="Arial"/>
+              <a:cs typeface="Arial"/>
+              <a:sym typeface="Arial"/>
+            </a:endParaRPr>
           </a:p>
         </p:txBody>
       </p:sp>
@@ -8205,6 +8964,9 @@
           <a:lstStyle/>
           <a:p>
             <a:pPr indent="0" lvl="0" marL="0" marR="0" rtl="0" algn="l">
+              <a:lnSpc>
+                <a:spcPct val="100000"/>
+              </a:lnSpc>
               <a:spcBef>
                 <a:spcPts val="0"/>
               </a:spcBef>
@@ -8343,19 +9105,35 @@
           </a:bodyPr>
           <a:lstStyle/>
           <a:p>
-            <a:pPr indent="0" lvl="0" marL="0" rtl="0" algn="l">
-              <a:spcBef>
-                <a:spcPts val="0"/>
-              </a:spcBef>
-              <a:spcAft>
-                <a:spcPts val="0"/>
-              </a:spcAft>
+            <a:pPr indent="0" lvl="0" marL="0" marR="0" rtl="0" algn="l">
+              <a:lnSpc>
+                <a:spcPct val="100000"/>
+              </a:lnSpc>
+              <a:spcBef>
+                <a:spcPts val="0"/>
+              </a:spcBef>
+              <a:spcAft>
+                <a:spcPts val="0"/>
+              </a:spcAft>
+              <a:buClr>
+                <a:srgbClr val="000000"/>
+              </a:buClr>
+              <a:buSzPts val="1400"/>
+              <a:buFont typeface="Arial"/>
               <a:buNone/>
             </a:pPr>
             <a:r>
               <a:t/>
             </a:r>
-            <a:endParaRPr/>
+            <a:endParaRPr b="0" i="0" sz="1400" u="none" cap="none" strike="noStrike">
+              <a:solidFill>
+                <a:srgbClr val="000000"/>
+              </a:solidFill>
+              <a:latin typeface="Arial"/>
+              <a:ea typeface="Arial"/>
+              <a:cs typeface="Arial"/>
+              <a:sym typeface="Arial"/>
+            </a:endParaRPr>
           </a:p>
         </p:txBody>
       </p:sp>
@@ -8385,6 +9163,9 @@
           <a:lstStyle/>
           <a:p>
             <a:pPr indent="0" lvl="0" marL="0" marR="0" rtl="0" algn="l">
+              <a:lnSpc>
+                <a:spcPct val="100000"/>
+              </a:lnSpc>
               <a:spcBef>
                 <a:spcPts val="0"/>
               </a:spcBef>
@@ -8474,7 +9255,31 @@
                 <a:cs typeface="Calibri"/>
                 <a:sym typeface="Calibri"/>
               </a:rPr>
-              <a:t>Új ellenségek a régi kód érintése nélkül.</a:t>
+              <a:t>Új ellenségek, tárgyak, szobák, </a:t>
+            </a:r>
+            <a:r>
+              <a:rPr lang="en-US" sz="1200">
+                <a:solidFill>
+                  <a:srgbClr val="EDE7F2"/>
+                </a:solidFill>
+                <a:latin typeface="Calibri"/>
+                <a:ea typeface="Calibri"/>
+                <a:cs typeface="Calibri"/>
+                <a:sym typeface="Calibri"/>
+              </a:rPr>
+              <a:t>szobatípusok, játékos karakterek, stb. </a:t>
+            </a:r>
+            <a:r>
+              <a:rPr b="0" i="0" lang="en-US" sz="1200" u="none" cap="none" strike="noStrike">
+                <a:solidFill>
+                  <a:srgbClr val="EDE7F2"/>
+                </a:solidFill>
+                <a:latin typeface="Calibri"/>
+                <a:ea typeface="Calibri"/>
+                <a:cs typeface="Calibri"/>
+                <a:sym typeface="Calibri"/>
+              </a:rPr>
+              <a:t> a régi kód érintése nélkül.</a:t>
             </a:r>
             <a:endParaRPr b="0" i="0" sz="1200" u="none" cap="none" strike="noStrike">
               <a:solidFill>
@@ -8523,19 +9328,35 @@
           </a:bodyPr>
           <a:lstStyle/>
           <a:p>
-            <a:pPr indent="0" lvl="0" marL="0" rtl="0" algn="l">
-              <a:spcBef>
-                <a:spcPts val="0"/>
-              </a:spcBef>
-              <a:spcAft>
-                <a:spcPts val="0"/>
-              </a:spcAft>
+            <a:pPr indent="0" lvl="0" marL="0" marR="0" rtl="0" algn="l">
+              <a:lnSpc>
+                <a:spcPct val="100000"/>
+              </a:lnSpc>
+              <a:spcBef>
+                <a:spcPts val="0"/>
+              </a:spcBef>
+              <a:spcAft>
+                <a:spcPts val="0"/>
+              </a:spcAft>
+              <a:buClr>
+                <a:srgbClr val="000000"/>
+              </a:buClr>
+              <a:buSzPts val="1400"/>
+              <a:buFont typeface="Arial"/>
               <a:buNone/>
             </a:pPr>
             <a:r>
               <a:t/>
             </a:r>
-            <a:endParaRPr/>
+            <a:endParaRPr b="0" i="0" sz="1400" u="none" cap="none" strike="noStrike">
+              <a:solidFill>
+                <a:srgbClr val="000000"/>
+              </a:solidFill>
+              <a:latin typeface="Arial"/>
+              <a:ea typeface="Arial"/>
+              <a:cs typeface="Arial"/>
+              <a:sym typeface="Arial"/>
+            </a:endParaRPr>
           </a:p>
         </p:txBody>
       </p:sp>
@@ -8565,6 +9386,9 @@
           <a:lstStyle/>
           <a:p>
             <a:pPr indent="0" lvl="0" marL="0" marR="0" rtl="0" algn="l">
+              <a:lnSpc>
+                <a:spcPct val="100000"/>
+              </a:lnSpc>
               <a:spcBef>
                 <a:spcPts val="0"/>
               </a:spcBef>
@@ -8694,6 +9518,9 @@
           <a:lstStyle/>
           <a:p>
             <a:pPr indent="0" lvl="0" marL="0" marR="0" rtl="0" algn="r">
+              <a:lnSpc>
+                <a:spcPct val="100000"/>
+              </a:lnSpc>
               <a:spcBef>
                 <a:spcPts val="0"/>
               </a:spcBef>
@@ -8790,19 +9617,35 @@
           </a:bodyPr>
           <a:lstStyle/>
           <a:p>
-            <a:pPr indent="0" lvl="0" marL="0" rtl="0" algn="l">
-              <a:spcBef>
-                <a:spcPts val="0"/>
-              </a:spcBef>
-              <a:spcAft>
-                <a:spcPts val="0"/>
-              </a:spcAft>
+            <a:pPr indent="0" lvl="0" marL="0" marR="0" rtl="0" algn="l">
+              <a:lnSpc>
+                <a:spcPct val="100000"/>
+              </a:lnSpc>
+              <a:spcBef>
+                <a:spcPts val="0"/>
+              </a:spcBef>
+              <a:spcAft>
+                <a:spcPts val="0"/>
+              </a:spcAft>
+              <a:buClr>
+                <a:srgbClr val="000000"/>
+              </a:buClr>
+              <a:buSzPts val="1400"/>
+              <a:buFont typeface="Arial"/>
               <a:buNone/>
             </a:pPr>
             <a:r>
               <a:t/>
             </a:r>
-            <a:endParaRPr/>
+            <a:endParaRPr b="0" i="0" sz="1400" u="none" cap="none" strike="noStrike">
+              <a:solidFill>
+                <a:srgbClr val="000000"/>
+              </a:solidFill>
+              <a:latin typeface="Arial"/>
+              <a:ea typeface="Arial"/>
+              <a:cs typeface="Arial"/>
+              <a:sym typeface="Arial"/>
+            </a:endParaRPr>
           </a:p>
         </p:txBody>
       </p:sp>
@@ -8833,19 +9676,35 @@
           </a:bodyPr>
           <a:lstStyle/>
           <a:p>
-            <a:pPr indent="0" lvl="0" marL="0" rtl="0" algn="l">
-              <a:spcBef>
-                <a:spcPts val="0"/>
-              </a:spcBef>
-              <a:spcAft>
-                <a:spcPts val="0"/>
-              </a:spcAft>
+            <a:pPr indent="0" lvl="0" marL="0" marR="0" rtl="0" algn="l">
+              <a:lnSpc>
+                <a:spcPct val="100000"/>
+              </a:lnSpc>
+              <a:spcBef>
+                <a:spcPts val="0"/>
+              </a:spcBef>
+              <a:spcAft>
+                <a:spcPts val="0"/>
+              </a:spcAft>
+              <a:buClr>
+                <a:srgbClr val="000000"/>
+              </a:buClr>
+              <a:buSzPts val="1400"/>
+              <a:buFont typeface="Arial"/>
               <a:buNone/>
             </a:pPr>
             <a:r>
               <a:t/>
             </a:r>
-            <a:endParaRPr/>
+            <a:endParaRPr b="0" i="0" sz="1400" u="none" cap="none" strike="noStrike">
+              <a:solidFill>
+                <a:srgbClr val="000000"/>
+              </a:solidFill>
+              <a:latin typeface="Arial"/>
+              <a:ea typeface="Arial"/>
+              <a:cs typeface="Arial"/>
+              <a:sym typeface="Arial"/>
+            </a:endParaRPr>
           </a:p>
         </p:txBody>
       </p:sp>
@@ -8876,19 +9735,35 @@
           </a:bodyPr>
           <a:lstStyle/>
           <a:p>
-            <a:pPr indent="0" lvl="0" marL="0" rtl="0" algn="l">
-              <a:spcBef>
-                <a:spcPts val="0"/>
-              </a:spcBef>
-              <a:spcAft>
-                <a:spcPts val="0"/>
-              </a:spcAft>
+            <a:pPr indent="0" lvl="0" marL="0" marR="0" rtl="0" algn="l">
+              <a:lnSpc>
+                <a:spcPct val="100000"/>
+              </a:lnSpc>
+              <a:spcBef>
+                <a:spcPts val="0"/>
+              </a:spcBef>
+              <a:spcAft>
+                <a:spcPts val="0"/>
+              </a:spcAft>
+              <a:buClr>
+                <a:srgbClr val="000000"/>
+              </a:buClr>
+              <a:buSzPts val="1400"/>
+              <a:buFont typeface="Arial"/>
               <a:buNone/>
             </a:pPr>
             <a:r>
               <a:t/>
             </a:r>
-            <a:endParaRPr/>
+            <a:endParaRPr b="0" i="0" sz="1400" u="none" cap="none" strike="noStrike">
+              <a:solidFill>
+                <a:srgbClr val="000000"/>
+              </a:solidFill>
+              <a:latin typeface="Arial"/>
+              <a:ea typeface="Arial"/>
+              <a:cs typeface="Arial"/>
+              <a:sym typeface="Arial"/>
+            </a:endParaRPr>
           </a:p>
         </p:txBody>
       </p:sp>
@@ -8918,6 +9793,9 @@
           <a:lstStyle/>
           <a:p>
             <a:pPr indent="0" lvl="0" marL="0" marR="0" rtl="0" algn="ctr">
+              <a:lnSpc>
+                <a:spcPct val="100000"/>
+              </a:lnSpc>
               <a:spcBef>
                 <a:spcPts val="0"/>
               </a:spcBef>
@@ -8932,7 +9810,7 @@
               <a:buNone/>
             </a:pPr>
             <a:r>
-              <a:rPr b="1" lang="en-US" sz="5000">
+              <a:rPr b="1" i="0" lang="en-US" sz="5000" u="none" cap="none" strike="noStrike">
                 <a:solidFill>
                   <a:srgbClr val="EDE7F2"/>
                 </a:solidFill>
@@ -8981,6 +9859,9 @@
           <a:lstStyle/>
           <a:p>
             <a:pPr indent="0" lvl="0" marL="0" marR="0" rtl="0" algn="ctr">
+              <a:lnSpc>
+                <a:spcPct val="100000"/>
+              </a:lnSpc>
               <a:spcBef>
                 <a:spcPts val="0"/>
               </a:spcBef>
@@ -8995,7 +9876,7 @@
               <a:buNone/>
             </a:pPr>
             <a:r>
-              <a:rPr lang="en-US" sz="1800">
+              <a:rPr b="0" i="0" lang="en-US" sz="1800" u="none" cap="none" strike="noStrike">
                 <a:solidFill>
                   <a:srgbClr val="3FB8AF"/>
                 </a:solidFill>
@@ -9076,6 +9957,9 @@
           <a:lstStyle/>
           <a:p>
             <a:pPr indent="0" lvl="0" marL="0" marR="0" rtl="0" algn="l">
+              <a:lnSpc>
+                <a:spcPct val="100000"/>
+              </a:lnSpc>
               <a:spcBef>
                 <a:spcPts val="0"/>
               </a:spcBef>
@@ -9139,6 +10023,9 @@
           <a:lstStyle/>
           <a:p>
             <a:pPr indent="0" lvl="0" marL="0" marR="0" rtl="0" algn="l">
+              <a:lnSpc>
+                <a:spcPct val="100000"/>
+              </a:lnSpc>
               <a:spcBef>
                 <a:spcPts val="0"/>
               </a:spcBef>
@@ -9202,6 +10089,9 @@
           <a:lstStyle/>
           <a:p>
             <a:pPr indent="0" lvl="0" marL="0" marR="0" rtl="0" algn="l">
+              <a:lnSpc>
+                <a:spcPct val="100000"/>
+              </a:lnSpc>
               <a:spcBef>
                 <a:spcPts val="0"/>
               </a:spcBef>
@@ -9327,31 +10217,7 @@
                 <a:cs typeface="Calibri"/>
                 <a:sym typeface="Calibri"/>
               </a:rPr>
-              <a:t>A játékos egy kómában lévő elme, amely saját tudatalattijának rétegein át felfelé kapaszkodva próbál felébredni. Minden játszma egy kísérlet a felszín elérésére. Ha a játszma halállal ér véget, az elme megtörik, és nem ébred fel </a:t>
-            </a:r>
-            <a:r>
-              <a:rPr lang="en-US" sz="1500">
-                <a:solidFill>
-                  <a:srgbClr val="EDE7F2"/>
-                </a:solidFill>
-                <a:latin typeface="Calibri"/>
-                <a:ea typeface="Calibri"/>
-                <a:cs typeface="Calibri"/>
-                <a:sym typeface="Calibri"/>
-              </a:rPr>
-              <a:t>-</a:t>
-            </a:r>
-            <a:r>
-              <a:rPr b="0" i="0" lang="en-US" sz="1500" u="none" cap="none" strike="noStrike">
-                <a:solidFill>
-                  <a:srgbClr val="EDE7F2"/>
-                </a:solidFill>
-                <a:latin typeface="Calibri"/>
-                <a:ea typeface="Calibri"/>
-                <a:cs typeface="Calibri"/>
-                <a:sym typeface="Calibri"/>
-              </a:rPr>
-              <a:t> ez a kudarc, amit a cím megnevez.</a:t>
+              <a:t>A játékos egy kómában lévő elme, amely saját tudatalattijának rétegein át felfelé kapaszkodva próbál felébredni. Minden játszma egy kísérlet a felszín elérésére. Ha a játszma halállal ér véget, az elme megtörik, és nem ébred fel - ez a kudarc, amit a cím megnevez.</a:t>
             </a:r>
             <a:endParaRPr b="0" i="0" sz="1500" u="none" cap="none" strike="noStrike">
               <a:solidFill>
@@ -9400,19 +10266,35 @@
           </a:bodyPr>
           <a:lstStyle/>
           <a:p>
-            <a:pPr indent="0" lvl="0" marL="0" rtl="0" algn="l">
-              <a:spcBef>
-                <a:spcPts val="0"/>
-              </a:spcBef>
-              <a:spcAft>
-                <a:spcPts val="0"/>
-              </a:spcAft>
+            <a:pPr indent="0" lvl="0" marL="0" marR="0" rtl="0" algn="l">
+              <a:lnSpc>
+                <a:spcPct val="100000"/>
+              </a:lnSpc>
+              <a:spcBef>
+                <a:spcPts val="0"/>
+              </a:spcBef>
+              <a:spcAft>
+                <a:spcPts val="0"/>
+              </a:spcAft>
+              <a:buClr>
+                <a:srgbClr val="000000"/>
+              </a:buClr>
+              <a:buSzPts val="1400"/>
+              <a:buFont typeface="Arial"/>
               <a:buNone/>
             </a:pPr>
             <a:r>
               <a:t/>
             </a:r>
-            <a:endParaRPr/>
+            <a:endParaRPr b="0" i="0" sz="1400" u="none" cap="none" strike="noStrike">
+              <a:solidFill>
+                <a:srgbClr val="000000"/>
+              </a:solidFill>
+              <a:latin typeface="Arial"/>
+              <a:ea typeface="Arial"/>
+              <a:cs typeface="Arial"/>
+              <a:sym typeface="Arial"/>
+            </a:endParaRPr>
           </a:p>
         </p:txBody>
       </p:sp>
@@ -9443,19 +10325,35 @@
           </a:bodyPr>
           <a:lstStyle/>
           <a:p>
-            <a:pPr indent="0" lvl="0" marL="0" rtl="0" algn="l">
-              <a:spcBef>
-                <a:spcPts val="0"/>
-              </a:spcBef>
-              <a:spcAft>
-                <a:spcPts val="0"/>
-              </a:spcAft>
+            <a:pPr indent="0" lvl="0" marL="0" marR="0" rtl="0" algn="l">
+              <a:lnSpc>
+                <a:spcPct val="100000"/>
+              </a:lnSpc>
+              <a:spcBef>
+                <a:spcPts val="0"/>
+              </a:spcBef>
+              <a:spcAft>
+                <a:spcPts val="0"/>
+              </a:spcAft>
+              <a:buClr>
+                <a:srgbClr val="000000"/>
+              </a:buClr>
+              <a:buSzPts val="1400"/>
+              <a:buFont typeface="Arial"/>
               <a:buNone/>
             </a:pPr>
             <a:r>
               <a:t/>
             </a:r>
-            <a:endParaRPr/>
+            <a:endParaRPr b="0" i="0" sz="1400" u="none" cap="none" strike="noStrike">
+              <a:solidFill>
+                <a:srgbClr val="000000"/>
+              </a:solidFill>
+              <a:latin typeface="Arial"/>
+              <a:ea typeface="Arial"/>
+              <a:cs typeface="Arial"/>
+              <a:sym typeface="Arial"/>
+            </a:endParaRPr>
           </a:p>
         </p:txBody>
       </p:sp>
@@ -9485,6 +10383,9 @@
           <a:lstStyle/>
           <a:p>
             <a:pPr indent="0" lvl="0" marL="0" marR="0" rtl="0" algn="l">
+              <a:lnSpc>
+                <a:spcPct val="100000"/>
+              </a:lnSpc>
               <a:spcBef>
                 <a:spcPts val="0"/>
               </a:spcBef>
@@ -9586,31 +10487,7 @@
                 <a:cs typeface="Calibri"/>
                 <a:sym typeface="Calibri"/>
               </a:rPr>
-              <a:t>minden játszmához új világot ad </a:t>
-            </a:r>
-            <a:r>
-              <a:rPr lang="en-US" sz="1300">
-                <a:solidFill>
-                  <a:srgbClr val="EDE7F2"/>
-                </a:solidFill>
-                <a:latin typeface="Calibri"/>
-                <a:ea typeface="Calibri"/>
-                <a:cs typeface="Calibri"/>
-                <a:sym typeface="Calibri"/>
-              </a:rPr>
-              <a:t>-</a:t>
-            </a:r>
-            <a:r>
-              <a:rPr b="0" i="0" lang="en-US" sz="1300" u="none" cap="none" strike="noStrike">
-                <a:solidFill>
-                  <a:srgbClr val="EDE7F2"/>
-                </a:solidFill>
-                <a:latin typeface="Calibri"/>
-                <a:ea typeface="Calibri"/>
-                <a:cs typeface="Calibri"/>
-                <a:sym typeface="Calibri"/>
-              </a:rPr>
-              <a:t> valódi újrajátszhatóság és igazi mérnöki probléma.</a:t>
+              <a:t>minden játszmához új világot ad - valódi újrajátszhatóság és igazi mérnöki probléma.</a:t>
             </a:r>
             <a:endParaRPr b="0" i="0" sz="1300" u="none" cap="none" strike="noStrike">
               <a:solidFill>
@@ -9806,6 +10683,9 @@
           <a:lstStyle/>
           <a:p>
             <a:pPr indent="0" lvl="0" marL="0" marR="0" rtl="0" algn="r">
+              <a:lnSpc>
+                <a:spcPct val="100000"/>
+              </a:lnSpc>
               <a:spcBef>
                 <a:spcPts val="0"/>
               </a:spcBef>
@@ -9901,6 +10781,9 @@
           <a:lstStyle/>
           <a:p>
             <a:pPr indent="0" lvl="0" marL="0" marR="0" rtl="0" algn="l">
+              <a:lnSpc>
+                <a:spcPct val="100000"/>
+              </a:lnSpc>
               <a:spcBef>
                 <a:spcPts val="0"/>
               </a:spcBef>
@@ -9964,6 +10847,9 @@
           <a:lstStyle/>
           <a:p>
             <a:pPr indent="0" lvl="0" marL="0" marR="0" rtl="0" algn="l">
+              <a:lnSpc>
+                <a:spcPct val="100000"/>
+              </a:lnSpc>
               <a:spcBef>
                 <a:spcPts val="0"/>
               </a:spcBef>
@@ -10036,19 +10922,35 @@
           </a:bodyPr>
           <a:lstStyle/>
           <a:p>
-            <a:pPr indent="0" lvl="0" marL="0" rtl="0" algn="l">
-              <a:spcBef>
-                <a:spcPts val="0"/>
-              </a:spcBef>
-              <a:spcAft>
-                <a:spcPts val="0"/>
-              </a:spcAft>
+            <a:pPr indent="0" lvl="0" marL="0" marR="0" rtl="0" algn="l">
+              <a:lnSpc>
+                <a:spcPct val="100000"/>
+              </a:lnSpc>
+              <a:spcBef>
+                <a:spcPts val="0"/>
+              </a:spcBef>
+              <a:spcAft>
+                <a:spcPts val="0"/>
+              </a:spcAft>
+              <a:buClr>
+                <a:srgbClr val="000000"/>
+              </a:buClr>
+              <a:buSzPts val="1400"/>
+              <a:buFont typeface="Arial"/>
               <a:buNone/>
             </a:pPr>
             <a:r>
               <a:t/>
             </a:r>
-            <a:endParaRPr/>
+            <a:endParaRPr b="0" i="0" sz="1400" u="none" cap="none" strike="noStrike">
+              <a:solidFill>
+                <a:srgbClr val="000000"/>
+              </a:solidFill>
+              <a:latin typeface="Arial"/>
+              <a:ea typeface="Arial"/>
+              <a:cs typeface="Arial"/>
+              <a:sym typeface="Arial"/>
+            </a:endParaRPr>
           </a:p>
         </p:txBody>
       </p:sp>
@@ -10079,19 +10981,35 @@
           </a:bodyPr>
           <a:lstStyle/>
           <a:p>
-            <a:pPr indent="0" lvl="0" marL="0" rtl="0" algn="l">
-              <a:spcBef>
-                <a:spcPts val="0"/>
-              </a:spcBef>
-              <a:spcAft>
-                <a:spcPts val="0"/>
-              </a:spcAft>
+            <a:pPr indent="0" lvl="0" marL="0" marR="0" rtl="0" algn="l">
+              <a:lnSpc>
+                <a:spcPct val="100000"/>
+              </a:lnSpc>
+              <a:spcBef>
+                <a:spcPts val="0"/>
+              </a:spcBef>
+              <a:spcAft>
+                <a:spcPts val="0"/>
+              </a:spcAft>
+              <a:buClr>
+                <a:srgbClr val="000000"/>
+              </a:buClr>
+              <a:buSzPts val="1400"/>
+              <a:buFont typeface="Arial"/>
               <a:buNone/>
             </a:pPr>
             <a:r>
               <a:t/>
             </a:r>
-            <a:endParaRPr/>
+            <a:endParaRPr b="0" i="0" sz="1400" u="none" cap="none" strike="noStrike">
+              <a:solidFill>
+                <a:srgbClr val="000000"/>
+              </a:solidFill>
+              <a:latin typeface="Arial"/>
+              <a:ea typeface="Arial"/>
+              <a:cs typeface="Arial"/>
+              <a:sym typeface="Arial"/>
+            </a:endParaRPr>
           </a:p>
         </p:txBody>
       </p:sp>
@@ -10121,6 +11039,9 @@
           <a:lstStyle/>
           <a:p>
             <a:pPr indent="0" lvl="0" marL="0" marR="0" rtl="0" algn="l">
+              <a:lnSpc>
+                <a:spcPct val="100000"/>
+              </a:lnSpc>
               <a:spcBef>
                 <a:spcPts val="0"/>
               </a:spcBef>
@@ -10259,19 +11180,35 @@
           </a:bodyPr>
           <a:lstStyle/>
           <a:p>
-            <a:pPr indent="0" lvl="0" marL="0" rtl="0" algn="l">
-              <a:spcBef>
-                <a:spcPts val="0"/>
-              </a:spcBef>
-              <a:spcAft>
-                <a:spcPts val="0"/>
-              </a:spcAft>
+            <a:pPr indent="0" lvl="0" marL="0" marR="0" rtl="0" algn="l">
+              <a:lnSpc>
+                <a:spcPct val="100000"/>
+              </a:lnSpc>
+              <a:spcBef>
+                <a:spcPts val="0"/>
+              </a:spcBef>
+              <a:spcAft>
+                <a:spcPts val="0"/>
+              </a:spcAft>
+              <a:buClr>
+                <a:srgbClr val="000000"/>
+              </a:buClr>
+              <a:buSzPts val="1400"/>
+              <a:buFont typeface="Arial"/>
               <a:buNone/>
             </a:pPr>
             <a:r>
               <a:t/>
             </a:r>
-            <a:endParaRPr/>
+            <a:endParaRPr b="0" i="0" sz="1400" u="none" cap="none" strike="noStrike">
+              <a:solidFill>
+                <a:srgbClr val="000000"/>
+              </a:solidFill>
+              <a:latin typeface="Arial"/>
+              <a:ea typeface="Arial"/>
+              <a:cs typeface="Arial"/>
+              <a:sym typeface="Arial"/>
+            </a:endParaRPr>
           </a:p>
         </p:txBody>
       </p:sp>
@@ -10302,19 +11239,35 @@
           </a:bodyPr>
           <a:lstStyle/>
           <a:p>
-            <a:pPr indent="0" lvl="0" marL="0" rtl="0" algn="l">
-              <a:spcBef>
-                <a:spcPts val="0"/>
-              </a:spcBef>
-              <a:spcAft>
-                <a:spcPts val="0"/>
-              </a:spcAft>
+            <a:pPr indent="0" lvl="0" marL="0" marR="0" rtl="0" algn="l">
+              <a:lnSpc>
+                <a:spcPct val="100000"/>
+              </a:lnSpc>
+              <a:spcBef>
+                <a:spcPts val="0"/>
+              </a:spcBef>
+              <a:spcAft>
+                <a:spcPts val="0"/>
+              </a:spcAft>
+              <a:buClr>
+                <a:srgbClr val="000000"/>
+              </a:buClr>
+              <a:buSzPts val="1400"/>
+              <a:buFont typeface="Arial"/>
               <a:buNone/>
             </a:pPr>
             <a:r>
               <a:t/>
             </a:r>
-            <a:endParaRPr/>
+            <a:endParaRPr b="0" i="0" sz="1400" u="none" cap="none" strike="noStrike">
+              <a:solidFill>
+                <a:srgbClr val="000000"/>
+              </a:solidFill>
+              <a:latin typeface="Arial"/>
+              <a:ea typeface="Arial"/>
+              <a:cs typeface="Arial"/>
+              <a:sym typeface="Arial"/>
+            </a:endParaRPr>
           </a:p>
         </p:txBody>
       </p:sp>
@@ -10344,6 +11297,9 @@
           <a:lstStyle/>
           <a:p>
             <a:pPr indent="0" lvl="0" marL="0" marR="0" rtl="0" algn="l">
+              <a:lnSpc>
+                <a:spcPct val="100000"/>
+              </a:lnSpc>
               <a:spcBef>
                 <a:spcPts val="0"/>
               </a:spcBef>
@@ -10482,19 +11438,35 @@
           </a:bodyPr>
           <a:lstStyle/>
           <a:p>
-            <a:pPr indent="0" lvl="0" marL="0" rtl="0" algn="l">
-              <a:spcBef>
-                <a:spcPts val="0"/>
-              </a:spcBef>
-              <a:spcAft>
-                <a:spcPts val="0"/>
-              </a:spcAft>
+            <a:pPr indent="0" lvl="0" marL="0" marR="0" rtl="0" algn="l">
+              <a:lnSpc>
+                <a:spcPct val="100000"/>
+              </a:lnSpc>
+              <a:spcBef>
+                <a:spcPts val="0"/>
+              </a:spcBef>
+              <a:spcAft>
+                <a:spcPts val="0"/>
+              </a:spcAft>
+              <a:buClr>
+                <a:srgbClr val="000000"/>
+              </a:buClr>
+              <a:buSzPts val="1400"/>
+              <a:buFont typeface="Arial"/>
               <a:buNone/>
             </a:pPr>
             <a:r>
               <a:t/>
             </a:r>
-            <a:endParaRPr/>
+            <a:endParaRPr b="0" i="0" sz="1400" u="none" cap="none" strike="noStrike">
+              <a:solidFill>
+                <a:srgbClr val="000000"/>
+              </a:solidFill>
+              <a:latin typeface="Arial"/>
+              <a:ea typeface="Arial"/>
+              <a:cs typeface="Arial"/>
+              <a:sym typeface="Arial"/>
+            </a:endParaRPr>
           </a:p>
         </p:txBody>
       </p:sp>
@@ -10525,19 +11497,35 @@
           </a:bodyPr>
           <a:lstStyle/>
           <a:p>
-            <a:pPr indent="0" lvl="0" marL="0" rtl="0" algn="l">
-              <a:spcBef>
-                <a:spcPts val="0"/>
-              </a:spcBef>
-              <a:spcAft>
-                <a:spcPts val="0"/>
-              </a:spcAft>
+            <a:pPr indent="0" lvl="0" marL="0" marR="0" rtl="0" algn="l">
+              <a:lnSpc>
+                <a:spcPct val="100000"/>
+              </a:lnSpc>
+              <a:spcBef>
+                <a:spcPts val="0"/>
+              </a:spcBef>
+              <a:spcAft>
+                <a:spcPts val="0"/>
+              </a:spcAft>
+              <a:buClr>
+                <a:srgbClr val="000000"/>
+              </a:buClr>
+              <a:buSzPts val="1400"/>
+              <a:buFont typeface="Arial"/>
               <a:buNone/>
             </a:pPr>
             <a:r>
               <a:t/>
             </a:r>
-            <a:endParaRPr/>
+            <a:endParaRPr b="0" i="0" sz="1400" u="none" cap="none" strike="noStrike">
+              <a:solidFill>
+                <a:srgbClr val="000000"/>
+              </a:solidFill>
+              <a:latin typeface="Arial"/>
+              <a:ea typeface="Arial"/>
+              <a:cs typeface="Arial"/>
+              <a:sym typeface="Arial"/>
+            </a:endParaRPr>
           </a:p>
         </p:txBody>
       </p:sp>
@@ -10567,6 +11555,9 @@
           <a:lstStyle/>
           <a:p>
             <a:pPr indent="0" lvl="0" marL="0" marR="0" rtl="0" algn="l">
+              <a:lnSpc>
+                <a:spcPct val="100000"/>
+              </a:lnSpc>
               <a:spcBef>
                 <a:spcPts val="0"/>
               </a:spcBef>
@@ -10705,19 +11696,35 @@
           </a:bodyPr>
           <a:lstStyle/>
           <a:p>
-            <a:pPr indent="0" lvl="0" marL="0" rtl="0" algn="l">
-              <a:spcBef>
-                <a:spcPts val="0"/>
-              </a:spcBef>
-              <a:spcAft>
-                <a:spcPts val="0"/>
-              </a:spcAft>
+            <a:pPr indent="0" lvl="0" marL="0" marR="0" rtl="0" algn="l">
+              <a:lnSpc>
+                <a:spcPct val="100000"/>
+              </a:lnSpc>
+              <a:spcBef>
+                <a:spcPts val="0"/>
+              </a:spcBef>
+              <a:spcAft>
+                <a:spcPts val="0"/>
+              </a:spcAft>
+              <a:buClr>
+                <a:srgbClr val="000000"/>
+              </a:buClr>
+              <a:buSzPts val="1400"/>
+              <a:buFont typeface="Arial"/>
               <a:buNone/>
             </a:pPr>
             <a:r>
               <a:t/>
             </a:r>
-            <a:endParaRPr/>
+            <a:endParaRPr b="0" i="0" sz="1400" u="none" cap="none" strike="noStrike">
+              <a:solidFill>
+                <a:srgbClr val="000000"/>
+              </a:solidFill>
+              <a:latin typeface="Arial"/>
+              <a:ea typeface="Arial"/>
+              <a:cs typeface="Arial"/>
+              <a:sym typeface="Arial"/>
+            </a:endParaRPr>
           </a:p>
         </p:txBody>
       </p:sp>
@@ -10748,19 +11755,35 @@
           </a:bodyPr>
           <a:lstStyle/>
           <a:p>
-            <a:pPr indent="0" lvl="0" marL="0" rtl="0" algn="l">
-              <a:spcBef>
-                <a:spcPts val="0"/>
-              </a:spcBef>
-              <a:spcAft>
-                <a:spcPts val="0"/>
-              </a:spcAft>
+            <a:pPr indent="0" lvl="0" marL="0" marR="0" rtl="0" algn="l">
+              <a:lnSpc>
+                <a:spcPct val="100000"/>
+              </a:lnSpc>
+              <a:spcBef>
+                <a:spcPts val="0"/>
+              </a:spcBef>
+              <a:spcAft>
+                <a:spcPts val="0"/>
+              </a:spcAft>
+              <a:buClr>
+                <a:srgbClr val="000000"/>
+              </a:buClr>
+              <a:buSzPts val="1400"/>
+              <a:buFont typeface="Arial"/>
               <a:buNone/>
             </a:pPr>
             <a:r>
               <a:t/>
             </a:r>
-            <a:endParaRPr/>
+            <a:endParaRPr b="0" i="0" sz="1400" u="none" cap="none" strike="noStrike">
+              <a:solidFill>
+                <a:srgbClr val="000000"/>
+              </a:solidFill>
+              <a:latin typeface="Arial"/>
+              <a:ea typeface="Arial"/>
+              <a:cs typeface="Arial"/>
+              <a:sym typeface="Arial"/>
+            </a:endParaRPr>
           </a:p>
         </p:txBody>
       </p:sp>
@@ -10790,6 +11813,9 @@
           <a:lstStyle/>
           <a:p>
             <a:pPr indent="0" lvl="0" marL="0" marR="0" rtl="0" algn="l">
+              <a:lnSpc>
+                <a:spcPct val="100000"/>
+              </a:lnSpc>
               <a:spcBef>
                 <a:spcPts val="0"/>
               </a:spcBef>
@@ -10928,19 +11954,35 @@
           </a:bodyPr>
           <a:lstStyle/>
           <a:p>
-            <a:pPr indent="0" lvl="0" marL="0" rtl="0" algn="l">
-              <a:spcBef>
-                <a:spcPts val="0"/>
-              </a:spcBef>
-              <a:spcAft>
-                <a:spcPts val="0"/>
-              </a:spcAft>
+            <a:pPr indent="0" lvl="0" marL="0" marR="0" rtl="0" algn="l">
+              <a:lnSpc>
+                <a:spcPct val="100000"/>
+              </a:lnSpc>
+              <a:spcBef>
+                <a:spcPts val="0"/>
+              </a:spcBef>
+              <a:spcAft>
+                <a:spcPts val="0"/>
+              </a:spcAft>
+              <a:buClr>
+                <a:srgbClr val="000000"/>
+              </a:buClr>
+              <a:buSzPts val="1400"/>
+              <a:buFont typeface="Arial"/>
               <a:buNone/>
             </a:pPr>
             <a:r>
               <a:t/>
             </a:r>
-            <a:endParaRPr/>
+            <a:endParaRPr b="0" i="0" sz="1400" u="none" cap="none" strike="noStrike">
+              <a:solidFill>
+                <a:srgbClr val="000000"/>
+              </a:solidFill>
+              <a:latin typeface="Arial"/>
+              <a:ea typeface="Arial"/>
+              <a:cs typeface="Arial"/>
+              <a:sym typeface="Arial"/>
+            </a:endParaRPr>
           </a:p>
         </p:txBody>
       </p:sp>
@@ -10971,19 +12013,35 @@
           </a:bodyPr>
           <a:lstStyle/>
           <a:p>
-            <a:pPr indent="0" lvl="0" marL="0" rtl="0" algn="l">
-              <a:spcBef>
-                <a:spcPts val="0"/>
-              </a:spcBef>
-              <a:spcAft>
-                <a:spcPts val="0"/>
-              </a:spcAft>
+            <a:pPr indent="0" lvl="0" marL="0" marR="0" rtl="0" algn="l">
+              <a:lnSpc>
+                <a:spcPct val="100000"/>
+              </a:lnSpc>
+              <a:spcBef>
+                <a:spcPts val="0"/>
+              </a:spcBef>
+              <a:spcAft>
+                <a:spcPts val="0"/>
+              </a:spcAft>
+              <a:buClr>
+                <a:srgbClr val="000000"/>
+              </a:buClr>
+              <a:buSzPts val="1400"/>
+              <a:buFont typeface="Arial"/>
               <a:buNone/>
             </a:pPr>
             <a:r>
               <a:t/>
             </a:r>
-            <a:endParaRPr/>
+            <a:endParaRPr b="0" i="0" sz="1400" u="none" cap="none" strike="noStrike">
+              <a:solidFill>
+                <a:srgbClr val="000000"/>
+              </a:solidFill>
+              <a:latin typeface="Arial"/>
+              <a:ea typeface="Arial"/>
+              <a:cs typeface="Arial"/>
+              <a:sym typeface="Arial"/>
+            </a:endParaRPr>
           </a:p>
         </p:txBody>
       </p:sp>
@@ -11013,6 +12071,9 @@
           <a:lstStyle/>
           <a:p>
             <a:pPr indent="0" lvl="0" marL="0" marR="0" rtl="0" algn="l">
+              <a:lnSpc>
+                <a:spcPct val="100000"/>
+              </a:lnSpc>
               <a:spcBef>
                 <a:spcPts val="0"/>
               </a:spcBef>
@@ -11151,19 +12212,35 @@
           </a:bodyPr>
           <a:lstStyle/>
           <a:p>
-            <a:pPr indent="0" lvl="0" marL="0" rtl="0" algn="l">
-              <a:spcBef>
-                <a:spcPts val="0"/>
-              </a:spcBef>
-              <a:spcAft>
-                <a:spcPts val="0"/>
-              </a:spcAft>
+            <a:pPr indent="0" lvl="0" marL="0" marR="0" rtl="0" algn="l">
+              <a:lnSpc>
+                <a:spcPct val="100000"/>
+              </a:lnSpc>
+              <a:spcBef>
+                <a:spcPts val="0"/>
+              </a:spcBef>
+              <a:spcAft>
+                <a:spcPts val="0"/>
+              </a:spcAft>
+              <a:buClr>
+                <a:srgbClr val="000000"/>
+              </a:buClr>
+              <a:buSzPts val="1400"/>
+              <a:buFont typeface="Arial"/>
               <a:buNone/>
             </a:pPr>
             <a:r>
               <a:t/>
             </a:r>
-            <a:endParaRPr/>
+            <a:endParaRPr b="0" i="0" sz="1400" u="none" cap="none" strike="noStrike">
+              <a:solidFill>
+                <a:srgbClr val="000000"/>
+              </a:solidFill>
+              <a:latin typeface="Arial"/>
+              <a:ea typeface="Arial"/>
+              <a:cs typeface="Arial"/>
+              <a:sym typeface="Arial"/>
+            </a:endParaRPr>
           </a:p>
         </p:txBody>
       </p:sp>
@@ -11194,19 +12271,35 @@
           </a:bodyPr>
           <a:lstStyle/>
           <a:p>
-            <a:pPr indent="0" lvl="0" marL="0" rtl="0" algn="l">
-              <a:spcBef>
-                <a:spcPts val="0"/>
-              </a:spcBef>
-              <a:spcAft>
-                <a:spcPts val="0"/>
-              </a:spcAft>
+            <a:pPr indent="0" lvl="0" marL="0" marR="0" rtl="0" algn="l">
+              <a:lnSpc>
+                <a:spcPct val="100000"/>
+              </a:lnSpc>
+              <a:spcBef>
+                <a:spcPts val="0"/>
+              </a:spcBef>
+              <a:spcAft>
+                <a:spcPts val="0"/>
+              </a:spcAft>
+              <a:buClr>
+                <a:srgbClr val="000000"/>
+              </a:buClr>
+              <a:buSzPts val="1400"/>
+              <a:buFont typeface="Arial"/>
               <a:buNone/>
             </a:pPr>
             <a:r>
               <a:t/>
             </a:r>
-            <a:endParaRPr/>
+            <a:endParaRPr b="0" i="0" sz="1400" u="none" cap="none" strike="noStrike">
+              <a:solidFill>
+                <a:srgbClr val="000000"/>
+              </a:solidFill>
+              <a:latin typeface="Arial"/>
+              <a:ea typeface="Arial"/>
+              <a:cs typeface="Arial"/>
+              <a:sym typeface="Arial"/>
+            </a:endParaRPr>
           </a:p>
         </p:txBody>
       </p:sp>
@@ -11236,6 +12329,9 @@
           <a:lstStyle/>
           <a:p>
             <a:pPr indent="0" lvl="0" marL="0" marR="0" rtl="0" algn="l">
+              <a:lnSpc>
+                <a:spcPct val="100000"/>
+              </a:lnSpc>
               <a:spcBef>
                 <a:spcPts val="0"/>
               </a:spcBef>
@@ -11365,6 +12461,9 @@
           <a:lstStyle/>
           <a:p>
             <a:pPr indent="0" lvl="0" marL="0" marR="0" rtl="0" algn="r">
+              <a:lnSpc>
+                <a:spcPct val="100000"/>
+              </a:lnSpc>
               <a:spcBef>
                 <a:spcPts val="0"/>
               </a:spcBef>
@@ -11460,6 +12559,9 @@
           <a:lstStyle/>
           <a:p>
             <a:pPr indent="0" lvl="0" marL="0" marR="0" rtl="0" algn="l">
+              <a:lnSpc>
+                <a:spcPct val="100000"/>
+              </a:lnSpc>
               <a:spcBef>
                 <a:spcPts val="0"/>
               </a:spcBef>
@@ -11523,6 +12625,9 @@
           <a:lstStyle/>
           <a:p>
             <a:pPr indent="0" lvl="0" marL="0" marR="0" rtl="0" algn="l">
+              <a:lnSpc>
+                <a:spcPct val="100000"/>
+              </a:lnSpc>
               <a:spcBef>
                 <a:spcPts val="0"/>
               </a:spcBef>
@@ -11612,31 +12717,7 @@
                 <a:cs typeface="Calibri"/>
                 <a:sym typeface="Calibri"/>
               </a:rPr>
-              <a:t>A roguelike műfaj a procedurális generálást párosítja a permadeath-szel. A Katagma a szobaalapú, felülnézetes ágat követi </a:t>
-            </a:r>
-            <a:r>
-              <a:rPr lang="en-US">
-                <a:solidFill>
-                  <a:srgbClr val="EDE7F2"/>
-                </a:solidFill>
-                <a:latin typeface="Calibri"/>
-                <a:ea typeface="Calibri"/>
-                <a:cs typeface="Calibri"/>
-                <a:sym typeface="Calibri"/>
-              </a:rPr>
-              <a:t>-</a:t>
-            </a:r>
-            <a:r>
-              <a:rPr b="0" i="0" lang="en-US" sz="1400" u="none" cap="none" strike="noStrike">
-                <a:solidFill>
-                  <a:srgbClr val="EDE7F2"/>
-                </a:solidFill>
-                <a:latin typeface="Calibri"/>
-                <a:ea typeface="Calibri"/>
-                <a:cs typeface="Calibri"/>
-                <a:sym typeface="Calibri"/>
-              </a:rPr>
-              <a:t> legközelebb a The Binding of Isaachez - és tudatosan választott saját pozíciókat képvisel.</a:t>
+              <a:t>A roguelike műfaj a procedurális generálást párosítja a permadeath-szel. A Katagma a szobaalapú, felülnézetes ágat követi - legközelebb a The Binding of Isaachez - és tudatosan választott saját pozíciókat képvisel.</a:t>
             </a:r>
             <a:endParaRPr b="0" i="0" sz="1400" u="none" cap="none" strike="noStrike">
               <a:solidFill>
@@ -11676,6 +12757,9 @@
           <a:lstStyle/>
           <a:p>
             <a:pPr indent="0" lvl="0" marL="0" marR="0" rtl="0" algn="l">
+              <a:lnSpc>
+                <a:spcPct val="100000"/>
+              </a:lnSpc>
               <a:spcBef>
                 <a:spcPts val="0"/>
               </a:spcBef>
@@ -11730,6 +12814,9 @@
           <a:lstStyle/>
           <a:p>
             <a:pPr indent="0" lvl="0" marL="0" marR="0" rtl="0" algn="ctr">
+              <a:lnSpc>
+                <a:spcPct val="100000"/>
+              </a:lnSpc>
               <a:spcBef>
                 <a:spcPts val="0"/>
               </a:spcBef>
@@ -11793,6 +12880,9 @@
           <a:lstStyle/>
           <a:p>
             <a:pPr indent="0" lvl="0" marL="0" marR="0" rtl="0" algn="ctr">
+              <a:lnSpc>
+                <a:spcPct val="100000"/>
+              </a:lnSpc>
               <a:spcBef>
                 <a:spcPts val="0"/>
               </a:spcBef>
@@ -11856,6 +12946,9 @@
           <a:lstStyle/>
           <a:p>
             <a:pPr indent="0" lvl="0" marL="0" marR="0" rtl="0" algn="ctr">
+              <a:lnSpc>
+                <a:spcPct val="100000"/>
+              </a:lnSpc>
               <a:spcBef>
                 <a:spcPts val="0"/>
               </a:spcBef>
@@ -11919,6 +13012,9 @@
           <a:lstStyle/>
           <a:p>
             <a:pPr indent="0" lvl="0" marL="0" marR="0" rtl="0" algn="ctr">
+              <a:lnSpc>
+                <a:spcPct val="100000"/>
+              </a:lnSpc>
               <a:spcBef>
                 <a:spcPts val="0"/>
               </a:spcBef>
@@ -11983,19 +13079,35 @@
           </a:bodyPr>
           <a:lstStyle/>
           <a:p>
-            <a:pPr indent="0" lvl="0" marL="0" rtl="0" algn="l">
-              <a:spcBef>
-                <a:spcPts val="0"/>
-              </a:spcBef>
-              <a:spcAft>
-                <a:spcPts val="0"/>
-              </a:spcAft>
+            <a:pPr indent="0" lvl="0" marL="0" marR="0" rtl="0" algn="l">
+              <a:lnSpc>
+                <a:spcPct val="100000"/>
+              </a:lnSpc>
+              <a:spcBef>
+                <a:spcPts val="0"/>
+              </a:spcBef>
+              <a:spcAft>
+                <a:spcPts val="0"/>
+              </a:spcAft>
+              <a:buClr>
+                <a:srgbClr val="000000"/>
+              </a:buClr>
+              <a:buSzPts val="1400"/>
+              <a:buFont typeface="Arial"/>
               <a:buNone/>
             </a:pPr>
             <a:r>
               <a:t/>
             </a:r>
-            <a:endParaRPr/>
+            <a:endParaRPr b="0" i="0" sz="1400" u="none" cap="none" strike="noStrike">
+              <a:solidFill>
+                <a:srgbClr val="000000"/>
+              </a:solidFill>
+              <a:latin typeface="Arial"/>
+              <a:ea typeface="Arial"/>
+              <a:cs typeface="Arial"/>
+              <a:sym typeface="Arial"/>
+            </a:endParaRPr>
           </a:p>
         </p:txBody>
       </p:sp>
@@ -12025,6 +13137,9 @@
           <a:lstStyle/>
           <a:p>
             <a:pPr indent="0" lvl="0" marL="0" marR="0" rtl="0" algn="l">
+              <a:lnSpc>
+                <a:spcPct val="100000"/>
+              </a:lnSpc>
               <a:spcBef>
                 <a:spcPts val="0"/>
               </a:spcBef>
@@ -12088,6 +13203,9 @@
           <a:lstStyle/>
           <a:p>
             <a:pPr indent="0" lvl="0" marL="0" marR="0" rtl="0" algn="ctr">
+              <a:lnSpc>
+                <a:spcPct val="100000"/>
+              </a:lnSpc>
               <a:spcBef>
                 <a:spcPts val="0"/>
               </a:spcBef>
@@ -12151,6 +13269,9 @@
           <a:lstStyle/>
           <a:p>
             <a:pPr indent="0" lvl="0" marL="0" marR="0" rtl="0" algn="ctr">
+              <a:lnSpc>
+                <a:spcPct val="100000"/>
+              </a:lnSpc>
               <a:spcBef>
                 <a:spcPts val="0"/>
               </a:spcBef>
@@ -12214,6 +13335,9 @@
           <a:lstStyle/>
           <a:p>
             <a:pPr indent="0" lvl="0" marL="0" marR="0" rtl="0" algn="ctr">
+              <a:lnSpc>
+                <a:spcPct val="100000"/>
+              </a:lnSpc>
               <a:spcBef>
                 <a:spcPts val="0"/>
               </a:spcBef>
@@ -12277,6 +13401,9 @@
           <a:lstStyle/>
           <a:p>
             <a:pPr indent="0" lvl="0" marL="0" marR="0" rtl="0" algn="ctr">
+              <a:lnSpc>
+                <a:spcPct val="100000"/>
+              </a:lnSpc>
               <a:spcBef>
                 <a:spcPts val="0"/>
               </a:spcBef>
@@ -12340,6 +13467,9 @@
           <a:lstStyle/>
           <a:p>
             <a:pPr indent="0" lvl="0" marL="0" marR="0" rtl="0" algn="l">
+              <a:lnSpc>
+                <a:spcPct val="100000"/>
+              </a:lnSpc>
               <a:spcBef>
                 <a:spcPts val="0"/>
               </a:spcBef>
@@ -12403,6 +13533,9 @@
           <a:lstStyle/>
           <a:p>
             <a:pPr indent="0" lvl="0" marL="0" marR="0" rtl="0" algn="ctr">
+              <a:lnSpc>
+                <a:spcPct val="100000"/>
+              </a:lnSpc>
               <a:spcBef>
                 <a:spcPts val="0"/>
               </a:spcBef>
@@ -12466,6 +13599,9 @@
           <a:lstStyle/>
           <a:p>
             <a:pPr indent="0" lvl="0" marL="0" marR="0" rtl="0" algn="ctr">
+              <a:lnSpc>
+                <a:spcPct val="100000"/>
+              </a:lnSpc>
               <a:spcBef>
                 <a:spcPts val="0"/>
               </a:spcBef>
@@ -12529,6 +13665,9 @@
           <a:lstStyle/>
           <a:p>
             <a:pPr indent="0" lvl="0" marL="0" marR="0" rtl="0" algn="ctr">
+              <a:lnSpc>
+                <a:spcPct val="100000"/>
+              </a:lnSpc>
               <a:spcBef>
                 <a:spcPts val="0"/>
               </a:spcBef>
@@ -12592,6 +13731,9 @@
           <a:lstStyle/>
           <a:p>
             <a:pPr indent="0" lvl="0" marL="0" marR="0" rtl="0" algn="ctr">
+              <a:lnSpc>
+                <a:spcPct val="100000"/>
+              </a:lnSpc>
               <a:spcBef>
                 <a:spcPts val="0"/>
               </a:spcBef>
@@ -12656,19 +13798,35 @@
           </a:bodyPr>
           <a:lstStyle/>
           <a:p>
-            <a:pPr indent="0" lvl="0" marL="0" rtl="0" algn="l">
-              <a:spcBef>
-                <a:spcPts val="0"/>
-              </a:spcBef>
-              <a:spcAft>
-                <a:spcPts val="0"/>
-              </a:spcAft>
+            <a:pPr indent="0" lvl="0" marL="0" marR="0" rtl="0" algn="l">
+              <a:lnSpc>
+                <a:spcPct val="100000"/>
+              </a:lnSpc>
+              <a:spcBef>
+                <a:spcPts val="0"/>
+              </a:spcBef>
+              <a:spcAft>
+                <a:spcPts val="0"/>
+              </a:spcAft>
+              <a:buClr>
+                <a:srgbClr val="000000"/>
+              </a:buClr>
+              <a:buSzPts val="1400"/>
+              <a:buFont typeface="Arial"/>
               <a:buNone/>
             </a:pPr>
             <a:r>
               <a:t/>
             </a:r>
-            <a:endParaRPr/>
+            <a:endParaRPr b="0" i="0" sz="1400" u="none" cap="none" strike="noStrike">
+              <a:solidFill>
+                <a:srgbClr val="000000"/>
+              </a:solidFill>
+              <a:latin typeface="Arial"/>
+              <a:ea typeface="Arial"/>
+              <a:cs typeface="Arial"/>
+              <a:sym typeface="Arial"/>
+            </a:endParaRPr>
           </a:p>
         </p:txBody>
       </p:sp>
@@ -12698,6 +13856,9 @@
           <a:lstStyle/>
           <a:p>
             <a:pPr indent="0" lvl="0" marL="0" marR="0" rtl="0" algn="l">
+              <a:lnSpc>
+                <a:spcPct val="100000"/>
+              </a:lnSpc>
               <a:spcBef>
                 <a:spcPts val="0"/>
               </a:spcBef>
@@ -12761,6 +13922,9 @@
           <a:lstStyle/>
           <a:p>
             <a:pPr indent="0" lvl="0" marL="0" marR="0" rtl="0" algn="ctr">
+              <a:lnSpc>
+                <a:spcPct val="100000"/>
+              </a:lnSpc>
               <a:spcBef>
                 <a:spcPts val="0"/>
               </a:spcBef>
@@ -12824,6 +13988,9 @@
           <a:lstStyle/>
           <a:p>
             <a:pPr indent="0" lvl="0" marL="0" marR="0" rtl="0" algn="ctr">
+              <a:lnSpc>
+                <a:spcPct val="100000"/>
+              </a:lnSpc>
               <a:spcBef>
                 <a:spcPts val="0"/>
               </a:spcBef>
@@ -12887,6 +14054,9 @@
           <a:lstStyle/>
           <a:p>
             <a:pPr indent="0" lvl="0" marL="0" marR="0" rtl="0" algn="ctr">
+              <a:lnSpc>
+                <a:spcPct val="100000"/>
+              </a:lnSpc>
               <a:spcBef>
                 <a:spcPts val="0"/>
               </a:spcBef>
@@ -12950,6 +14120,9 @@
           <a:lstStyle/>
           <a:p>
             <a:pPr indent="0" lvl="0" marL="0" marR="0" rtl="0" algn="ctr">
+              <a:lnSpc>
+                <a:spcPct val="100000"/>
+              </a:lnSpc>
               <a:spcBef>
                 <a:spcPts val="0"/>
               </a:spcBef>
@@ -13013,6 +14186,9 @@
           <a:lstStyle/>
           <a:p>
             <a:pPr indent="0" lvl="0" marL="0" marR="0" rtl="0" algn="l">
+              <a:lnSpc>
+                <a:spcPct val="100000"/>
+              </a:lnSpc>
               <a:spcBef>
                 <a:spcPts val="0"/>
               </a:spcBef>
@@ -13076,6 +14252,9 @@
           <a:lstStyle/>
           <a:p>
             <a:pPr indent="0" lvl="0" marL="0" marR="0" rtl="0" algn="ctr">
+              <a:lnSpc>
+                <a:spcPct val="100000"/>
+              </a:lnSpc>
               <a:spcBef>
                 <a:spcPts val="0"/>
               </a:spcBef>
@@ -13139,6 +14318,9 @@
           <a:lstStyle/>
           <a:p>
             <a:pPr indent="0" lvl="0" marL="0" marR="0" rtl="0" algn="ctr">
+              <a:lnSpc>
+                <a:spcPct val="100000"/>
+              </a:lnSpc>
               <a:spcBef>
                 <a:spcPts val="0"/>
               </a:spcBef>
@@ -13202,6 +14384,9 @@
           <a:lstStyle/>
           <a:p>
             <a:pPr indent="0" lvl="0" marL="0" marR="0" rtl="0" algn="ctr">
+              <a:lnSpc>
+                <a:spcPct val="100000"/>
+              </a:lnSpc>
               <a:spcBef>
                 <a:spcPts val="0"/>
               </a:spcBef>
@@ -13265,6 +14450,9 @@
           <a:lstStyle/>
           <a:p>
             <a:pPr indent="0" lvl="0" marL="0" marR="0" rtl="0" algn="ctr">
+              <a:lnSpc>
+                <a:spcPct val="100000"/>
+              </a:lnSpc>
               <a:spcBef>
                 <a:spcPts val="0"/>
               </a:spcBef>
@@ -13328,6 +14516,9 @@
           <a:lstStyle/>
           <a:p>
             <a:pPr indent="0" lvl="0" marL="0" marR="0" rtl="0" algn="r">
+              <a:lnSpc>
+                <a:spcPct val="100000"/>
+              </a:lnSpc>
               <a:spcBef>
                 <a:spcPts val="0"/>
               </a:spcBef>
@@ -13423,6 +14614,9 @@
           <a:lstStyle/>
           <a:p>
             <a:pPr indent="0" lvl="0" marL="0" marR="0" rtl="0" algn="l">
+              <a:lnSpc>
+                <a:spcPct val="100000"/>
+              </a:lnSpc>
               <a:spcBef>
                 <a:spcPts val="0"/>
               </a:spcBef>
@@ -13486,6 +14680,9 @@
           <a:lstStyle/>
           <a:p>
             <a:pPr indent="0" lvl="0" marL="0" marR="0" rtl="0" algn="l">
+              <a:lnSpc>
+                <a:spcPct val="100000"/>
+              </a:lnSpc>
               <a:spcBef>
                 <a:spcPts val="0"/>
               </a:spcBef>
@@ -13624,19 +14821,35 @@
           </a:bodyPr>
           <a:lstStyle/>
           <a:p>
-            <a:pPr indent="0" lvl="0" marL="0" rtl="0" algn="l">
-              <a:spcBef>
-                <a:spcPts val="0"/>
-              </a:spcBef>
-              <a:spcAft>
-                <a:spcPts val="0"/>
-              </a:spcAft>
+            <a:pPr indent="0" lvl="0" marL="0" marR="0" rtl="0" algn="l">
+              <a:lnSpc>
+                <a:spcPct val="100000"/>
+              </a:lnSpc>
+              <a:spcBef>
+                <a:spcPts val="0"/>
+              </a:spcBef>
+              <a:spcAft>
+                <a:spcPts val="0"/>
+              </a:spcAft>
+              <a:buClr>
+                <a:srgbClr val="000000"/>
+              </a:buClr>
+              <a:buSzPts val="1400"/>
+              <a:buFont typeface="Arial"/>
               <a:buNone/>
             </a:pPr>
             <a:r>
               <a:t/>
             </a:r>
-            <a:endParaRPr/>
+            <a:endParaRPr b="0" i="0" sz="1400" u="none" cap="none" strike="noStrike">
+              <a:solidFill>
+                <a:srgbClr val="000000"/>
+              </a:solidFill>
+              <a:latin typeface="Arial"/>
+              <a:ea typeface="Arial"/>
+              <a:cs typeface="Arial"/>
+              <a:sym typeface="Arial"/>
+            </a:endParaRPr>
           </a:p>
         </p:txBody>
       </p:sp>
@@ -13667,19 +14880,35 @@
           </a:bodyPr>
           <a:lstStyle/>
           <a:p>
-            <a:pPr indent="0" lvl="0" marL="0" rtl="0" algn="l">
-              <a:spcBef>
-                <a:spcPts val="0"/>
-              </a:spcBef>
-              <a:spcAft>
-                <a:spcPts val="0"/>
-              </a:spcAft>
+            <a:pPr indent="0" lvl="0" marL="0" marR="0" rtl="0" algn="l">
+              <a:lnSpc>
+                <a:spcPct val="100000"/>
+              </a:lnSpc>
+              <a:spcBef>
+                <a:spcPts val="0"/>
+              </a:spcBef>
+              <a:spcAft>
+                <a:spcPts val="0"/>
+              </a:spcAft>
+              <a:buClr>
+                <a:srgbClr val="000000"/>
+              </a:buClr>
+              <a:buSzPts val="1400"/>
+              <a:buFont typeface="Arial"/>
               <a:buNone/>
             </a:pPr>
             <a:r>
               <a:t/>
             </a:r>
-            <a:endParaRPr/>
+            <a:endParaRPr b="0" i="0" sz="1400" u="none" cap="none" strike="noStrike">
+              <a:solidFill>
+                <a:srgbClr val="000000"/>
+              </a:solidFill>
+              <a:latin typeface="Arial"/>
+              <a:ea typeface="Arial"/>
+              <a:cs typeface="Arial"/>
+              <a:sym typeface="Arial"/>
+            </a:endParaRPr>
           </a:p>
         </p:txBody>
       </p:sp>
@@ -13709,6 +14938,9 @@
           <a:lstStyle/>
           <a:p>
             <a:pPr indent="0" lvl="0" marL="0" marR="0" rtl="0" algn="l">
+              <a:lnSpc>
+                <a:spcPct val="100000"/>
+              </a:lnSpc>
               <a:spcBef>
                 <a:spcPts val="0"/>
               </a:spcBef>
@@ -13798,31 +15030,7 @@
                 <a:cs typeface="Calibri"/>
                 <a:sym typeface="Calibri"/>
               </a:rPr>
-              <a:t>A játszma hiteles állapota </a:t>
-            </a:r>
-            <a:r>
-              <a:rPr lang="en-US" sz="1150">
-                <a:solidFill>
-                  <a:srgbClr val="EDE7F2"/>
-                </a:solidFill>
-                <a:latin typeface="Calibri"/>
-                <a:ea typeface="Calibri"/>
-                <a:cs typeface="Calibri"/>
-                <a:sym typeface="Calibri"/>
-              </a:rPr>
-              <a:t>-</a:t>
-            </a:r>
-            <a:r>
-              <a:rPr b="0" i="0" lang="en-US" sz="1150" u="none" cap="none" strike="noStrike">
-                <a:solidFill>
-                  <a:srgbClr val="EDE7F2"/>
-                </a:solidFill>
-                <a:latin typeface="Calibri"/>
-                <a:ea typeface="Calibri"/>
-                <a:cs typeface="Calibri"/>
-                <a:sym typeface="Calibri"/>
-              </a:rPr>
-              <a:t> pontszám, statisztikák, fő folyamat. A rendszerek neki jelentenek.</a:t>
+              <a:t>A játszma hiteles állapota - pontszám, statisztikák, fő folyamat. A rendszerek neki jelentenek.</a:t>
             </a:r>
             <a:endParaRPr b="0" i="0" sz="1150" u="none" cap="none" strike="noStrike">
               <a:solidFill>
@@ -13871,19 +15079,35 @@
           </a:bodyPr>
           <a:lstStyle/>
           <a:p>
-            <a:pPr indent="0" lvl="0" marL="0" rtl="0" algn="l">
-              <a:spcBef>
-                <a:spcPts val="0"/>
-              </a:spcBef>
-              <a:spcAft>
-                <a:spcPts val="0"/>
-              </a:spcAft>
+            <a:pPr indent="0" lvl="0" marL="0" marR="0" rtl="0" algn="l">
+              <a:lnSpc>
+                <a:spcPct val="100000"/>
+              </a:lnSpc>
+              <a:spcBef>
+                <a:spcPts val="0"/>
+              </a:spcBef>
+              <a:spcAft>
+                <a:spcPts val="0"/>
+              </a:spcAft>
+              <a:buClr>
+                <a:srgbClr val="000000"/>
+              </a:buClr>
+              <a:buSzPts val="1400"/>
+              <a:buFont typeface="Arial"/>
               <a:buNone/>
             </a:pPr>
             <a:r>
               <a:t/>
             </a:r>
-            <a:endParaRPr/>
+            <a:endParaRPr b="0" i="0" sz="1400" u="none" cap="none" strike="noStrike">
+              <a:solidFill>
+                <a:srgbClr val="000000"/>
+              </a:solidFill>
+              <a:latin typeface="Arial"/>
+              <a:ea typeface="Arial"/>
+              <a:cs typeface="Arial"/>
+              <a:sym typeface="Arial"/>
+            </a:endParaRPr>
           </a:p>
         </p:txBody>
       </p:sp>
@@ -13914,19 +15138,35 @@
           </a:bodyPr>
           <a:lstStyle/>
           <a:p>
-            <a:pPr indent="0" lvl="0" marL="0" rtl="0" algn="l">
-              <a:spcBef>
-                <a:spcPts val="0"/>
-              </a:spcBef>
-              <a:spcAft>
-                <a:spcPts val="0"/>
-              </a:spcAft>
+            <a:pPr indent="0" lvl="0" marL="0" marR="0" rtl="0" algn="l">
+              <a:lnSpc>
+                <a:spcPct val="100000"/>
+              </a:lnSpc>
+              <a:spcBef>
+                <a:spcPts val="0"/>
+              </a:spcBef>
+              <a:spcAft>
+                <a:spcPts val="0"/>
+              </a:spcAft>
+              <a:buClr>
+                <a:srgbClr val="000000"/>
+              </a:buClr>
+              <a:buSzPts val="1400"/>
+              <a:buFont typeface="Arial"/>
               <a:buNone/>
             </a:pPr>
             <a:r>
               <a:t/>
             </a:r>
-            <a:endParaRPr/>
+            <a:endParaRPr b="0" i="0" sz="1400" u="none" cap="none" strike="noStrike">
+              <a:solidFill>
+                <a:srgbClr val="000000"/>
+              </a:solidFill>
+              <a:latin typeface="Arial"/>
+              <a:ea typeface="Arial"/>
+              <a:cs typeface="Arial"/>
+              <a:sym typeface="Arial"/>
+            </a:endParaRPr>
           </a:p>
         </p:txBody>
       </p:sp>
@@ -13956,6 +15196,9 @@
           <a:lstStyle/>
           <a:p>
             <a:pPr indent="0" lvl="0" marL="0" marR="0" rtl="0" algn="l">
+              <a:lnSpc>
+                <a:spcPct val="100000"/>
+              </a:lnSpc>
               <a:spcBef>
                 <a:spcPts val="0"/>
               </a:spcBef>
@@ -14094,19 +15337,35 @@
           </a:bodyPr>
           <a:lstStyle/>
           <a:p>
-            <a:pPr indent="0" lvl="0" marL="0" rtl="0" algn="l">
-              <a:spcBef>
-                <a:spcPts val="0"/>
-              </a:spcBef>
-              <a:spcAft>
-                <a:spcPts val="0"/>
-              </a:spcAft>
+            <a:pPr indent="0" lvl="0" marL="0" marR="0" rtl="0" algn="l">
+              <a:lnSpc>
+                <a:spcPct val="100000"/>
+              </a:lnSpc>
+              <a:spcBef>
+                <a:spcPts val="0"/>
+              </a:spcBef>
+              <a:spcAft>
+                <a:spcPts val="0"/>
+              </a:spcAft>
+              <a:buClr>
+                <a:srgbClr val="000000"/>
+              </a:buClr>
+              <a:buSzPts val="1400"/>
+              <a:buFont typeface="Arial"/>
               <a:buNone/>
             </a:pPr>
             <a:r>
               <a:t/>
             </a:r>
-            <a:endParaRPr/>
+            <a:endParaRPr b="0" i="0" sz="1400" u="none" cap="none" strike="noStrike">
+              <a:solidFill>
+                <a:srgbClr val="000000"/>
+              </a:solidFill>
+              <a:latin typeface="Arial"/>
+              <a:ea typeface="Arial"/>
+              <a:cs typeface="Arial"/>
+              <a:sym typeface="Arial"/>
+            </a:endParaRPr>
           </a:p>
         </p:txBody>
       </p:sp>
@@ -14137,19 +15396,35 @@
           </a:bodyPr>
           <a:lstStyle/>
           <a:p>
-            <a:pPr indent="0" lvl="0" marL="0" rtl="0" algn="l">
-              <a:spcBef>
-                <a:spcPts val="0"/>
-              </a:spcBef>
-              <a:spcAft>
-                <a:spcPts val="0"/>
-              </a:spcAft>
+            <a:pPr indent="0" lvl="0" marL="0" marR="0" rtl="0" algn="l">
+              <a:lnSpc>
+                <a:spcPct val="100000"/>
+              </a:lnSpc>
+              <a:spcBef>
+                <a:spcPts val="0"/>
+              </a:spcBef>
+              <a:spcAft>
+                <a:spcPts val="0"/>
+              </a:spcAft>
+              <a:buClr>
+                <a:srgbClr val="000000"/>
+              </a:buClr>
+              <a:buSzPts val="1400"/>
+              <a:buFont typeface="Arial"/>
               <a:buNone/>
             </a:pPr>
             <a:r>
               <a:t/>
             </a:r>
-            <a:endParaRPr/>
+            <a:endParaRPr b="0" i="0" sz="1400" u="none" cap="none" strike="noStrike">
+              <a:solidFill>
+                <a:srgbClr val="000000"/>
+              </a:solidFill>
+              <a:latin typeface="Arial"/>
+              <a:ea typeface="Arial"/>
+              <a:cs typeface="Arial"/>
+              <a:sym typeface="Arial"/>
+            </a:endParaRPr>
           </a:p>
         </p:txBody>
       </p:sp>
@@ -14179,6 +15454,9 @@
           <a:lstStyle/>
           <a:p>
             <a:pPr indent="0" lvl="0" marL="0" marR="0" rtl="0" algn="l">
+              <a:lnSpc>
+                <a:spcPct val="100000"/>
+              </a:lnSpc>
               <a:spcBef>
                 <a:spcPts val="0"/>
               </a:spcBef>
@@ -14317,19 +15595,35 @@
           </a:bodyPr>
           <a:lstStyle/>
           <a:p>
-            <a:pPr indent="0" lvl="0" marL="0" rtl="0" algn="l">
-              <a:spcBef>
-                <a:spcPts val="0"/>
-              </a:spcBef>
-              <a:spcAft>
-                <a:spcPts val="0"/>
-              </a:spcAft>
+            <a:pPr indent="0" lvl="0" marL="0" marR="0" rtl="0" algn="l">
+              <a:lnSpc>
+                <a:spcPct val="100000"/>
+              </a:lnSpc>
+              <a:spcBef>
+                <a:spcPts val="0"/>
+              </a:spcBef>
+              <a:spcAft>
+                <a:spcPts val="0"/>
+              </a:spcAft>
+              <a:buClr>
+                <a:srgbClr val="000000"/>
+              </a:buClr>
+              <a:buSzPts val="1400"/>
+              <a:buFont typeface="Arial"/>
               <a:buNone/>
             </a:pPr>
             <a:r>
               <a:t/>
             </a:r>
-            <a:endParaRPr/>
+            <a:endParaRPr b="0" i="0" sz="1400" u="none" cap="none" strike="noStrike">
+              <a:solidFill>
+                <a:srgbClr val="000000"/>
+              </a:solidFill>
+              <a:latin typeface="Arial"/>
+              <a:ea typeface="Arial"/>
+              <a:cs typeface="Arial"/>
+              <a:sym typeface="Arial"/>
+            </a:endParaRPr>
           </a:p>
         </p:txBody>
       </p:sp>
@@ -14360,19 +15654,35 @@
           </a:bodyPr>
           <a:lstStyle/>
           <a:p>
-            <a:pPr indent="0" lvl="0" marL="0" rtl="0" algn="l">
-              <a:spcBef>
-                <a:spcPts val="0"/>
-              </a:spcBef>
-              <a:spcAft>
-                <a:spcPts val="0"/>
-              </a:spcAft>
+            <a:pPr indent="0" lvl="0" marL="0" marR="0" rtl="0" algn="l">
+              <a:lnSpc>
+                <a:spcPct val="100000"/>
+              </a:lnSpc>
+              <a:spcBef>
+                <a:spcPts val="0"/>
+              </a:spcBef>
+              <a:spcAft>
+                <a:spcPts val="0"/>
+              </a:spcAft>
+              <a:buClr>
+                <a:srgbClr val="000000"/>
+              </a:buClr>
+              <a:buSzPts val="1400"/>
+              <a:buFont typeface="Arial"/>
               <a:buNone/>
             </a:pPr>
             <a:r>
               <a:t/>
             </a:r>
-            <a:endParaRPr/>
+            <a:endParaRPr b="0" i="0" sz="1400" u="none" cap="none" strike="noStrike">
+              <a:solidFill>
+                <a:srgbClr val="000000"/>
+              </a:solidFill>
+              <a:latin typeface="Arial"/>
+              <a:ea typeface="Arial"/>
+              <a:cs typeface="Arial"/>
+              <a:sym typeface="Arial"/>
+            </a:endParaRPr>
           </a:p>
         </p:txBody>
       </p:sp>
@@ -14402,6 +15712,9 @@
           <a:lstStyle/>
           <a:p>
             <a:pPr indent="0" lvl="0" marL="0" marR="0" rtl="0" algn="l">
+              <a:lnSpc>
+                <a:spcPct val="100000"/>
+              </a:lnSpc>
               <a:spcBef>
                 <a:spcPts val="0"/>
               </a:spcBef>
@@ -14531,6 +15844,9 @@
           <a:lstStyle/>
           <a:p>
             <a:pPr indent="0" lvl="0" marL="0" marR="0" rtl="0" algn="r">
+              <a:lnSpc>
+                <a:spcPct val="100000"/>
+              </a:lnSpc>
               <a:spcBef>
                 <a:spcPts val="0"/>
               </a:spcBef>
@@ -14626,6 +15942,9 @@
           <a:lstStyle/>
           <a:p>
             <a:pPr indent="0" lvl="0" marL="0" marR="0" rtl="0" algn="l">
+              <a:lnSpc>
+                <a:spcPct val="100000"/>
+              </a:lnSpc>
               <a:spcBef>
                 <a:spcPts val="0"/>
               </a:spcBef>
@@ -14689,6 +16008,9 @@
           <a:lstStyle/>
           <a:p>
             <a:pPr indent="0" lvl="0" marL="0" marR="0" rtl="0" algn="l">
+              <a:lnSpc>
+                <a:spcPct val="100000"/>
+              </a:lnSpc>
               <a:spcBef>
                 <a:spcPts val="0"/>
               </a:spcBef>
@@ -14761,19 +16083,35 @@
           </a:bodyPr>
           <a:lstStyle/>
           <a:p>
-            <a:pPr indent="0" lvl="0" marL="0" rtl="0" algn="l">
-              <a:spcBef>
-                <a:spcPts val="0"/>
-              </a:spcBef>
-              <a:spcAft>
-                <a:spcPts val="0"/>
-              </a:spcAft>
+            <a:pPr indent="0" lvl="0" marL="0" marR="0" rtl="0" algn="l">
+              <a:lnSpc>
+                <a:spcPct val="100000"/>
+              </a:lnSpc>
+              <a:spcBef>
+                <a:spcPts val="0"/>
+              </a:spcBef>
+              <a:spcAft>
+                <a:spcPts val="0"/>
+              </a:spcAft>
+              <a:buClr>
+                <a:srgbClr val="000000"/>
+              </a:buClr>
+              <a:buSzPts val="1400"/>
+              <a:buFont typeface="Arial"/>
               <a:buNone/>
             </a:pPr>
             <a:r>
               <a:t/>
             </a:r>
-            <a:endParaRPr/>
+            <a:endParaRPr b="0" i="0" sz="1400" u="none" cap="none" strike="noStrike">
+              <a:solidFill>
+                <a:srgbClr val="000000"/>
+              </a:solidFill>
+              <a:latin typeface="Arial"/>
+              <a:ea typeface="Arial"/>
+              <a:cs typeface="Arial"/>
+              <a:sym typeface="Arial"/>
+            </a:endParaRPr>
           </a:p>
         </p:txBody>
       </p:sp>
@@ -14803,6 +16141,9 @@
           <a:lstStyle/>
           <a:p>
             <a:pPr indent="0" lvl="0" marL="0" marR="0" rtl="0" algn="l">
+              <a:lnSpc>
+                <a:spcPct val="100000"/>
+              </a:lnSpc>
               <a:spcBef>
                 <a:spcPts val="0"/>
               </a:spcBef>
@@ -14826,31 +16167,7 @@
                 <a:cs typeface="Calibri"/>
                 <a:sym typeface="Calibri"/>
               </a:rPr>
-              <a:t>1. fázis </a:t>
-            </a:r>
-            <a:r>
-              <a:rPr b="1" lang="en-US" sz="1700">
-                <a:solidFill>
-                  <a:srgbClr val="3FB8AF"/>
-                </a:solidFill>
-                <a:latin typeface="Calibri"/>
-                <a:ea typeface="Calibri"/>
-                <a:cs typeface="Calibri"/>
-                <a:sym typeface="Calibri"/>
-              </a:rPr>
-              <a:t>-</a:t>
-            </a:r>
-            <a:r>
-              <a:rPr b="1" i="0" lang="en-US" sz="1700" u="none" cap="none" strike="noStrike">
-                <a:solidFill>
-                  <a:srgbClr val="3FB8AF"/>
-                </a:solidFill>
-                <a:latin typeface="Calibri"/>
-                <a:ea typeface="Calibri"/>
-                <a:cs typeface="Calibri"/>
-                <a:sym typeface="Calibri"/>
-              </a:rPr>
-              <a:t> Elrendezés</a:t>
+              <a:t>1. fázis - Elrendezés</a:t>
             </a:r>
             <a:endParaRPr b="0" i="0" sz="1700" u="none" cap="none" strike="noStrike">
               <a:solidFill>
@@ -15116,19 +16433,35 @@
           </a:bodyPr>
           <a:lstStyle/>
           <a:p>
-            <a:pPr indent="0" lvl="0" marL="0" rtl="0" algn="l">
-              <a:spcBef>
-                <a:spcPts val="0"/>
-              </a:spcBef>
-              <a:spcAft>
-                <a:spcPts val="0"/>
-              </a:spcAft>
+            <a:pPr indent="0" lvl="0" marL="0" marR="0" rtl="0" algn="l">
+              <a:lnSpc>
+                <a:spcPct val="100000"/>
+              </a:lnSpc>
+              <a:spcBef>
+                <a:spcPts val="0"/>
+              </a:spcBef>
+              <a:spcAft>
+                <a:spcPts val="0"/>
+              </a:spcAft>
+              <a:buClr>
+                <a:srgbClr val="000000"/>
+              </a:buClr>
+              <a:buSzPts val="1400"/>
+              <a:buFont typeface="Arial"/>
               <a:buNone/>
             </a:pPr>
             <a:r>
               <a:t/>
             </a:r>
-            <a:endParaRPr/>
+            <a:endParaRPr b="0" i="0" sz="1400" u="none" cap="none" strike="noStrike">
+              <a:solidFill>
+                <a:srgbClr val="000000"/>
+              </a:solidFill>
+              <a:latin typeface="Arial"/>
+              <a:ea typeface="Arial"/>
+              <a:cs typeface="Arial"/>
+              <a:sym typeface="Arial"/>
+            </a:endParaRPr>
           </a:p>
         </p:txBody>
       </p:sp>
@@ -15158,6 +16491,9 @@
           <a:lstStyle/>
           <a:p>
             <a:pPr indent="0" lvl="0" marL="0" marR="0" rtl="0" algn="l">
+              <a:lnSpc>
+                <a:spcPct val="100000"/>
+              </a:lnSpc>
               <a:spcBef>
                 <a:spcPts val="0"/>
               </a:spcBef>
@@ -15181,31 +16517,7 @@
                 <a:cs typeface="Calibri"/>
                 <a:sym typeface="Calibri"/>
               </a:rPr>
-              <a:t>2. fázis </a:t>
-            </a:r>
-            <a:r>
-              <a:rPr b="1" lang="en-US" sz="1700">
-                <a:solidFill>
-                  <a:srgbClr val="3FB8AF"/>
-                </a:solidFill>
-                <a:latin typeface="Calibri"/>
-                <a:ea typeface="Calibri"/>
-                <a:cs typeface="Calibri"/>
-                <a:sym typeface="Calibri"/>
-              </a:rPr>
-              <a:t>-</a:t>
-            </a:r>
-            <a:r>
-              <a:rPr b="1" i="0" lang="en-US" sz="1700" u="none" cap="none" strike="noStrike">
-                <a:solidFill>
-                  <a:srgbClr val="3FB8AF"/>
-                </a:solidFill>
-                <a:latin typeface="Calibri"/>
-                <a:ea typeface="Calibri"/>
-                <a:cs typeface="Calibri"/>
-                <a:sym typeface="Calibri"/>
-              </a:rPr>
-              <a:t> Szobatípusok</a:t>
+              <a:t>2. fázis - Szobatípusok</a:t>
             </a:r>
             <a:endParaRPr b="0" i="0" sz="1700" u="none" cap="none" strike="noStrike">
               <a:solidFill>
@@ -15533,6 +16845,9 @@
           <a:lstStyle/>
           <a:p>
             <a:pPr indent="0" lvl="0" marL="0" marR="0" rtl="0" algn="r">
+              <a:lnSpc>
+                <a:spcPct val="100000"/>
+              </a:lnSpc>
               <a:spcBef>
                 <a:spcPts val="0"/>
               </a:spcBef>
@@ -15628,6 +16943,9 @@
           <a:lstStyle/>
           <a:p>
             <a:pPr indent="0" lvl="0" marL="0" marR="0" rtl="0" algn="l">
+              <a:lnSpc>
+                <a:spcPct val="100000"/>
+              </a:lnSpc>
               <a:spcBef>
                 <a:spcPts val="0"/>
               </a:spcBef>
@@ -15691,6 +17009,9 @@
           <a:lstStyle/>
           <a:p>
             <a:pPr indent="0" lvl="0" marL="0" marR="0" rtl="0" algn="l">
+              <a:lnSpc>
+                <a:spcPct val="100000"/>
+              </a:lnSpc>
               <a:spcBef>
                 <a:spcPts val="0"/>
               </a:spcBef>
@@ -15705,7 +17026,7 @@
               <a:buNone/>
             </a:pPr>
             <a:r>
-              <a:rPr b="1" lang="en-US" sz="3200">
+              <a:rPr b="1" i="0" lang="en-US" sz="3200" u="none" cap="none" strike="noStrike">
                 <a:solidFill>
                   <a:srgbClr val="EDE7F2"/>
                 </a:solidFill>
@@ -15754,6 +17075,9 @@
           <a:lstStyle/>
           <a:p>
             <a:pPr indent="0" lvl="0" marL="0" marR="0" rtl="0" algn="l">
+              <a:lnSpc>
+                <a:spcPct val="100000"/>
+              </a:lnSpc>
               <a:spcBef>
                 <a:spcPts val="0"/>
               </a:spcBef>
@@ -15817,6 +17141,9 @@
           <a:lstStyle/>
           <a:p>
             <a:pPr indent="-190500" lvl="0" marL="190500" marR="0" rtl="0" algn="l">
+              <a:lnSpc>
+                <a:spcPct val="100000"/>
+              </a:lnSpc>
               <a:spcBef>
                 <a:spcPts val="0"/>
               </a:spcBef>
@@ -15854,6 +17181,9 @@
           </a:p>
           <a:p>
             <a:pPr indent="-190500" lvl="0" marL="190500" marR="0" rtl="0" algn="l">
+              <a:lnSpc>
+                <a:spcPct val="100000"/>
+              </a:lnSpc>
               <a:spcBef>
                 <a:spcPts val="800"/>
               </a:spcBef>
@@ -15891,6 +17221,9 @@
           </a:p>
           <a:p>
             <a:pPr indent="-190500" lvl="0" marL="190500" marR="0" rtl="0" algn="l">
+              <a:lnSpc>
+                <a:spcPct val="100000"/>
+              </a:lnSpc>
               <a:spcBef>
                 <a:spcPts val="800"/>
               </a:spcBef>
@@ -15928,6 +17261,9 @@
           </a:p>
           <a:p>
             <a:pPr indent="-190500" lvl="0" marL="190500" marR="0" rtl="0" algn="l">
+              <a:lnSpc>
+                <a:spcPct val="100000"/>
+              </a:lnSpc>
               <a:spcBef>
                 <a:spcPts val="800"/>
               </a:spcBef>
@@ -15951,21 +17287,9 @@
                 <a:cs typeface="Calibri"/>
                 <a:sym typeface="Calibri"/>
               </a:rPr>
-              <a:t>A főellenség a </a:t>
-            </a:r>
-            <a:r>
-              <a:rPr lang="en-US" sz="1300">
-                <a:solidFill>
-                  <a:srgbClr val="EDE7F2"/>
-                </a:solidFill>
-                <a:latin typeface="Calibri"/>
-                <a:ea typeface="Calibri"/>
-                <a:cs typeface="Calibri"/>
-                <a:sym typeface="Calibri"/>
-              </a:rPr>
-              <a:t>kezdő szobától eső legtávolabbi szoba</a:t>
-            </a:r>
-            <a:endParaRPr sz="1300">
+              <a:t>A főellenség a kezdő szobától eső legtávolabbi szoba</a:t>
+            </a:r>
+            <a:endParaRPr b="0" i="0" sz="1300" u="none" cap="none" strike="noStrike">
               <a:solidFill>
                 <a:srgbClr val="EDE7F2"/>
               </a:solidFill>
@@ -15977,18 +17301,26 @@
           </a:p>
           <a:p>
             <a:pPr indent="0" lvl="0" marL="457200" marR="0" rtl="0" algn="l">
+              <a:lnSpc>
+                <a:spcPct val="100000"/>
+              </a:lnSpc>
               <a:spcBef>
                 <a:spcPts val="800"/>
               </a:spcBef>
               <a:spcAft>
                 <a:spcPts val="0"/>
               </a:spcAft>
+              <a:buClr>
+                <a:srgbClr val="000000"/>
+              </a:buClr>
+              <a:buSzPts val="1300"/>
+              <a:buFont typeface="Arial"/>
               <a:buNone/>
             </a:pPr>
             <a:r>
               <a:t/>
             </a:r>
-            <a:endParaRPr sz="1300">
+            <a:endParaRPr b="0" i="0" sz="1300" u="none" cap="none" strike="noStrike">
               <a:solidFill>
                 <a:srgbClr val="EDE7F2"/>
               </a:solidFill>
@@ -16026,6 +17358,9 @@
           <a:lstStyle/>
           <a:p>
             <a:pPr indent="0" lvl="0" marL="0" marR="0" rtl="0" algn="r">
+              <a:lnSpc>
+                <a:spcPct val="100000"/>
+              </a:lnSpc>
               <a:spcBef>
                 <a:spcPts val="0"/>
               </a:spcBef>
@@ -16069,13 +17404,12 @@
           <p:cNvPicPr preferRelativeResize="0"/>
           <p:nvPr/>
         </p:nvPicPr>
-        <p:blipFill>
+        <p:blipFill rotWithShape="1">
           <a:blip r:embed="rId3">
             <a:alphaModFix/>
           </a:blip>
-          <a:stretch>
-            <a:fillRect/>
-          </a:stretch>
+          <a:srcRect b="0" l="0" r="0" t="0"/>
+          <a:stretch/>
         </p:blipFill>
         <p:spPr>
           <a:xfrm>
@@ -16149,6 +17483,9 @@
           <a:lstStyle/>
           <a:p>
             <a:pPr indent="0" lvl="0" marL="0" marR="0" rtl="0" algn="l">
+              <a:lnSpc>
+                <a:spcPct val="100000"/>
+              </a:lnSpc>
               <a:spcBef>
                 <a:spcPts val="0"/>
               </a:spcBef>
@@ -16212,6 +17549,9 @@
           <a:lstStyle/>
           <a:p>
             <a:pPr indent="0" lvl="0" marL="0" marR="0" rtl="0" algn="l">
+              <a:lnSpc>
+                <a:spcPct val="100000"/>
+              </a:lnSpc>
               <a:spcBef>
                 <a:spcPts val="0"/>
               </a:spcBef>
@@ -16235,19 +17575,7 @@
                 <a:cs typeface="Cambria"/>
                 <a:sym typeface="Cambria"/>
               </a:rPr>
-              <a:t>Harc: villám</a:t>
-            </a:r>
-            <a:r>
-              <a:rPr b="1" lang="en-US" sz="3200">
-                <a:solidFill>
-                  <a:srgbClr val="EDE7F2"/>
-                </a:solidFill>
-                <a:latin typeface="Cambria"/>
-                <a:ea typeface="Cambria"/>
-                <a:cs typeface="Cambria"/>
-                <a:sym typeface="Cambria"/>
-              </a:rPr>
-              <a:t> csóva</a:t>
+              <a:t>Harc: villám csóva</a:t>
             </a:r>
             <a:endParaRPr b="0" i="0" sz="3200" u="none" cap="none" strike="noStrike">
               <a:solidFill>
@@ -16362,19 +17690,35 @@
           </a:bodyPr>
           <a:lstStyle/>
           <a:p>
-            <a:pPr indent="0" lvl="0" marL="0" rtl="0" algn="l">
-              <a:spcBef>
-                <a:spcPts val="0"/>
-              </a:spcBef>
-              <a:spcAft>
-                <a:spcPts val="0"/>
-              </a:spcAft>
+            <a:pPr indent="0" lvl="0" marL="0" marR="0" rtl="0" algn="l">
+              <a:lnSpc>
+                <a:spcPct val="100000"/>
+              </a:lnSpc>
+              <a:spcBef>
+                <a:spcPts val="0"/>
+              </a:spcBef>
+              <a:spcAft>
+                <a:spcPts val="0"/>
+              </a:spcAft>
+              <a:buClr>
+                <a:srgbClr val="000000"/>
+              </a:buClr>
+              <a:buSzPts val="1400"/>
+              <a:buFont typeface="Arial"/>
               <a:buNone/>
             </a:pPr>
             <a:r>
               <a:t/>
             </a:r>
-            <a:endParaRPr/>
+            <a:endParaRPr b="0" i="0" sz="1400" u="none" cap="none" strike="noStrike">
+              <a:solidFill>
+                <a:srgbClr val="000000"/>
+              </a:solidFill>
+              <a:latin typeface="Arial"/>
+              <a:ea typeface="Arial"/>
+              <a:cs typeface="Arial"/>
+              <a:sym typeface="Arial"/>
+            </a:endParaRPr>
           </a:p>
         </p:txBody>
       </p:sp>
@@ -16405,19 +17749,35 @@
           </a:bodyPr>
           <a:lstStyle/>
           <a:p>
-            <a:pPr indent="0" lvl="0" marL="0" rtl="0" algn="l">
-              <a:spcBef>
-                <a:spcPts val="0"/>
-              </a:spcBef>
-              <a:spcAft>
-                <a:spcPts val="0"/>
-              </a:spcAft>
+            <a:pPr indent="0" lvl="0" marL="0" marR="0" rtl="0" algn="l">
+              <a:lnSpc>
+                <a:spcPct val="100000"/>
+              </a:lnSpc>
+              <a:spcBef>
+                <a:spcPts val="0"/>
+              </a:spcBef>
+              <a:spcAft>
+                <a:spcPts val="0"/>
+              </a:spcAft>
+              <a:buClr>
+                <a:srgbClr val="000000"/>
+              </a:buClr>
+              <a:buSzPts val="1400"/>
+              <a:buFont typeface="Arial"/>
               <a:buNone/>
             </a:pPr>
             <a:r>
               <a:t/>
             </a:r>
-            <a:endParaRPr/>
+            <a:endParaRPr b="0" i="0" sz="1400" u="none" cap="none" strike="noStrike">
+              <a:solidFill>
+                <a:srgbClr val="000000"/>
+              </a:solidFill>
+              <a:latin typeface="Arial"/>
+              <a:ea typeface="Arial"/>
+              <a:cs typeface="Arial"/>
+              <a:sym typeface="Arial"/>
+            </a:endParaRPr>
           </a:p>
         </p:txBody>
       </p:sp>
@@ -16447,6 +17807,9 @@
           <a:lstStyle/>
           <a:p>
             <a:pPr indent="0" lvl="0" marL="0" marR="0" rtl="0" algn="l">
+              <a:lnSpc>
+                <a:spcPct val="100000"/>
+              </a:lnSpc>
               <a:spcBef>
                 <a:spcPts val="0"/>
               </a:spcBef>
@@ -16536,31 +17899,7 @@
                 <a:cs typeface="Calibri"/>
                 <a:sym typeface="Calibri"/>
               </a:rPr>
-              <a:t>Egy overlap-circle lekérdezés csak a közeli ellenségeket gyűjti </a:t>
-            </a:r>
-            <a:r>
-              <a:rPr lang="en-US" sz="1250">
-                <a:solidFill>
-                  <a:srgbClr val="EDE7F2"/>
-                </a:solidFill>
-                <a:latin typeface="Calibri"/>
-                <a:ea typeface="Calibri"/>
-                <a:cs typeface="Calibri"/>
-                <a:sym typeface="Calibri"/>
-              </a:rPr>
-              <a:t>-</a:t>
-            </a:r>
-            <a:r>
-              <a:rPr b="0" i="0" lang="en-US" sz="1250" u="none" cap="none" strike="noStrike">
-                <a:solidFill>
-                  <a:srgbClr val="EDE7F2"/>
-                </a:solidFill>
-                <a:latin typeface="Calibri"/>
-                <a:ea typeface="Calibri"/>
-                <a:cs typeface="Calibri"/>
-                <a:sym typeface="Calibri"/>
-              </a:rPr>
-              <a:t> a szoba többi részét sosem vizsgálja.</a:t>
+              <a:t>Egy overlap-circle lekérdezés csak a közeli ellenségeket gyűjti - a szoba többi részét sosem vizsgálja.</a:t>
             </a:r>
             <a:endParaRPr b="0" i="0" sz="1250" u="none" cap="none" strike="noStrike">
               <a:solidFill>
@@ -16609,19 +17948,35 @@
           </a:bodyPr>
           <a:lstStyle/>
           <a:p>
-            <a:pPr indent="0" lvl="0" marL="0" rtl="0" algn="l">
-              <a:spcBef>
-                <a:spcPts val="0"/>
-              </a:spcBef>
-              <a:spcAft>
-                <a:spcPts val="0"/>
-              </a:spcAft>
+            <a:pPr indent="0" lvl="0" marL="0" marR="0" rtl="0" algn="l">
+              <a:lnSpc>
+                <a:spcPct val="100000"/>
+              </a:lnSpc>
+              <a:spcBef>
+                <a:spcPts val="0"/>
+              </a:spcBef>
+              <a:spcAft>
+                <a:spcPts val="0"/>
+              </a:spcAft>
+              <a:buClr>
+                <a:srgbClr val="000000"/>
+              </a:buClr>
+              <a:buSzPts val="1400"/>
+              <a:buFont typeface="Arial"/>
               <a:buNone/>
             </a:pPr>
             <a:r>
               <a:t/>
             </a:r>
-            <a:endParaRPr/>
+            <a:endParaRPr b="0" i="0" sz="1400" u="none" cap="none" strike="noStrike">
+              <a:solidFill>
+                <a:srgbClr val="000000"/>
+              </a:solidFill>
+              <a:latin typeface="Arial"/>
+              <a:ea typeface="Arial"/>
+              <a:cs typeface="Arial"/>
+              <a:sym typeface="Arial"/>
+            </a:endParaRPr>
           </a:p>
         </p:txBody>
       </p:sp>
@@ -16652,19 +18007,35 @@
           </a:bodyPr>
           <a:lstStyle/>
           <a:p>
-            <a:pPr indent="0" lvl="0" marL="0" rtl="0" algn="l">
-              <a:spcBef>
-                <a:spcPts val="0"/>
-              </a:spcBef>
-              <a:spcAft>
-                <a:spcPts val="0"/>
-              </a:spcAft>
+            <a:pPr indent="0" lvl="0" marL="0" marR="0" rtl="0" algn="l">
+              <a:lnSpc>
+                <a:spcPct val="100000"/>
+              </a:lnSpc>
+              <a:spcBef>
+                <a:spcPts val="0"/>
+              </a:spcBef>
+              <a:spcAft>
+                <a:spcPts val="0"/>
+              </a:spcAft>
+              <a:buClr>
+                <a:srgbClr val="000000"/>
+              </a:buClr>
+              <a:buSzPts val="1400"/>
+              <a:buFont typeface="Arial"/>
               <a:buNone/>
             </a:pPr>
             <a:r>
               <a:t/>
             </a:r>
-            <a:endParaRPr/>
+            <a:endParaRPr b="0" i="0" sz="1400" u="none" cap="none" strike="noStrike">
+              <a:solidFill>
+                <a:srgbClr val="000000"/>
+              </a:solidFill>
+              <a:latin typeface="Arial"/>
+              <a:ea typeface="Arial"/>
+              <a:cs typeface="Arial"/>
+              <a:sym typeface="Arial"/>
+            </a:endParaRPr>
           </a:p>
         </p:txBody>
       </p:sp>
@@ -16694,6 +18065,9 @@
           <a:lstStyle/>
           <a:p>
             <a:pPr indent="0" lvl="0" marL="0" marR="0" rtl="0" algn="l">
+              <a:lnSpc>
+                <a:spcPct val="100000"/>
+              </a:lnSpc>
               <a:spcBef>
                 <a:spcPts val="0"/>
               </a:spcBef>
@@ -16783,31 +18157,7 @@
                 <a:cs typeface="Calibri"/>
                 <a:sym typeface="Calibri"/>
               </a:rPr>
-              <a:t>A kúpban lévő minden ellenségre a 2D vektoriális szorzat (2D cross product) adja a merőleges távolságot minden villámhoz </a:t>
-            </a:r>
-            <a:r>
-              <a:rPr lang="en-US" sz="1250">
-                <a:solidFill>
-                  <a:srgbClr val="EDE7F2"/>
-                </a:solidFill>
-                <a:latin typeface="Calibri"/>
-                <a:ea typeface="Calibri"/>
-                <a:cs typeface="Calibri"/>
-                <a:sym typeface="Calibri"/>
-              </a:rPr>
-              <a:t>-</a:t>
-            </a:r>
-            <a:r>
-              <a:rPr b="0" i="0" lang="en-US" sz="1250" u="none" cap="none" strike="noStrike">
-                <a:solidFill>
-                  <a:srgbClr val="EDE7F2"/>
-                </a:solidFill>
-                <a:latin typeface="Calibri"/>
-                <a:ea typeface="Calibri"/>
-                <a:cs typeface="Calibri"/>
-                <a:sym typeface="Calibri"/>
-              </a:rPr>
-              <a:t> megszámolva, hány találja el.</a:t>
+              <a:t>A kúpban lévő minden ellenségre a 2D vektoriális szorzat (2D cross product) adja a merőleges távolságot minden villámhoz - megszámolva, hány találja el.</a:t>
             </a:r>
             <a:endParaRPr b="0" i="0" sz="1250" u="none" cap="none" strike="noStrike">
               <a:solidFill>
@@ -16856,19 +18206,35 @@
           </a:bodyPr>
           <a:lstStyle/>
           <a:p>
-            <a:pPr indent="0" lvl="0" marL="0" rtl="0" algn="l">
-              <a:spcBef>
-                <a:spcPts val="0"/>
-              </a:spcBef>
-              <a:spcAft>
-                <a:spcPts val="0"/>
-              </a:spcAft>
+            <a:pPr indent="0" lvl="0" marL="0" marR="0" rtl="0" algn="l">
+              <a:lnSpc>
+                <a:spcPct val="100000"/>
+              </a:lnSpc>
+              <a:spcBef>
+                <a:spcPts val="0"/>
+              </a:spcBef>
+              <a:spcAft>
+                <a:spcPts val="0"/>
+              </a:spcAft>
+              <a:buClr>
+                <a:srgbClr val="000000"/>
+              </a:buClr>
+              <a:buSzPts val="1400"/>
+              <a:buFont typeface="Arial"/>
               <a:buNone/>
             </a:pPr>
             <a:r>
               <a:t/>
             </a:r>
-            <a:endParaRPr/>
+            <a:endParaRPr b="0" i="0" sz="1400" u="none" cap="none" strike="noStrike">
+              <a:solidFill>
+                <a:srgbClr val="000000"/>
+              </a:solidFill>
+              <a:latin typeface="Arial"/>
+              <a:ea typeface="Arial"/>
+              <a:cs typeface="Arial"/>
+              <a:sym typeface="Arial"/>
+            </a:endParaRPr>
           </a:p>
         </p:txBody>
       </p:sp>
@@ -16899,19 +18265,35 @@
           </a:bodyPr>
           <a:lstStyle/>
           <a:p>
-            <a:pPr indent="0" lvl="0" marL="0" rtl="0" algn="l">
-              <a:spcBef>
-                <a:spcPts val="0"/>
-              </a:spcBef>
-              <a:spcAft>
-                <a:spcPts val="0"/>
-              </a:spcAft>
+            <a:pPr indent="0" lvl="0" marL="0" marR="0" rtl="0" algn="l">
+              <a:lnSpc>
+                <a:spcPct val="100000"/>
+              </a:lnSpc>
+              <a:spcBef>
+                <a:spcPts val="0"/>
+              </a:spcBef>
+              <a:spcAft>
+                <a:spcPts val="0"/>
+              </a:spcAft>
+              <a:buClr>
+                <a:srgbClr val="000000"/>
+              </a:buClr>
+              <a:buSzPts val="1400"/>
+              <a:buFont typeface="Arial"/>
               <a:buNone/>
             </a:pPr>
             <a:r>
               <a:t/>
             </a:r>
-            <a:endParaRPr/>
+            <a:endParaRPr b="0" i="0" sz="1400" u="none" cap="none" strike="noStrike">
+              <a:solidFill>
+                <a:srgbClr val="000000"/>
+              </a:solidFill>
+              <a:latin typeface="Arial"/>
+              <a:ea typeface="Arial"/>
+              <a:cs typeface="Arial"/>
+              <a:sym typeface="Arial"/>
+            </a:endParaRPr>
           </a:p>
         </p:txBody>
       </p:sp>
@@ -16941,6 +18323,9 @@
           <a:lstStyle/>
           <a:p>
             <a:pPr indent="0" lvl="0" marL="0" marR="0" rtl="0" algn="l">
+              <a:lnSpc>
+                <a:spcPct val="100000"/>
+              </a:lnSpc>
               <a:spcBef>
                 <a:spcPts val="0"/>
               </a:spcBef>
@@ -17070,6 +18455,9 @@
           <a:lstStyle/>
           <a:p>
             <a:pPr indent="0" lvl="0" marL="0" marR="0" rtl="0" algn="r">
+              <a:lnSpc>
+                <a:spcPct val="100000"/>
+              </a:lnSpc>
               <a:spcBef>
                 <a:spcPts val="0"/>
               </a:spcBef>
@@ -17165,6 +18553,9 @@
           <a:lstStyle/>
           <a:p>
             <a:pPr indent="0" lvl="0" marL="0" marR="0" rtl="0" algn="l">
+              <a:lnSpc>
+                <a:spcPct val="100000"/>
+              </a:lnSpc>
               <a:spcBef>
                 <a:spcPts val="0"/>
               </a:spcBef>
@@ -17228,6 +18619,9 @@
           <a:lstStyle/>
           <a:p>
             <a:pPr indent="0" lvl="0" marL="0" marR="0" rtl="0" algn="l">
+              <a:lnSpc>
+                <a:spcPct val="100000"/>
+              </a:lnSpc>
               <a:spcBef>
                 <a:spcPts val="0"/>
               </a:spcBef>
@@ -17300,19 +18694,35 @@
           </a:bodyPr>
           <a:lstStyle/>
           <a:p>
-            <a:pPr indent="0" lvl="0" marL="0" rtl="0" algn="l">
-              <a:spcBef>
-                <a:spcPts val="0"/>
-              </a:spcBef>
-              <a:spcAft>
-                <a:spcPts val="0"/>
-              </a:spcAft>
+            <a:pPr indent="0" lvl="0" marL="0" marR="0" rtl="0" algn="l">
+              <a:lnSpc>
+                <a:spcPct val="100000"/>
+              </a:lnSpc>
+              <a:spcBef>
+                <a:spcPts val="0"/>
+              </a:spcBef>
+              <a:spcAft>
+                <a:spcPts val="0"/>
+              </a:spcAft>
+              <a:buClr>
+                <a:srgbClr val="000000"/>
+              </a:buClr>
+              <a:buSzPts val="1400"/>
+              <a:buFont typeface="Arial"/>
               <a:buNone/>
             </a:pPr>
             <a:r>
               <a:t/>
             </a:r>
-            <a:endParaRPr/>
+            <a:endParaRPr b="0" i="0" sz="1400" u="none" cap="none" strike="noStrike">
+              <a:solidFill>
+                <a:srgbClr val="000000"/>
+              </a:solidFill>
+              <a:latin typeface="Arial"/>
+              <a:ea typeface="Arial"/>
+              <a:cs typeface="Arial"/>
+              <a:sym typeface="Arial"/>
+            </a:endParaRPr>
           </a:p>
         </p:txBody>
       </p:sp>
@@ -17343,19 +18753,35 @@
           </a:bodyPr>
           <a:lstStyle/>
           <a:p>
-            <a:pPr indent="0" lvl="0" marL="0" rtl="0" algn="l">
-              <a:spcBef>
-                <a:spcPts val="0"/>
-              </a:spcBef>
-              <a:spcAft>
-                <a:spcPts val="0"/>
-              </a:spcAft>
+            <a:pPr indent="0" lvl="0" marL="0" marR="0" rtl="0" algn="l">
+              <a:lnSpc>
+                <a:spcPct val="100000"/>
+              </a:lnSpc>
+              <a:spcBef>
+                <a:spcPts val="0"/>
+              </a:spcBef>
+              <a:spcAft>
+                <a:spcPts val="0"/>
+              </a:spcAft>
+              <a:buClr>
+                <a:srgbClr val="000000"/>
+              </a:buClr>
+              <a:buSzPts val="1400"/>
+              <a:buFont typeface="Arial"/>
               <a:buNone/>
             </a:pPr>
             <a:r>
               <a:t/>
             </a:r>
-            <a:endParaRPr/>
+            <a:endParaRPr b="0" i="0" sz="1400" u="none" cap="none" strike="noStrike">
+              <a:solidFill>
+                <a:srgbClr val="000000"/>
+              </a:solidFill>
+              <a:latin typeface="Arial"/>
+              <a:ea typeface="Arial"/>
+              <a:cs typeface="Arial"/>
+              <a:sym typeface="Arial"/>
+            </a:endParaRPr>
           </a:p>
         </p:txBody>
       </p:sp>
@@ -17385,6 +18811,9 @@
           <a:lstStyle/>
           <a:p>
             <a:pPr indent="0" lvl="0" marL="0" marR="0" rtl="0" algn="l">
+              <a:lnSpc>
+                <a:spcPct val="100000"/>
+              </a:lnSpc>
               <a:spcBef>
                 <a:spcPts val="0"/>
               </a:spcBef>
@@ -17514,10 +18943,69 @@
                 <a:cs typeface="Calibri"/>
                 <a:sym typeface="Calibri"/>
               </a:rPr>
-              <a:t>Minden tárgy egy ScriptableObject egy hatással (gyorsabb </a:t>
-            </a:r>
-            <a:r>
-              <a:rPr lang="en-US" sz="1300">
+              <a:t>Minden tárgy egy hatással (gyorsabb támadás, plusz lövedék, regeneráció…).</a:t>
+            </a:r>
+            <a:endParaRPr b="0" i="0" sz="1300" u="none" cap="none" strike="noStrike">
+              <a:solidFill>
+                <a:schemeClr val="dk1"/>
+              </a:solidFill>
+              <a:latin typeface="Calibri"/>
+              <a:ea typeface="Calibri"/>
+              <a:cs typeface="Calibri"/>
+              <a:sym typeface="Calibri"/>
+            </a:endParaRPr>
+          </a:p>
+          <a:p>
+            <a:pPr indent="0" lvl="0" marL="0" marR="0" rtl="0" algn="l">
+              <a:lnSpc>
+                <a:spcPct val="120000"/>
+              </a:lnSpc>
+              <a:spcBef>
+                <a:spcPts val="0"/>
+              </a:spcBef>
+              <a:spcAft>
+                <a:spcPts val="0"/>
+              </a:spcAft>
+              <a:buClr>
+                <a:schemeClr val="dk1"/>
+              </a:buClr>
+              <a:buSzPts val="1300"/>
+              <a:buFont typeface="Calibri"/>
+              <a:buNone/>
+            </a:pPr>
+            <a:r>
+              <a:t/>
+            </a:r>
+            <a:endParaRPr b="0" i="0" sz="1300" u="none" cap="none" strike="noStrike">
+              <a:solidFill>
+                <a:schemeClr val="dk1"/>
+              </a:solidFill>
+              <a:latin typeface="Calibri"/>
+              <a:ea typeface="Calibri"/>
+              <a:cs typeface="Calibri"/>
+              <a:sym typeface="Calibri"/>
+            </a:endParaRPr>
+          </a:p>
+          <a:p>
+            <a:pPr indent="0" lvl="0" marL="0" marR="0" rtl="0" algn="l">
+              <a:lnSpc>
+                <a:spcPct val="120000"/>
+              </a:lnSpc>
+              <a:spcBef>
+                <a:spcPts val="0"/>
+              </a:spcBef>
+              <a:spcAft>
+                <a:spcPts val="0"/>
+              </a:spcAft>
+              <a:buClr>
+                <a:srgbClr val="EDE7F2"/>
+              </a:buClr>
+              <a:buSzPts val="1300"/>
+              <a:buFont typeface="Calibri"/>
+              <a:buNone/>
+            </a:pPr>
+            <a:r>
+              <a:rPr b="0" i="0" lang="en-US" sz="1300" u="none" cap="none" strike="noStrike">
                 <a:solidFill>
                   <a:srgbClr val="EDE7F2"/>
                 </a:solidFill>
@@ -17526,114 +19014,7 @@
                 <a:cs typeface="Calibri"/>
                 <a:sym typeface="Calibri"/>
               </a:rPr>
-              <a:t>támadás</a:t>
-            </a:r>
-            <a:r>
-              <a:rPr b="0" i="0" lang="en-US" sz="1300" u="none" cap="none" strike="noStrike">
-                <a:solidFill>
-                  <a:srgbClr val="EDE7F2"/>
-                </a:solidFill>
-                <a:latin typeface="Calibri"/>
-                <a:ea typeface="Calibri"/>
-                <a:cs typeface="Calibri"/>
-                <a:sym typeface="Calibri"/>
-              </a:rPr>
-              <a:t>, plusz lövedék, regeneráció…).</a:t>
-            </a:r>
-            <a:endParaRPr b="0" i="0" sz="1300" u="none" cap="none" strike="noStrike">
-              <a:solidFill>
-                <a:schemeClr val="dk1"/>
-              </a:solidFill>
-              <a:latin typeface="Calibri"/>
-              <a:ea typeface="Calibri"/>
-              <a:cs typeface="Calibri"/>
-              <a:sym typeface="Calibri"/>
-            </a:endParaRPr>
-          </a:p>
-          <a:p>
-            <a:pPr indent="0" lvl="0" marL="0" marR="0" rtl="0" algn="l">
-              <a:lnSpc>
-                <a:spcPct val="120000"/>
-              </a:lnSpc>
-              <a:spcBef>
-                <a:spcPts val="0"/>
-              </a:spcBef>
-              <a:spcAft>
-                <a:spcPts val="0"/>
-              </a:spcAft>
-              <a:buClr>
-                <a:schemeClr val="dk1"/>
-              </a:buClr>
-              <a:buSzPts val="1300"/>
-              <a:buFont typeface="Calibri"/>
-              <a:buNone/>
-            </a:pPr>
-            <a:r>
-              <a:t/>
-            </a:r>
-            <a:endParaRPr b="0" i="0" sz="1300" u="none" cap="none" strike="noStrike">
-              <a:solidFill>
-                <a:schemeClr val="dk1"/>
-              </a:solidFill>
-              <a:latin typeface="Calibri"/>
-              <a:ea typeface="Calibri"/>
-              <a:cs typeface="Calibri"/>
-              <a:sym typeface="Calibri"/>
-            </a:endParaRPr>
-          </a:p>
-          <a:p>
-            <a:pPr indent="0" lvl="0" marL="0" marR="0" rtl="0" algn="l">
-              <a:lnSpc>
-                <a:spcPct val="120000"/>
-              </a:lnSpc>
-              <a:spcBef>
-                <a:spcPts val="0"/>
-              </a:spcBef>
-              <a:spcAft>
-                <a:spcPts val="0"/>
-              </a:spcAft>
-              <a:buClr>
-                <a:srgbClr val="EDE7F2"/>
-              </a:buClr>
-              <a:buSzPts val="1300"/>
-              <a:buFont typeface="Calibri"/>
-              <a:buNone/>
-            </a:pPr>
-            <a:r>
-              <a:rPr b="0" i="0" lang="en-US" sz="1300" u="none" cap="none" strike="noStrike">
-                <a:solidFill>
-                  <a:srgbClr val="EDE7F2"/>
-                </a:solidFill>
-                <a:latin typeface="Calibri"/>
-                <a:ea typeface="Calibri"/>
-                <a:cs typeface="Calibri"/>
-                <a:sym typeface="Calibri"/>
-              </a:rPr>
-              <a:t>Shuffle bagből húzva </a:t>
-            </a:r>
-            <a:r>
-              <a:rPr lang="en-US" sz="1300">
-                <a:solidFill>
-                  <a:srgbClr val="EDE7F2"/>
-                </a:solidFill>
-                <a:latin typeface="Calibri"/>
-                <a:ea typeface="Calibri"/>
-                <a:cs typeface="Calibri"/>
-                <a:sym typeface="Calibri"/>
-              </a:rPr>
-              <a:t>-</a:t>
-            </a:r>
-            <a:r>
-              <a:rPr b="0" i="0" lang="en-US" sz="1300" u="none" cap="none" strike="noStrike">
-                <a:solidFill>
-                  <a:srgbClr val="EDE7F2"/>
-                </a:solidFill>
-                <a:latin typeface="Calibri"/>
-                <a:ea typeface="Calibri"/>
-                <a:cs typeface="Calibri"/>
-                <a:sym typeface="Calibri"/>
-              </a:rPr>
-              <a:t> egy tárgy sem ismétlődik egy játszmán belül.</a:t>
+              <a:t>Shuffle bagből húzva - egy tárgy sem ismétlődik egy játszmán belül.</a:t>
             </a:r>
             <a:endParaRPr b="0" i="0" sz="1300" u="none" cap="none" strike="noStrike">
               <a:solidFill>
@@ -17682,19 +19063,35 @@
           </a:bodyPr>
           <a:lstStyle/>
           <a:p>
-            <a:pPr indent="0" lvl="0" marL="0" rtl="0" algn="l">
-              <a:spcBef>
-                <a:spcPts val="0"/>
-              </a:spcBef>
-              <a:spcAft>
-                <a:spcPts val="0"/>
-              </a:spcAft>
+            <a:pPr indent="0" lvl="0" marL="0" marR="0" rtl="0" algn="l">
+              <a:lnSpc>
+                <a:spcPct val="100000"/>
+              </a:lnSpc>
+              <a:spcBef>
+                <a:spcPts val="0"/>
+              </a:spcBef>
+              <a:spcAft>
+                <a:spcPts val="0"/>
+              </a:spcAft>
+              <a:buClr>
+                <a:srgbClr val="000000"/>
+              </a:buClr>
+              <a:buSzPts val="1400"/>
+              <a:buFont typeface="Arial"/>
               <a:buNone/>
             </a:pPr>
             <a:r>
               <a:t/>
             </a:r>
-            <a:endParaRPr/>
+            <a:endParaRPr b="0" i="0" sz="1400" u="none" cap="none" strike="noStrike">
+              <a:solidFill>
+                <a:srgbClr val="000000"/>
+              </a:solidFill>
+              <a:latin typeface="Arial"/>
+              <a:ea typeface="Arial"/>
+              <a:cs typeface="Arial"/>
+              <a:sym typeface="Arial"/>
+            </a:endParaRPr>
           </a:p>
         </p:txBody>
       </p:sp>
@@ -17725,19 +19122,35 @@
           </a:bodyPr>
           <a:lstStyle/>
           <a:p>
-            <a:pPr indent="0" lvl="0" marL="0" rtl="0" algn="l">
-              <a:spcBef>
-                <a:spcPts val="0"/>
-              </a:spcBef>
-              <a:spcAft>
-                <a:spcPts val="0"/>
-              </a:spcAft>
+            <a:pPr indent="0" lvl="0" marL="0" marR="0" rtl="0" algn="l">
+              <a:lnSpc>
+                <a:spcPct val="100000"/>
+              </a:lnSpc>
+              <a:spcBef>
+                <a:spcPts val="0"/>
+              </a:spcBef>
+              <a:spcAft>
+                <a:spcPts val="0"/>
+              </a:spcAft>
+              <a:buClr>
+                <a:srgbClr val="000000"/>
+              </a:buClr>
+              <a:buSzPts val="1400"/>
+              <a:buFont typeface="Arial"/>
               <a:buNone/>
             </a:pPr>
             <a:r>
               <a:t/>
             </a:r>
-            <a:endParaRPr/>
+            <a:endParaRPr b="0" i="0" sz="1400" u="none" cap="none" strike="noStrike">
+              <a:solidFill>
+                <a:srgbClr val="000000"/>
+              </a:solidFill>
+              <a:latin typeface="Arial"/>
+              <a:ea typeface="Arial"/>
+              <a:cs typeface="Arial"/>
+              <a:sym typeface="Arial"/>
+            </a:endParaRPr>
           </a:p>
         </p:txBody>
       </p:sp>
@@ -17767,6 +19180,9 @@
           <a:lstStyle/>
           <a:p>
             <a:pPr indent="0" lvl="0" marL="0" marR="0" rtl="0" algn="l">
+              <a:lnSpc>
+                <a:spcPct val="100000"/>
+              </a:lnSpc>
               <a:spcBef>
                 <a:spcPts val="0"/>
               </a:spcBef>
@@ -18047,6 +19463,9 @@
           <a:lstStyle/>
           <a:p>
             <a:pPr indent="0" lvl="0" marL="0" marR="0" rtl="0" algn="r">
+              <a:lnSpc>
+                <a:spcPct val="100000"/>
+              </a:lnSpc>
               <a:spcBef>
                 <a:spcPts val="0"/>
               </a:spcBef>
